--- a/pressa/press-kit-genii-prompter.pptx
+++ b/pressa/press-kit-genii-prompter.pptx
@@ -3295,8 +3295,8 @@
         </p:nvSpPr>
         <p:spPr>
           <a:xfrm>
-            <a:off x="685800" y="2057400"/>
-            <a:ext cx="9692640" cy="1810511"/>
+            <a:off x="685800" y="1965960"/>
+            <a:ext cx="10424160" cy="1805432"/>
           </a:xfrm>
           <a:prstGeom prst="rect">
             <a:avLst/>
@@ -3311,17 +3311,18 @@
           <a:p>
             <a:pPr algn="l">
               <a:lnSpc>
-                <a:spcPct val="114000"/>
+                <a:spcPct val="110000"/>
               </a:lnSpc>
             </a:pPr>
             <a:r>
-              <a:rPr sz="4000" b="1">
+              <a:rPr sz="6200" b="1">
                 <a:solidFill>
                   <a:srgbClr val="FFFFFF"/>
                 </a:solidFill>
                 <a:latin typeface="Unbounded"/>
               </a:rPr>
-              <a:t>Полный ИИ-цикл для бизнеса: от исследования до публикации</a:t>
+              <a:t>Полный ИИ-цикл
+для бизнеса</a:t>
             </a:r>
           </a:p>
         </p:txBody>
@@ -3334,8 +3335,8 @@
         </p:nvSpPr>
         <p:spPr>
           <a:xfrm>
-            <a:off x="685800" y="4215383"/>
-            <a:ext cx="8595360" cy="720852"/>
+            <a:off x="685800" y="4082288"/>
+            <a:ext cx="9509760" cy="464312"/>
           </a:xfrm>
           <a:prstGeom prst="rect">
             <a:avLst/>
@@ -3350,17 +3351,17 @@
           <a:p>
             <a:pPr algn="l">
               <a:lnSpc>
-                <a:spcPct val="150000"/>
+                <a:spcPct val="140000"/>
               </a:lnSpc>
             </a:pPr>
             <a:r>
-              <a:rPr sz="1700" b="0">
+              <a:rPr sz="2200" b="0">
                 <a:solidFill>
                   <a:srgbClr val="D6E4FF"/>
                 </a:solidFill>
                 <a:latin typeface="Inter"/>
               </a:rPr>
-              <a:t>Исследование, стратегия, генерация текстов, картинок и видео, автопубликация на 6+ площадках. Продвижение в SEO и GEO.</a:t>
+              <a:t>От исследования ниши до публикации на шести площадках</a:t>
             </a:r>
           </a:p>
         </p:txBody>
@@ -3373,8 +3374,8 @@
         </p:nvSpPr>
         <p:spPr>
           <a:xfrm>
-            <a:off x="685800" y="5366003"/>
-            <a:ext cx="1371600" cy="23774"/>
+            <a:off x="685800" y="5113528"/>
+            <a:ext cx="2011680" cy="32004"/>
           </a:xfrm>
           <a:prstGeom prst="rect">
             <a:avLst/>
@@ -3417,8 +3418,8 @@
         </p:nvSpPr>
         <p:spPr>
           <a:xfrm>
-            <a:off x="685800" y="5640323"/>
-            <a:ext cx="8229600" cy="337312"/>
+            <a:off x="685800" y="5433568"/>
+            <a:ext cx="9144000" cy="386842"/>
           </a:xfrm>
           <a:prstGeom prst="rect">
             <a:avLst/>
@@ -3437,7 +3438,7 @@
               </a:lnSpc>
             </a:pPr>
             <a:r>
-              <a:rPr sz="1600" b="1">
+              <a:rPr sz="1900" b="1">
                 <a:solidFill>
                   <a:srgbClr val="FFFFFF"/>
                 </a:solidFill>
@@ -3446,7 +3447,7 @@
               <a:t>Руслан Анатольевич Дёмин</a:t>
             </a:r>
             <a:r>
-              <a:rPr sz="1600" b="0">
+              <a:rPr sz="1900" b="0">
                 <a:solidFill>
                   <a:srgbClr val="9FB6DC"/>
                 </a:solidFill>
@@ -3465,8 +3466,8 @@
         </p:nvSpPr>
         <p:spPr>
           <a:xfrm>
-            <a:off x="685800" y="6172200"/>
-            <a:ext cx="10789920" cy="277622"/>
+            <a:off x="685800" y="6144768"/>
+            <a:ext cx="10789920" cy="286511"/>
           </a:xfrm>
           <a:prstGeom prst="rect">
             <a:avLst/>
@@ -3485,7 +3486,7 @@
               </a:lnSpc>
             </a:pPr>
             <a:r>
-              <a:rPr sz="1150" b="0">
+              <a:rPr sz="1200" b="0">
                 <a:solidFill>
                   <a:srgbClr val="9FB6DC"/>
                 </a:solidFill>
@@ -3731,8 +3732,8 @@
         </p:nvSpPr>
         <p:spPr>
           <a:xfrm>
-            <a:off x="685800" y="1417320"/>
-            <a:ext cx="9905695" cy="986536"/>
+            <a:off x="1143000" y="1600200"/>
+            <a:ext cx="10271455" cy="2473452"/>
           </a:xfrm>
           <a:prstGeom prst="rect">
             <a:avLst/>
@@ -3747,44 +3748,40 @@
           <a:p>
             <a:pPr algn="l">
               <a:lnSpc>
-                <a:spcPct val="116000"/>
+                <a:spcPct val="126000"/>
               </a:lnSpc>
             </a:pPr>
             <a:r>
-              <a:rPr sz="3100" b="1">
+              <a:rPr sz="3000" b="0">
                 <a:solidFill>
                   <a:srgbClr val="FFFFFF"/>
                 </a:solidFill>
                 <a:latin typeface="Unbounded"/>
               </a:rPr>
-              <a:t>Контент-фабрики есть у всех. Управляет ими всё равно человек</a:t>
-            </a:r>
-          </a:p>
-        </p:txBody>
-      </p:sp>
-      <p:sp>
-        <p:nvSpPr>
-          <p:cNvPr id="9" name="Rounded Rectangle 8"/>
+              <a:t>«Контент-фабрики есть у всех, это не новость. Новость в том, что управление циклом можно отдать самому ИИ: он знает правила своих собратьев лучше человека»</a:t>
+            </a:r>
+          </a:p>
+        </p:txBody>
+      </p:sp>
+      <p:sp>
+        <p:nvSpPr>
+          <p:cNvPr id="9" name="Rectangle 8"/>
           <p:cNvSpPr/>
           <p:nvPr/>
         </p:nvSpPr>
         <p:spPr>
           <a:xfrm>
-            <a:off x="685800" y="2697480"/>
-            <a:ext cx="1681429" cy="1234440"/>
-          </a:xfrm>
-          <a:prstGeom prst="roundRect">
-            <a:avLst>
-              <a:gd name="adj" fmla="val 10370"/>
-            </a:avLst>
+            <a:off x="685800" y="1673352"/>
+            <a:ext cx="82296" cy="2363724"/>
+          </a:xfrm>
+          <a:prstGeom prst="rect">
+            <a:avLst/>
           </a:prstGeom>
           <a:solidFill>
-            <a:srgbClr val="152343"/>
+            <a:srgbClr val="7FC4FF"/>
           </a:solidFill>
-          <a:ln w="12700">
-            <a:solidFill>
-              <a:srgbClr val="2C4478"/>
-            </a:solidFill>
+          <a:ln>
+            <a:noFill/>
           </a:ln>
           <a:effectLst/>
         </p:spPr>
@@ -3818,8 +3815,8 @@
         </p:nvSpPr>
         <p:spPr>
           <a:xfrm>
-            <a:off x="832104" y="2880360"/>
-            <a:ext cx="1388821" cy="731520"/>
+            <a:off x="1143000" y="4366260"/>
+            <a:ext cx="10271455" cy="320802"/>
           </a:xfrm>
           <a:prstGeom prst="rect">
             <a:avLst/>
@@ -3834,83 +3831,49 @@
           <a:p>
             <a:pPr algn="l">
               <a:lnSpc>
-                <a:spcPct val="125000"/>
+                <a:spcPct val="130000"/>
               </a:lnSpc>
             </a:pPr>
             <a:r>
-              <a:rPr sz="1250" b="1">
-                <a:solidFill>
-                  <a:srgbClr val="FFFFFF"/>
+              <a:rPr sz="1500" b="1">
+                <a:solidFill>
+                  <a:srgbClr val="7FC4FF"/>
                 </a:solidFill>
                 <a:latin typeface="Inter"/>
               </a:rPr>
-              <a:t>Исследование</a:t>
-            </a:r>
-          </a:p>
-        </p:txBody>
-      </p:sp>
-      <p:sp>
-        <p:nvSpPr>
-          <p:cNvPr id="11" name="TextBox 10"/>
-          <p:cNvSpPr txBox="1"/>
-          <p:nvPr/>
-        </p:nvSpPr>
-        <p:spPr>
-          <a:xfrm>
-            <a:off x="832104" y="3529584"/>
-            <a:ext cx="1388821" cy="274320"/>
-          </a:xfrm>
-          <a:prstGeom prst="rect">
-            <a:avLst/>
-          </a:prstGeom>
-          <a:noFill/>
-        </p:spPr>
-        <p:txBody>
-          <a:bodyPr wrap="square" lIns="0" rIns="0" tIns="0" bIns="0" anchor="t">
-            <a:spAutoFit/>
-          </a:bodyPr>
-          <a:lstStyle/>
-          <a:p>
-            <a:pPr algn="l">
-              <a:lnSpc>
-                <a:spcPct val="120000"/>
-              </a:lnSpc>
-            </a:pPr>
-            <a:r>
-              <a:rPr sz="1000" b="0">
+              <a:t>Руслан Анатольевич Дёмин, </a:t>
+            </a:r>
+            <a:r>
+              <a:rPr sz="1500" b="0">
                 <a:solidFill>
                   <a:srgbClr val="9FB6DC"/>
                 </a:solidFill>
                 <a:latin typeface="Inter"/>
               </a:rPr>
-              <a:t>машина</a:t>
-            </a:r>
-          </a:p>
-        </p:txBody>
-      </p:sp>
-      <p:sp>
-        <p:nvSpPr>
-          <p:cNvPr id="12" name="Rounded Rectangle 11"/>
+              <a:t>управляющий партнёр</a:t>
+            </a:r>
+          </a:p>
+        </p:txBody>
+      </p:sp>
+      <p:sp>
+        <p:nvSpPr>
+          <p:cNvPr id="11" name="Rectangle 10"/>
           <p:cNvSpPr/>
           <p:nvPr/>
         </p:nvSpPr>
         <p:spPr>
           <a:xfrm>
-            <a:off x="2513533" y="2697480"/>
-            <a:ext cx="1681429" cy="1234440"/>
-          </a:xfrm>
-          <a:prstGeom prst="roundRect">
-            <a:avLst>
-              <a:gd name="adj" fmla="val 10370"/>
-            </a:avLst>
+            <a:off x="685800" y="5166360"/>
+            <a:ext cx="10820095" cy="10972"/>
+          </a:xfrm>
+          <a:prstGeom prst="rect">
+            <a:avLst/>
           </a:prstGeom>
           <a:solidFill>
-            <a:srgbClr val="152343"/>
+            <a:srgbClr val="3E5C9C"/>
           </a:solidFill>
-          <a:ln w="12700">
-            <a:solidFill>
-              <a:srgbClr val="2C4478"/>
-            </a:solidFill>
+          <a:ln>
+            <a:noFill/>
           </a:ln>
           <a:effectLst/>
         </p:spPr>
@@ -3938,14 +3901,14 @@
       </p:sp>
       <p:sp>
         <p:nvSpPr>
-          <p:cNvPr id="13" name="TextBox 12"/>
+          <p:cNvPr id="12" name="TextBox 11"/>
           <p:cNvSpPr txBox="1"/>
           <p:nvPr/>
         </p:nvSpPr>
         <p:spPr>
           <a:xfrm>
-            <a:off x="2659837" y="2880360"/>
-            <a:ext cx="1388821" cy="731520"/>
+            <a:off x="685800" y="5413248"/>
+            <a:ext cx="10820095" cy="381762"/>
           </a:xfrm>
           <a:prstGeom prst="rect">
             <a:avLst/>
@@ -3960,31 +3923,40 @@
           <a:p>
             <a:pPr algn="l">
               <a:lnSpc>
-                <a:spcPct val="125000"/>
+                <a:spcPct val="135000"/>
               </a:lnSpc>
             </a:pPr>
             <a:r>
-              <a:rPr sz="1250" b="1">
-                <a:solidFill>
-                  <a:srgbClr val="FFFFFF"/>
+              <a:rPr sz="1800" b="0">
+                <a:solidFill>
+                  <a:srgbClr val="9FB6DC"/>
                 </a:solidFill>
                 <a:latin typeface="Inter"/>
               </a:rPr>
-              <a:t>Стратегия</a:t>
-            </a:r>
-          </a:p>
-        </p:txBody>
-      </p:sp>
-      <p:sp>
-        <p:nvSpPr>
-          <p:cNvPr id="14" name="TextBox 13"/>
+              <a:t>Исследование · Стратегия · Генерация</a:t>
+            </a:r>
+            <a:r>
+              <a:rPr sz="1800" b="1">
+                <a:solidFill>
+                  <a:srgbClr val="FFFFFF"/>
+                </a:solidFill>
+                <a:latin typeface="Inter"/>
+              </a:rPr>
+              <a:t>      Проверка · Публикация · Анализ</a:t>
+            </a:r>
+          </a:p>
+        </p:txBody>
+      </p:sp>
+      <p:sp>
+        <p:nvSpPr>
+          <p:cNvPr id="13" name="TextBox 12"/>
           <p:cNvSpPr txBox="1"/>
           <p:nvPr/>
         </p:nvSpPr>
         <p:spPr>
           <a:xfrm>
-            <a:off x="2659837" y="3529584"/>
-            <a:ext cx="1388821" cy="274320"/>
+            <a:off x="685800" y="5943600"/>
+            <a:ext cx="10820095" cy="313182"/>
           </a:xfrm>
           <a:prstGeom prst="rect">
             <a:avLst/>
@@ -3999,691 +3971,17 @@
           <a:p>
             <a:pPr algn="l">
               <a:lnSpc>
-                <a:spcPct val="120000"/>
+                <a:spcPct val="135000"/>
               </a:lnSpc>
             </a:pPr>
             <a:r>
-              <a:rPr sz="1000" b="0">
+              <a:rPr sz="1400" b="0">
                 <a:solidFill>
                   <a:srgbClr val="9FB6DC"/>
                 </a:solidFill>
                 <a:latin typeface="Inter"/>
               </a:rPr>
-              <a:t>машина</a:t>
-            </a:r>
-          </a:p>
-        </p:txBody>
-      </p:sp>
-      <p:sp>
-        <p:nvSpPr>
-          <p:cNvPr id="15" name="Rounded Rectangle 14"/>
-          <p:cNvSpPr/>
-          <p:nvPr/>
-        </p:nvSpPr>
-        <p:spPr>
-          <a:xfrm>
-            <a:off x="4341266" y="2697480"/>
-            <a:ext cx="1681429" cy="1234440"/>
-          </a:xfrm>
-          <a:prstGeom prst="roundRect">
-            <a:avLst>
-              <a:gd name="adj" fmla="val 10370"/>
-            </a:avLst>
-          </a:prstGeom>
-          <a:solidFill>
-            <a:srgbClr val="152343"/>
-          </a:solidFill>
-          <a:ln w="12700">
-            <a:solidFill>
-              <a:srgbClr val="2C4478"/>
-            </a:solidFill>
-          </a:ln>
-          <a:effectLst/>
-        </p:spPr>
-        <p:style>
-          <a:lnRef idx="1">
-            <a:schemeClr val="accent1"/>
-          </a:lnRef>
-          <a:fillRef idx="3">
-            <a:schemeClr val="accent1"/>
-          </a:fillRef>
-          <a:effectRef idx="2">
-            <a:schemeClr val="accent1"/>
-          </a:effectRef>
-          <a:fontRef idx="minor">
-            <a:schemeClr val="lt1"/>
-          </a:fontRef>
-        </p:style>
-        <p:txBody>
-          <a:bodyPr rtlCol="0" anchor="ctr"/>
-          <a:lstStyle/>
-          <a:p>
-            <a:pPr algn="ctr"/>
-          </a:p>
-        </p:txBody>
-      </p:sp>
-      <p:sp>
-        <p:nvSpPr>
-          <p:cNvPr id="16" name="TextBox 15"/>
-          <p:cNvSpPr txBox="1"/>
-          <p:nvPr/>
-        </p:nvSpPr>
-        <p:spPr>
-          <a:xfrm>
-            <a:off x="4487570" y="2880360"/>
-            <a:ext cx="1388821" cy="731520"/>
-          </a:xfrm>
-          <a:prstGeom prst="rect">
-            <a:avLst/>
-          </a:prstGeom>
-          <a:noFill/>
-        </p:spPr>
-        <p:txBody>
-          <a:bodyPr wrap="square" lIns="0" rIns="0" tIns="0" bIns="0" anchor="t">
-            <a:spAutoFit/>
-          </a:bodyPr>
-          <a:lstStyle/>
-          <a:p>
-            <a:pPr algn="l">
-              <a:lnSpc>
-                <a:spcPct val="125000"/>
-              </a:lnSpc>
-            </a:pPr>
-            <a:r>
-              <a:rPr sz="1250" b="1">
-                <a:solidFill>
-                  <a:srgbClr val="FFFFFF"/>
-                </a:solidFill>
-                <a:latin typeface="Inter"/>
-              </a:rPr>
-              <a:t>Тексты и визуал</a:t>
-            </a:r>
-          </a:p>
-        </p:txBody>
-      </p:sp>
-      <p:sp>
-        <p:nvSpPr>
-          <p:cNvPr id="17" name="TextBox 16"/>
-          <p:cNvSpPr txBox="1"/>
-          <p:nvPr/>
-        </p:nvSpPr>
-        <p:spPr>
-          <a:xfrm>
-            <a:off x="4487570" y="3529584"/>
-            <a:ext cx="1388821" cy="274320"/>
-          </a:xfrm>
-          <a:prstGeom prst="rect">
-            <a:avLst/>
-          </a:prstGeom>
-          <a:noFill/>
-        </p:spPr>
-        <p:txBody>
-          <a:bodyPr wrap="square" lIns="0" rIns="0" tIns="0" bIns="0" anchor="t">
-            <a:spAutoFit/>
-          </a:bodyPr>
-          <a:lstStyle/>
-          <a:p>
-            <a:pPr algn="l">
-              <a:lnSpc>
-                <a:spcPct val="120000"/>
-              </a:lnSpc>
-            </a:pPr>
-            <a:r>
-              <a:rPr sz="1000" b="0">
-                <a:solidFill>
-                  <a:srgbClr val="9FB6DC"/>
-                </a:solidFill>
-                <a:latin typeface="Inter"/>
-              </a:rPr>
-              <a:t>машина</a:t>
-            </a:r>
-          </a:p>
-        </p:txBody>
-      </p:sp>
-      <p:sp>
-        <p:nvSpPr>
-          <p:cNvPr id="18" name="Rounded Rectangle 17"/>
-          <p:cNvSpPr/>
-          <p:nvPr/>
-        </p:nvSpPr>
-        <p:spPr>
-          <a:xfrm>
-            <a:off x="6168999" y="2697480"/>
-            <a:ext cx="1681429" cy="1234440"/>
-          </a:xfrm>
-          <a:prstGeom prst="roundRect">
-            <a:avLst>
-              <a:gd name="adj" fmla="val 10370"/>
-            </a:avLst>
-          </a:prstGeom>
-          <a:solidFill>
-            <a:srgbClr val="1B2D55"/>
-          </a:solidFill>
-          <a:ln w="12700">
-            <a:solidFill>
-              <a:srgbClr val="3E5C9C"/>
-            </a:solidFill>
-          </a:ln>
-          <a:effectLst/>
-        </p:spPr>
-        <p:style>
-          <a:lnRef idx="1">
-            <a:schemeClr val="accent1"/>
-          </a:lnRef>
-          <a:fillRef idx="3">
-            <a:schemeClr val="accent1"/>
-          </a:fillRef>
-          <a:effectRef idx="2">
-            <a:schemeClr val="accent1"/>
-          </a:effectRef>
-          <a:fontRef idx="minor">
-            <a:schemeClr val="lt1"/>
-          </a:fontRef>
-        </p:style>
-        <p:txBody>
-          <a:bodyPr rtlCol="0" anchor="ctr"/>
-          <a:lstStyle/>
-          <a:p>
-            <a:pPr algn="ctr"/>
-          </a:p>
-        </p:txBody>
-      </p:sp>
-      <p:sp>
-        <p:nvSpPr>
-          <p:cNvPr id="19" name="TextBox 18"/>
-          <p:cNvSpPr txBox="1"/>
-          <p:nvPr/>
-        </p:nvSpPr>
-        <p:spPr>
-          <a:xfrm>
-            <a:off x="6315303" y="2880360"/>
-            <a:ext cx="1388821" cy="731520"/>
-          </a:xfrm>
-          <a:prstGeom prst="rect">
-            <a:avLst/>
-          </a:prstGeom>
-          <a:noFill/>
-        </p:spPr>
-        <p:txBody>
-          <a:bodyPr wrap="square" lIns="0" rIns="0" tIns="0" bIns="0" anchor="t">
-            <a:spAutoFit/>
-          </a:bodyPr>
-          <a:lstStyle/>
-          <a:p>
-            <a:pPr algn="l">
-              <a:lnSpc>
-                <a:spcPct val="125000"/>
-              </a:lnSpc>
-            </a:pPr>
-            <a:r>
-              <a:rPr sz="1250" b="1">
-                <a:solidFill>
-                  <a:srgbClr val="FFFFFF"/>
-                </a:solidFill>
-                <a:latin typeface="Inter"/>
-              </a:rPr>
-              <a:t>Проверка</a:t>
-            </a:r>
-          </a:p>
-        </p:txBody>
-      </p:sp>
-      <p:sp>
-        <p:nvSpPr>
-          <p:cNvPr id="20" name="TextBox 19"/>
-          <p:cNvSpPr txBox="1"/>
-          <p:nvPr/>
-        </p:nvSpPr>
-        <p:spPr>
-          <a:xfrm>
-            <a:off x="6315303" y="3529584"/>
-            <a:ext cx="1388821" cy="274320"/>
-          </a:xfrm>
-          <a:prstGeom prst="rect">
-            <a:avLst/>
-          </a:prstGeom>
-          <a:noFill/>
-        </p:spPr>
-        <p:txBody>
-          <a:bodyPr wrap="square" lIns="0" rIns="0" tIns="0" bIns="0" anchor="t">
-            <a:spAutoFit/>
-          </a:bodyPr>
-          <a:lstStyle/>
-          <a:p>
-            <a:pPr algn="l">
-              <a:lnSpc>
-                <a:spcPct val="120000"/>
-              </a:lnSpc>
-            </a:pPr>
-            <a:r>
-              <a:rPr sz="1000" b="0">
-                <a:solidFill>
-                  <a:srgbClr val="7FC4FF"/>
-                </a:solidFill>
-                <a:latin typeface="Inter"/>
-              </a:rPr>
-              <a:t>человек</a:t>
-            </a:r>
-          </a:p>
-        </p:txBody>
-      </p:sp>
-      <p:sp>
-        <p:nvSpPr>
-          <p:cNvPr id="21" name="Rounded Rectangle 20"/>
-          <p:cNvSpPr/>
-          <p:nvPr/>
-        </p:nvSpPr>
-        <p:spPr>
-          <a:xfrm>
-            <a:off x="7996732" y="2697480"/>
-            <a:ext cx="1681429" cy="1234440"/>
-          </a:xfrm>
-          <a:prstGeom prst="roundRect">
-            <a:avLst>
-              <a:gd name="adj" fmla="val 10370"/>
-            </a:avLst>
-          </a:prstGeom>
-          <a:solidFill>
-            <a:srgbClr val="1B2D55"/>
-          </a:solidFill>
-          <a:ln w="12700">
-            <a:solidFill>
-              <a:srgbClr val="3E5C9C"/>
-            </a:solidFill>
-          </a:ln>
-          <a:effectLst/>
-        </p:spPr>
-        <p:style>
-          <a:lnRef idx="1">
-            <a:schemeClr val="accent1"/>
-          </a:lnRef>
-          <a:fillRef idx="3">
-            <a:schemeClr val="accent1"/>
-          </a:fillRef>
-          <a:effectRef idx="2">
-            <a:schemeClr val="accent1"/>
-          </a:effectRef>
-          <a:fontRef idx="minor">
-            <a:schemeClr val="lt1"/>
-          </a:fontRef>
-        </p:style>
-        <p:txBody>
-          <a:bodyPr rtlCol="0" anchor="ctr"/>
-          <a:lstStyle/>
-          <a:p>
-            <a:pPr algn="ctr"/>
-          </a:p>
-        </p:txBody>
-      </p:sp>
-      <p:sp>
-        <p:nvSpPr>
-          <p:cNvPr id="22" name="TextBox 21"/>
-          <p:cNvSpPr txBox="1"/>
-          <p:nvPr/>
-        </p:nvSpPr>
-        <p:spPr>
-          <a:xfrm>
-            <a:off x="8143036" y="2880360"/>
-            <a:ext cx="1388821" cy="731520"/>
-          </a:xfrm>
-          <a:prstGeom prst="rect">
-            <a:avLst/>
-          </a:prstGeom>
-          <a:noFill/>
-        </p:spPr>
-        <p:txBody>
-          <a:bodyPr wrap="square" lIns="0" rIns="0" tIns="0" bIns="0" anchor="t">
-            <a:spAutoFit/>
-          </a:bodyPr>
-          <a:lstStyle/>
-          <a:p>
-            <a:pPr algn="l">
-              <a:lnSpc>
-                <a:spcPct val="125000"/>
-              </a:lnSpc>
-            </a:pPr>
-            <a:r>
-              <a:rPr sz="1250" b="1">
-                <a:solidFill>
-                  <a:srgbClr val="FFFFFF"/>
-                </a:solidFill>
-                <a:latin typeface="Inter"/>
-              </a:rPr>
-              <a:t>Публикация</a:t>
-            </a:r>
-          </a:p>
-        </p:txBody>
-      </p:sp>
-      <p:sp>
-        <p:nvSpPr>
-          <p:cNvPr id="23" name="TextBox 22"/>
-          <p:cNvSpPr txBox="1"/>
-          <p:nvPr/>
-        </p:nvSpPr>
-        <p:spPr>
-          <a:xfrm>
-            <a:off x="8143036" y="3529584"/>
-            <a:ext cx="1388821" cy="274320"/>
-          </a:xfrm>
-          <a:prstGeom prst="rect">
-            <a:avLst/>
-          </a:prstGeom>
-          <a:noFill/>
-        </p:spPr>
-        <p:txBody>
-          <a:bodyPr wrap="square" lIns="0" rIns="0" tIns="0" bIns="0" anchor="t">
-            <a:spAutoFit/>
-          </a:bodyPr>
-          <a:lstStyle/>
-          <a:p>
-            <a:pPr algn="l">
-              <a:lnSpc>
-                <a:spcPct val="120000"/>
-              </a:lnSpc>
-            </a:pPr>
-            <a:r>
-              <a:rPr sz="1000" b="0">
-                <a:solidFill>
-                  <a:srgbClr val="7FC4FF"/>
-                </a:solidFill>
-                <a:latin typeface="Inter"/>
-              </a:rPr>
-              <a:t>человек</a:t>
-            </a:r>
-          </a:p>
-        </p:txBody>
-      </p:sp>
-      <p:sp>
-        <p:nvSpPr>
-          <p:cNvPr id="24" name="Rounded Rectangle 23"/>
-          <p:cNvSpPr/>
-          <p:nvPr/>
-        </p:nvSpPr>
-        <p:spPr>
-          <a:xfrm>
-            <a:off x="9824466" y="2697480"/>
-            <a:ext cx="1681429" cy="1234440"/>
-          </a:xfrm>
-          <a:prstGeom prst="roundRect">
-            <a:avLst>
-              <a:gd name="adj" fmla="val 10370"/>
-            </a:avLst>
-          </a:prstGeom>
-          <a:solidFill>
-            <a:srgbClr val="1B2D55"/>
-          </a:solidFill>
-          <a:ln w="12700">
-            <a:solidFill>
-              <a:srgbClr val="3E5C9C"/>
-            </a:solidFill>
-          </a:ln>
-          <a:effectLst/>
-        </p:spPr>
-        <p:style>
-          <a:lnRef idx="1">
-            <a:schemeClr val="accent1"/>
-          </a:lnRef>
-          <a:fillRef idx="3">
-            <a:schemeClr val="accent1"/>
-          </a:fillRef>
-          <a:effectRef idx="2">
-            <a:schemeClr val="accent1"/>
-          </a:effectRef>
-          <a:fontRef idx="minor">
-            <a:schemeClr val="lt1"/>
-          </a:fontRef>
-        </p:style>
-        <p:txBody>
-          <a:bodyPr rtlCol="0" anchor="ctr"/>
-          <a:lstStyle/>
-          <a:p>
-            <a:pPr algn="ctr"/>
-          </a:p>
-        </p:txBody>
-      </p:sp>
-      <p:sp>
-        <p:nvSpPr>
-          <p:cNvPr id="25" name="TextBox 24"/>
-          <p:cNvSpPr txBox="1"/>
-          <p:nvPr/>
-        </p:nvSpPr>
-        <p:spPr>
-          <a:xfrm>
-            <a:off x="9970770" y="2880360"/>
-            <a:ext cx="1388821" cy="731520"/>
-          </a:xfrm>
-          <a:prstGeom prst="rect">
-            <a:avLst/>
-          </a:prstGeom>
-          <a:noFill/>
-        </p:spPr>
-        <p:txBody>
-          <a:bodyPr wrap="square" lIns="0" rIns="0" tIns="0" bIns="0" anchor="t">
-            <a:spAutoFit/>
-          </a:bodyPr>
-          <a:lstStyle/>
-          <a:p>
-            <a:pPr algn="l">
-              <a:lnSpc>
-                <a:spcPct val="125000"/>
-              </a:lnSpc>
-            </a:pPr>
-            <a:r>
-              <a:rPr sz="1250" b="1">
-                <a:solidFill>
-                  <a:srgbClr val="FFFFFF"/>
-                </a:solidFill>
-                <a:latin typeface="Inter"/>
-              </a:rPr>
-              <a:t>Анализ выдачи</a:t>
-            </a:r>
-          </a:p>
-        </p:txBody>
-      </p:sp>
-      <p:sp>
-        <p:nvSpPr>
-          <p:cNvPr id="26" name="TextBox 25"/>
-          <p:cNvSpPr txBox="1"/>
-          <p:nvPr/>
-        </p:nvSpPr>
-        <p:spPr>
-          <a:xfrm>
-            <a:off x="9970770" y="3529584"/>
-            <a:ext cx="1388821" cy="274320"/>
-          </a:xfrm>
-          <a:prstGeom prst="rect">
-            <a:avLst/>
-          </a:prstGeom>
-          <a:noFill/>
-        </p:spPr>
-        <p:txBody>
-          <a:bodyPr wrap="square" lIns="0" rIns="0" tIns="0" bIns="0" anchor="t">
-            <a:spAutoFit/>
-          </a:bodyPr>
-          <a:lstStyle/>
-          <a:p>
-            <a:pPr algn="l">
-              <a:lnSpc>
-                <a:spcPct val="120000"/>
-              </a:lnSpc>
-            </a:pPr>
-            <a:r>
-              <a:rPr sz="1000" b="0">
-                <a:solidFill>
-                  <a:srgbClr val="7FC4FF"/>
-                </a:solidFill>
-                <a:latin typeface="Inter"/>
-              </a:rPr>
-              <a:t>человек</a:t>
-            </a:r>
-          </a:p>
-        </p:txBody>
-      </p:sp>
-      <p:sp>
-        <p:nvSpPr>
-          <p:cNvPr id="27" name="TextBox 26"/>
-          <p:cNvSpPr txBox="1"/>
-          <p:nvPr/>
-        </p:nvSpPr>
-        <p:spPr>
-          <a:xfrm>
-            <a:off x="685800" y="4169664"/>
-            <a:ext cx="10820095" cy="330962"/>
-          </a:xfrm>
-          <a:prstGeom prst="rect">
-            <a:avLst/>
-          </a:prstGeom>
-          <a:noFill/>
-        </p:spPr>
-        <p:txBody>
-          <a:bodyPr wrap="square" lIns="0" rIns="0" tIns="0" bIns="0" anchor="t">
-            <a:spAutoFit/>
-          </a:bodyPr>
-          <a:lstStyle/>
-          <a:p>
-            <a:pPr algn="l">
-              <a:lnSpc>
-                <a:spcPct val="145000"/>
-              </a:lnSpc>
-            </a:pPr>
-            <a:r>
-              <a:rPr sz="1400" b="0">
-                <a:solidFill>
-                  <a:srgbClr val="9FB6DC"/>
-                </a:solidFill>
-                <a:latin typeface="Inter"/>
-              </a:rPr>
-              <a:t>Три шага справа почти везде делает человек: правит, раскладывает, проверяет, что вышло.</a:t>
-            </a:r>
-          </a:p>
-        </p:txBody>
-      </p:sp>
-      <p:sp>
-        <p:nvSpPr>
-          <p:cNvPr id="28" name="Rectangle 27"/>
-          <p:cNvSpPr/>
-          <p:nvPr/>
-        </p:nvSpPr>
-        <p:spPr>
-          <a:xfrm>
-            <a:off x="685800" y="4800600"/>
-            <a:ext cx="64008" cy="1508760"/>
-          </a:xfrm>
-          <a:prstGeom prst="rect">
-            <a:avLst/>
-          </a:prstGeom>
-          <a:solidFill>
-            <a:srgbClr val="7FC4FF"/>
-          </a:solidFill>
-          <a:ln>
-            <a:noFill/>
-          </a:ln>
-          <a:effectLst/>
-        </p:spPr>
-        <p:style>
-          <a:lnRef idx="1">
-            <a:schemeClr val="accent1"/>
-          </a:lnRef>
-          <a:fillRef idx="3">
-            <a:schemeClr val="accent1"/>
-          </a:fillRef>
-          <a:effectRef idx="2">
-            <a:schemeClr val="accent1"/>
-          </a:effectRef>
-          <a:fontRef idx="minor">
-            <a:schemeClr val="lt1"/>
-          </a:fontRef>
-        </p:style>
-        <p:txBody>
-          <a:bodyPr rtlCol="0" anchor="ctr"/>
-          <a:lstStyle/>
-          <a:p>
-            <a:pPr algn="ctr"/>
-          </a:p>
-        </p:txBody>
-      </p:sp>
-      <p:sp>
-        <p:nvSpPr>
-          <p:cNvPr id="29" name="TextBox 28"/>
-          <p:cNvSpPr txBox="1"/>
-          <p:nvPr/>
-        </p:nvSpPr>
-        <p:spPr>
-          <a:xfrm>
-            <a:off x="1069848" y="4800600"/>
-            <a:ext cx="10362895" cy="964692"/>
-          </a:xfrm>
-          <a:prstGeom prst="rect">
-            <a:avLst/>
-          </a:prstGeom>
-          <a:noFill/>
-        </p:spPr>
-        <p:txBody>
-          <a:bodyPr wrap="square" lIns="0" rIns="0" tIns="0" bIns="0" anchor="t">
-            <a:spAutoFit/>
-          </a:bodyPr>
-          <a:lstStyle/>
-          <a:p>
-            <a:pPr algn="l">
-              <a:lnSpc>
-                <a:spcPct val="130000"/>
-              </a:lnSpc>
-            </a:pPr>
-            <a:r>
-              <a:rPr sz="1800" b="0">
-                <a:solidFill>
-                  <a:srgbClr val="FFFFFF"/>
-                </a:solidFill>
-                <a:latin typeface="Unbounded"/>
-              </a:rPr>
-              <a:t>«Контент-фабрики есть у всех, это не новость. Новость в том, что управление циклом можно отдать самому ИИ: он лучше человека знает, по каким правилам его собратья отбирают контент»</a:t>
-            </a:r>
-          </a:p>
-        </p:txBody>
-      </p:sp>
-      <p:sp>
-        <p:nvSpPr>
-          <p:cNvPr id="30" name="TextBox 29"/>
-          <p:cNvSpPr txBox="1"/>
-          <p:nvPr/>
-        </p:nvSpPr>
-        <p:spPr>
-          <a:xfrm>
-            <a:off x="1069848" y="5929883"/>
-            <a:ext cx="10362895" cy="287782"/>
-          </a:xfrm>
-          <a:prstGeom prst="rect">
-            <a:avLst/>
-          </a:prstGeom>
-          <a:noFill/>
-        </p:spPr>
-        <p:txBody>
-          <a:bodyPr wrap="square" lIns="0" rIns="0" tIns="0" bIns="0" anchor="t">
-            <a:spAutoFit/>
-          </a:bodyPr>
-          <a:lstStyle/>
-          <a:p>
-            <a:pPr algn="l">
-              <a:lnSpc>
-                <a:spcPct val="130000"/>
-              </a:lnSpc>
-            </a:pPr>
-            <a:r>
-              <a:rPr sz="1300" b="1">
-                <a:solidFill>
-                  <a:srgbClr val="7FC4FF"/>
-                </a:solidFill>
-                <a:latin typeface="Inter"/>
-              </a:rPr>
-              <a:t>Руслан Анатольевич Дёмин, </a:t>
-            </a:r>
-            <a:r>
-              <a:rPr sz="1300" b="0">
-                <a:solidFill>
-                  <a:srgbClr val="9FB6DC"/>
-                </a:solidFill>
-                <a:latin typeface="Inter"/>
-              </a:rPr>
-              <a:t>управляющий партнёр</a:t>
+              <a:t>Светлым — то, что почти везде до сих пор делает человек</a:t>
             </a:r>
           </a:p>
         </p:txBody>
@@ -4750,9 +4048,48 @@
           </a:p>
         </p:txBody>
       </p:sp>
+      <p:sp>
+        <p:nvSpPr>
+          <p:cNvPr id="3" name="TextBox 2"/>
+          <p:cNvSpPr txBox="1"/>
+          <p:nvPr/>
+        </p:nvSpPr>
+        <p:spPr>
+          <a:xfrm>
+            <a:off x="10408615" y="6291072"/>
+            <a:ext cx="1097280" cy="274320"/>
+          </a:xfrm>
+          <a:prstGeom prst="rect">
+            <a:avLst/>
+          </a:prstGeom>
+          <a:noFill/>
+        </p:spPr>
+        <p:txBody>
+          <a:bodyPr wrap="square" lIns="0" rIns="0" tIns="0" bIns="0" anchor="t">
+            <a:spAutoFit/>
+          </a:bodyPr>
+          <a:lstStyle/>
+          <a:p>
+            <a:pPr algn="r">
+              <a:lnSpc>
+                <a:spcPct val="120000"/>
+              </a:lnSpc>
+            </a:pPr>
+            <a:r>
+              <a:rPr sz="1000" b="0">
+                <a:solidFill>
+                  <a:srgbClr val="9FB6DC"/>
+                </a:solidFill>
+                <a:latin typeface="Inter"/>
+              </a:rPr>
+              <a:t>3 / 6</a:t>
+            </a:r>
+          </a:p>
+        </p:txBody>
+      </p:sp>
       <p:pic>
         <p:nvPicPr>
-          <p:cNvPr id="3" name="Picture 2" descr="mark.png"/>
+          <p:cNvPr id="4" name="Picture 3" descr="press-nejrony.png"/>
           <p:cNvPicPr>
             <a:picLocks noChangeAspect="1"/>
           </p:cNvPicPr>
@@ -4766,8 +4103,8 @@
         </p:blipFill>
         <p:spPr>
           <a:xfrm>
-            <a:off x="685800" y="457200"/>
-            <a:ext cx="480290" cy="457200"/>
+            <a:off x="8259775" y="0"/>
+            <a:ext cx="3931920" cy="6858000"/>
           </a:xfrm>
           <a:prstGeom prst="rect">
             <a:avLst/>
@@ -4776,7 +4113,7 @@
       </p:pic>
       <p:pic>
         <p:nvPicPr>
-          <p:cNvPr id="4" name="Picture 3" descr="logo.png"/>
+          <p:cNvPr id="5" name="Picture 4" descr="mark.png"/>
           <p:cNvPicPr>
             <a:picLocks noChangeAspect="1"/>
           </p:cNvPicPr>
@@ -4790,134 +4127,17 @@
         </p:blipFill>
         <p:spPr>
           <a:xfrm>
-            <a:off x="11048695" y="457200"/>
-            <a:ext cx="457200" cy="457200"/>
+            <a:off x="685800" y="457200"/>
+            <a:ext cx="480290" cy="457200"/>
           </a:xfrm>
           <a:prstGeom prst="rect">
             <a:avLst/>
           </a:prstGeom>
         </p:spPr>
       </p:pic>
-      <p:sp>
-        <p:nvSpPr>
-          <p:cNvPr id="5" name="TextBox 4"/>
-          <p:cNvSpPr txBox="1"/>
-          <p:nvPr/>
-        </p:nvSpPr>
-        <p:spPr>
-          <a:xfrm>
-            <a:off x="685800" y="987552"/>
-            <a:ext cx="2743200" cy="201168"/>
-          </a:xfrm>
-          <a:prstGeom prst="rect">
-            <a:avLst/>
-          </a:prstGeom>
-          <a:noFill/>
-        </p:spPr>
-        <p:txBody>
-          <a:bodyPr wrap="square" lIns="0" rIns="0" tIns="0" bIns="0" anchor="t">
-            <a:spAutoFit/>
-          </a:bodyPr>
-          <a:lstStyle/>
-          <a:p>
-            <a:pPr algn="l">
-              <a:lnSpc>
-                <a:spcPct val="120000"/>
-              </a:lnSpc>
-            </a:pPr>
-            <a:r>
-              <a:rPr sz="950" b="0">
-                <a:solidFill>
-                  <a:srgbClr val="9FB6DC"/>
-                </a:solidFill>
-                <a:latin typeface="Inter"/>
-              </a:rPr>
-              <a:t>ГенИИ</a:t>
-            </a:r>
-          </a:p>
-        </p:txBody>
-      </p:sp>
-      <p:sp>
-        <p:nvSpPr>
-          <p:cNvPr id="6" name="TextBox 5"/>
-          <p:cNvSpPr txBox="1"/>
-          <p:nvPr/>
-        </p:nvSpPr>
-        <p:spPr>
-          <a:xfrm>
-            <a:off x="8762695" y="987552"/>
-            <a:ext cx="2743200" cy="201168"/>
-          </a:xfrm>
-          <a:prstGeom prst="rect">
-            <a:avLst/>
-          </a:prstGeom>
-          <a:noFill/>
-        </p:spPr>
-        <p:txBody>
-          <a:bodyPr wrap="square" lIns="0" rIns="0" tIns="0" bIns="0" anchor="t">
-            <a:spAutoFit/>
-          </a:bodyPr>
-          <a:lstStyle/>
-          <a:p>
-            <a:pPr algn="r">
-              <a:lnSpc>
-                <a:spcPct val="120000"/>
-              </a:lnSpc>
-            </a:pPr>
-            <a:r>
-              <a:rPr sz="950" b="0">
-                <a:solidFill>
-                  <a:srgbClr val="9FB6DC"/>
-                </a:solidFill>
-                <a:latin typeface="Inter"/>
-              </a:rPr>
-              <a:t>Промптер</a:t>
-            </a:r>
-          </a:p>
-        </p:txBody>
-      </p:sp>
-      <p:sp>
-        <p:nvSpPr>
-          <p:cNvPr id="7" name="TextBox 6"/>
-          <p:cNvSpPr txBox="1"/>
-          <p:nvPr/>
-        </p:nvSpPr>
-        <p:spPr>
-          <a:xfrm>
-            <a:off x="10408615" y="6291072"/>
-            <a:ext cx="1097280" cy="274320"/>
-          </a:xfrm>
-          <a:prstGeom prst="rect">
-            <a:avLst/>
-          </a:prstGeom>
-          <a:noFill/>
-        </p:spPr>
-        <p:txBody>
-          <a:bodyPr wrap="square" lIns="0" rIns="0" tIns="0" bIns="0" anchor="t">
-            <a:spAutoFit/>
-          </a:bodyPr>
-          <a:lstStyle/>
-          <a:p>
-            <a:pPr algn="r">
-              <a:lnSpc>
-                <a:spcPct val="120000"/>
-              </a:lnSpc>
-            </a:pPr>
-            <a:r>
-              <a:rPr sz="1000" b="0">
-                <a:solidFill>
-                  <a:srgbClr val="9FB6DC"/>
-                </a:solidFill>
-                <a:latin typeface="Inter"/>
-              </a:rPr>
-              <a:t>3 / 6</a:t>
-            </a:r>
-          </a:p>
-        </p:txBody>
-      </p:sp>
       <p:pic>
         <p:nvPicPr>
-          <p:cNvPr id="8" name="Picture 7" descr="press-nejrony.png"/>
+          <p:cNvPr id="6" name="Picture 5" descr="logo.png"/>
           <p:cNvPicPr>
             <a:picLocks noChangeAspect="1"/>
           </p:cNvPicPr>
@@ -4931,8 +4151,8 @@
         </p:blipFill>
         <p:spPr>
           <a:xfrm>
-            <a:off x="7299655" y="1417320"/>
-            <a:ext cx="4206240" cy="4800600"/>
+            <a:off x="11048695" y="457200"/>
+            <a:ext cx="457200" cy="457200"/>
           </a:xfrm>
           <a:prstGeom prst="rect">
             <a:avLst/>
@@ -4941,14 +4161,14 @@
       </p:pic>
       <p:sp>
         <p:nvSpPr>
-          <p:cNvPr id="9" name="TextBox 8"/>
+          <p:cNvPr id="7" name="TextBox 6"/>
           <p:cNvSpPr txBox="1"/>
           <p:nvPr/>
         </p:nvSpPr>
         <p:spPr>
           <a:xfrm>
-            <a:off x="685800" y="1463040"/>
-            <a:ext cx="5973775" cy="986536"/>
+            <a:off x="685800" y="987552"/>
+            <a:ext cx="2743200" cy="201168"/>
           </a:xfrm>
           <a:prstGeom prst="rect">
             <a:avLst/>
@@ -4963,17 +4183,95 @@
           <a:p>
             <a:pPr algn="l">
               <a:lnSpc>
-                <a:spcPct val="116000"/>
+                <a:spcPct val="120000"/>
               </a:lnSpc>
             </a:pPr>
             <a:r>
-              <a:rPr sz="3100" b="1">
+              <a:rPr sz="950" b="0">
+                <a:solidFill>
+                  <a:srgbClr val="9FB6DC"/>
+                </a:solidFill>
+                <a:latin typeface="Inter"/>
+              </a:rPr>
+              <a:t>ГенИИ</a:t>
+            </a:r>
+          </a:p>
+        </p:txBody>
+      </p:sp>
+      <p:sp>
+        <p:nvSpPr>
+          <p:cNvPr id="8" name="TextBox 7"/>
+          <p:cNvSpPr txBox="1"/>
+          <p:nvPr/>
+        </p:nvSpPr>
+        <p:spPr>
+          <a:xfrm>
+            <a:off x="8762695" y="987552"/>
+            <a:ext cx="2743200" cy="201168"/>
+          </a:xfrm>
+          <a:prstGeom prst="rect">
+            <a:avLst/>
+          </a:prstGeom>
+          <a:noFill/>
+        </p:spPr>
+        <p:txBody>
+          <a:bodyPr wrap="square" lIns="0" rIns="0" tIns="0" bIns="0" anchor="t">
+            <a:spAutoFit/>
+          </a:bodyPr>
+          <a:lstStyle/>
+          <a:p>
+            <a:pPr algn="r">
+              <a:lnSpc>
+                <a:spcPct val="120000"/>
+              </a:lnSpc>
+            </a:pPr>
+            <a:r>
+              <a:rPr sz="950" b="0">
+                <a:solidFill>
+                  <a:srgbClr val="9FB6DC"/>
+                </a:solidFill>
+                <a:latin typeface="Inter"/>
+              </a:rPr>
+              <a:t>Промптер</a:t>
+            </a:r>
+          </a:p>
+        </p:txBody>
+      </p:sp>
+      <p:sp>
+        <p:nvSpPr>
+          <p:cNvPr id="9" name="TextBox 8"/>
+          <p:cNvSpPr txBox="1"/>
+          <p:nvPr/>
+        </p:nvSpPr>
+        <p:spPr>
+          <a:xfrm>
+            <a:off x="1143000" y="1737360"/>
+            <a:ext cx="6568135" cy="2633472"/>
+          </a:xfrm>
+          <a:prstGeom prst="rect">
+            <a:avLst/>
+          </a:prstGeom>
+          <a:noFill/>
+        </p:spPr>
+        <p:txBody>
+          <a:bodyPr wrap="square" lIns="0" rIns="0" tIns="0" bIns="0" anchor="t">
+            <a:spAutoFit/>
+          </a:bodyPr>
+          <a:lstStyle/>
+          <a:p>
+            <a:pPr algn="l">
+              <a:lnSpc>
+                <a:spcPct val="126000"/>
+              </a:lnSpc>
+            </a:pPr>
+            <a:r>
+              <a:rPr sz="3200" b="0">
                 <a:solidFill>
                   <a:srgbClr val="FFFFFF"/>
                 </a:solidFill>
                 <a:latin typeface="Unbounded"/>
               </a:rPr>
-              <a:t>Дороже денег — время собственника</a:t>
+              <a:t>«Предприниматель тратит на соцсети не деньги, а своё время — самый дорогой ресурс в компании»</a:t>
             </a:r>
           </a:p>
         </p:txBody>
@@ -4986,8 +4284,8 @@
         </p:nvSpPr>
         <p:spPr>
           <a:xfrm>
-            <a:off x="685800" y="3145536"/>
-            <a:ext cx="201168" cy="20116"/>
+            <a:off x="685800" y="1810512"/>
+            <a:ext cx="82296" cy="2523743"/>
           </a:xfrm>
           <a:prstGeom prst="rect">
             <a:avLst/>
@@ -5030,8 +4328,8 @@
         </p:nvSpPr>
         <p:spPr>
           <a:xfrm>
-            <a:off x="1069848" y="3017520"/>
-            <a:ext cx="5589727" cy="330961"/>
+            <a:off x="1143000" y="4663440"/>
+            <a:ext cx="6568135" cy="320802"/>
           </a:xfrm>
           <a:prstGeom prst="rect">
             <a:avLst/>
@@ -5046,17 +4344,26 @@
           <a:p>
             <a:pPr algn="l">
               <a:lnSpc>
-                <a:spcPct val="140000"/>
+                <a:spcPct val="130000"/>
               </a:lnSpc>
             </a:pPr>
             <a:r>
-              <a:rPr sz="1450" b="0">
-                <a:solidFill>
-                  <a:srgbClr val="D6E4FF"/>
+              <a:rPr sz="1500" b="1">
+                <a:solidFill>
+                  <a:srgbClr val="7FC4FF"/>
                 </a:solidFill>
                 <a:latin typeface="Inter"/>
               </a:rPr>
-              <a:t>Согласование тем и планов</a:t>
+              <a:t>Руслан Анатольевич Дёмин, </a:t>
+            </a:r>
+            <a:r>
+              <a:rPr sz="1500" b="0">
+                <a:solidFill>
+                  <a:srgbClr val="9FB6DC"/>
+                </a:solidFill>
+                <a:latin typeface="Inter"/>
+              </a:rPr>
+              <a:t>управляющий партнёр</a:t>
             </a:r>
           </a:p>
         </p:txBody>
@@ -5069,14 +4376,14 @@
         </p:nvSpPr>
         <p:spPr>
           <a:xfrm>
-            <a:off x="685800" y="3677666"/>
-            <a:ext cx="201168" cy="20116"/>
+            <a:off x="685800" y="5394960"/>
+            <a:ext cx="7025335" cy="10972"/>
           </a:xfrm>
           <a:prstGeom prst="rect">
             <a:avLst/>
           </a:prstGeom>
           <a:solidFill>
-            <a:srgbClr val="7FC4FF"/>
+            <a:srgbClr val="3E5C9C"/>
           </a:solidFill>
           <a:ln>
             <a:noFill/>
@@ -5113,8 +4420,8 @@
         </p:nvSpPr>
         <p:spPr>
           <a:xfrm>
-            <a:off x="1069848" y="3549650"/>
-            <a:ext cx="5589727" cy="330961"/>
+            <a:off x="685800" y="5632704"/>
+            <a:ext cx="7025335" cy="347472"/>
           </a:xfrm>
           <a:prstGeom prst="rect">
             <a:avLst/>
@@ -5129,231 +4436,17 @@
           <a:p>
             <a:pPr algn="l">
               <a:lnSpc>
-                <a:spcPct val="140000"/>
+                <a:spcPct val="135000"/>
               </a:lnSpc>
             </a:pPr>
             <a:r>
-              <a:rPr sz="1450" b="0">
-                <a:solidFill>
-                  <a:srgbClr val="D6E4FF"/>
+              <a:rPr sz="1600" b="0">
+                <a:solidFill>
+                  <a:srgbClr val="9FB6DC"/>
                 </a:solidFill>
                 <a:latin typeface="Inter"/>
               </a:rPr>
-              <a:t>Правки текстов и картинок</a:t>
-            </a:r>
-          </a:p>
-        </p:txBody>
-      </p:sp>
-      <p:sp>
-        <p:nvSpPr>
-          <p:cNvPr id="14" name="Rectangle 13"/>
-          <p:cNvSpPr/>
-          <p:nvPr/>
-        </p:nvSpPr>
-        <p:spPr>
-          <a:xfrm>
-            <a:off x="685800" y="4209795"/>
-            <a:ext cx="201168" cy="20116"/>
-          </a:xfrm>
-          <a:prstGeom prst="rect">
-            <a:avLst/>
-          </a:prstGeom>
-          <a:solidFill>
-            <a:srgbClr val="7FC4FF"/>
-          </a:solidFill>
-          <a:ln>
-            <a:noFill/>
-          </a:ln>
-          <a:effectLst/>
-        </p:spPr>
-        <p:style>
-          <a:lnRef idx="1">
-            <a:schemeClr val="accent1"/>
-          </a:lnRef>
-          <a:fillRef idx="3">
-            <a:schemeClr val="accent1"/>
-          </a:fillRef>
-          <a:effectRef idx="2">
-            <a:schemeClr val="accent1"/>
-          </a:effectRef>
-          <a:fontRef idx="minor">
-            <a:schemeClr val="lt1"/>
-          </a:fontRef>
-        </p:style>
-        <p:txBody>
-          <a:bodyPr rtlCol="0" anchor="ctr"/>
-          <a:lstStyle/>
-          <a:p>
-            <a:pPr algn="ctr"/>
-          </a:p>
-        </p:txBody>
-      </p:sp>
-      <p:sp>
-        <p:nvSpPr>
-          <p:cNvPr id="15" name="TextBox 14"/>
-          <p:cNvSpPr txBox="1"/>
-          <p:nvPr/>
-        </p:nvSpPr>
-        <p:spPr>
-          <a:xfrm>
-            <a:off x="1069848" y="4081779"/>
-            <a:ext cx="5589727" cy="330961"/>
-          </a:xfrm>
-          <a:prstGeom prst="rect">
-            <a:avLst/>
-          </a:prstGeom>
-          <a:noFill/>
-        </p:spPr>
-        <p:txBody>
-          <a:bodyPr wrap="square" lIns="0" rIns="0" tIns="0" bIns="0" anchor="t">
-            <a:spAutoFit/>
-          </a:bodyPr>
-          <a:lstStyle/>
-          <a:p>
-            <a:pPr algn="l">
-              <a:lnSpc>
-                <a:spcPct val="140000"/>
-              </a:lnSpc>
-            </a:pPr>
-            <a:r>
-              <a:rPr sz="1450" b="0">
-                <a:solidFill>
-                  <a:srgbClr val="D6E4FF"/>
-                </a:solidFill>
-                <a:latin typeface="Inter"/>
-              </a:rPr>
-              <a:t>Раскладка по шести площадкам</a:t>
-            </a:r>
-          </a:p>
-        </p:txBody>
-      </p:sp>
-      <p:sp>
-        <p:nvSpPr>
-          <p:cNvPr id="16" name="Rectangle 15"/>
-          <p:cNvSpPr/>
-          <p:nvPr/>
-        </p:nvSpPr>
-        <p:spPr>
-          <a:xfrm>
-            <a:off x="685800" y="4892040"/>
-            <a:ext cx="64008" cy="1463040"/>
-          </a:xfrm>
-          <a:prstGeom prst="rect">
-            <a:avLst/>
-          </a:prstGeom>
-          <a:solidFill>
-            <a:srgbClr val="7FC4FF"/>
-          </a:solidFill>
-          <a:ln>
-            <a:noFill/>
-          </a:ln>
-          <a:effectLst/>
-        </p:spPr>
-        <p:style>
-          <a:lnRef idx="1">
-            <a:schemeClr val="accent1"/>
-          </a:lnRef>
-          <a:fillRef idx="3">
-            <a:schemeClr val="accent1"/>
-          </a:fillRef>
-          <a:effectRef idx="2">
-            <a:schemeClr val="accent1"/>
-          </a:effectRef>
-          <a:fontRef idx="minor">
-            <a:schemeClr val="lt1"/>
-          </a:fontRef>
-        </p:style>
-        <p:txBody>
-          <a:bodyPr rtlCol="0" anchor="ctr"/>
-          <a:lstStyle/>
-          <a:p>
-            <a:pPr algn="ctr"/>
-          </a:p>
-        </p:txBody>
-      </p:sp>
-      <p:sp>
-        <p:nvSpPr>
-          <p:cNvPr id="17" name="TextBox 16"/>
-          <p:cNvSpPr txBox="1"/>
-          <p:nvPr/>
-        </p:nvSpPr>
-        <p:spPr>
-          <a:xfrm>
-            <a:off x="1069848" y="4892040"/>
-            <a:ext cx="6248095" cy="1063752"/>
-          </a:xfrm>
-          <a:prstGeom prst="rect">
-            <a:avLst/>
-          </a:prstGeom>
-          <a:noFill/>
-        </p:spPr>
-        <p:txBody>
-          <a:bodyPr wrap="square" lIns="0" rIns="0" tIns="0" bIns="0" anchor="t">
-            <a:spAutoFit/>
-          </a:bodyPr>
-          <a:lstStyle/>
-          <a:p>
-            <a:pPr algn="l">
-              <a:lnSpc>
-                <a:spcPct val="130000"/>
-              </a:lnSpc>
-            </a:pPr>
-            <a:r>
-              <a:rPr sz="1500" b="0">
-                <a:solidFill>
-                  <a:srgbClr val="FFFFFF"/>
-                </a:solidFill>
-                <a:latin typeface="Unbounded"/>
-              </a:rPr>
-              <a:t>«Предприниматель тратит на соцсети не деньги, а своё время — самый дорогой ресурс в компании. Цикл забирает рутину, человеку остаётся решение и смысл»</a:t>
-            </a:r>
-          </a:p>
-        </p:txBody>
-      </p:sp>
-      <p:sp>
-        <p:nvSpPr>
-          <p:cNvPr id="18" name="TextBox 17"/>
-          <p:cNvSpPr txBox="1"/>
-          <p:nvPr/>
-        </p:nvSpPr>
-        <p:spPr>
-          <a:xfrm>
-            <a:off x="1069848" y="6120383"/>
-            <a:ext cx="6248095" cy="287782"/>
-          </a:xfrm>
-          <a:prstGeom prst="rect">
-            <a:avLst/>
-          </a:prstGeom>
-          <a:noFill/>
-        </p:spPr>
-        <p:txBody>
-          <a:bodyPr wrap="square" lIns="0" rIns="0" tIns="0" bIns="0" anchor="t">
-            <a:spAutoFit/>
-          </a:bodyPr>
-          <a:lstStyle/>
-          <a:p>
-            <a:pPr algn="l">
-              <a:lnSpc>
-                <a:spcPct val="130000"/>
-              </a:lnSpc>
-            </a:pPr>
-            <a:r>
-              <a:rPr sz="1300" b="1">
-                <a:solidFill>
-                  <a:srgbClr val="7FC4FF"/>
-                </a:solidFill>
-                <a:latin typeface="Inter"/>
-              </a:rPr>
-              <a:t>Руслан Анатольевич Дёмин, </a:t>
-            </a:r>
-            <a:r>
-              <a:rPr sz="1300" b="0">
-                <a:solidFill>
-                  <a:srgbClr val="9FB6DC"/>
-                </a:solidFill>
-                <a:latin typeface="Inter"/>
-              </a:rPr>
-              <a:t>управляющий партнёр</a:t>
+              <a:t>Согласование тем · Правки текстов · Раскладка по площадкам</a:t>
             </a:r>
           </a:p>
         </p:txBody>
@@ -5593,8 +4686,8 @@
         </p:nvSpPr>
         <p:spPr>
           <a:xfrm>
-            <a:off x="685800" y="1417320"/>
-            <a:ext cx="9905695" cy="1074928"/>
+            <a:off x="685800" y="1463040"/>
+            <a:ext cx="5486400" cy="1264920"/>
           </a:xfrm>
           <a:prstGeom prst="rect">
             <a:avLst/>
@@ -5609,44 +4702,118 @@
           <a:p>
             <a:pPr algn="l">
               <a:lnSpc>
-                <a:spcPct val="116000"/>
+                <a:spcPct val="102000"/>
               </a:lnSpc>
             </a:pPr>
             <a:r>
-              <a:rPr sz="3400" b="1">
-                <a:solidFill>
-                  <a:srgbClr val="FFFFFF"/>
+              <a:rPr sz="9200" b="1">
+                <a:solidFill>
+                  <a:srgbClr val="4ADE80"/>
                 </a:solidFill>
                 <a:latin typeface="Unbounded"/>
               </a:rPr>
-              <a:t>Без агентства, токенов и борьбы с блокировками</a:t>
-            </a:r>
-          </a:p>
-        </p:txBody>
-      </p:sp>
-      <p:sp>
-        <p:nvSpPr>
-          <p:cNvPr id="9" name="Rounded Rectangle 8"/>
+              <a:t>70–80</a:t>
+            </a:r>
+          </a:p>
+        </p:txBody>
+      </p:sp>
+      <p:sp>
+        <p:nvSpPr>
+          <p:cNvPr id="9" name="TextBox 8"/>
+          <p:cNvSpPr txBox="1"/>
+          <p:nvPr/>
+        </p:nvSpPr>
+        <p:spPr>
+          <a:xfrm>
+            <a:off x="685800" y="2782824"/>
+            <a:ext cx="5486400" cy="621792"/>
+          </a:xfrm>
+          <a:prstGeom prst="rect">
+            <a:avLst/>
+          </a:prstGeom>
+          <a:noFill/>
+        </p:spPr>
+        <p:txBody>
+          <a:bodyPr wrap="square" lIns="0" rIns="0" tIns="0" bIns="0" anchor="t">
+            <a:spAutoFit/>
+          </a:bodyPr>
+          <a:lstStyle/>
+          <a:p>
+            <a:pPr algn="l">
+              <a:lnSpc>
+                <a:spcPct val="135000"/>
+              </a:lnSpc>
+            </a:pPr>
+            <a:r>
+              <a:rPr sz="1600" b="0">
+                <a:solidFill>
+                  <a:srgbClr val="D6E4FF"/>
+                </a:solidFill>
+                <a:latin typeface="Inter"/>
+              </a:rPr>
+              <a:t>тысяч рублей в месяц — столько стоят те же роли своими силами</a:t>
+            </a:r>
+          </a:p>
+        </p:txBody>
+      </p:sp>
+      <p:sp>
+        <p:nvSpPr>
+          <p:cNvPr id="10" name="TextBox 9"/>
+          <p:cNvSpPr txBox="1"/>
+          <p:nvPr/>
+        </p:nvSpPr>
+        <p:spPr>
+          <a:xfrm>
+            <a:off x="1143000" y="3794760"/>
+            <a:ext cx="10271455" cy="1737360"/>
+          </a:xfrm>
+          <a:prstGeom prst="rect">
+            <a:avLst/>
+          </a:prstGeom>
+          <a:noFill/>
+        </p:spPr>
+        <p:txBody>
+          <a:bodyPr wrap="square" lIns="0" rIns="0" tIns="0" bIns="0" anchor="t">
+            <a:spAutoFit/>
+          </a:bodyPr>
+          <a:lstStyle/>
+          <a:p>
+            <a:pPr algn="l">
+              <a:lnSpc>
+                <a:spcPct val="126000"/>
+              </a:lnSpc>
+            </a:pPr>
+            <a:r>
+              <a:rPr sz="2600" b="0">
+                <a:solidFill>
+                  <a:srgbClr val="FFFFFF"/>
+                </a:solidFill>
+                <a:latin typeface="Unbounded"/>
+              </a:rPr>
+              <a:t>«Чтобы работать с нейросетями самому, нужно покупать токены, держать зарубежные аккаунты и воевать с блокировками. Готовый сервис снимает это целиком»</a:t>
+            </a:r>
+          </a:p>
+        </p:txBody>
+      </p:sp>
+      <p:sp>
+        <p:nvSpPr>
+          <p:cNvPr id="11" name="Rectangle 10"/>
           <p:cNvSpPr/>
           <p:nvPr/>
         </p:nvSpPr>
         <p:spPr>
           <a:xfrm>
-            <a:off x="685800" y="2651760"/>
-            <a:ext cx="3423818" cy="1783080"/>
-          </a:xfrm>
-          <a:prstGeom prst="roundRect">
-            <a:avLst>
-              <a:gd name="adj" fmla="val 8205"/>
-            </a:avLst>
+            <a:off x="685800" y="3867912"/>
+            <a:ext cx="82296" cy="1627632"/>
+          </a:xfrm>
+          <a:prstGeom prst="rect">
+            <a:avLst/>
           </a:prstGeom>
           <a:solidFill>
-            <a:srgbClr val="152343"/>
+            <a:srgbClr val="7FC4FF"/>
           </a:solidFill>
-          <a:ln w="12700">
-            <a:solidFill>
-              <a:srgbClr val="2C4478"/>
-            </a:solidFill>
+          <a:ln>
+            <a:noFill/>
           </a:ln>
           <a:effectLst/>
         </p:spPr>
@@ -5674,436 +4841,14 @@
       </p:sp>
       <p:sp>
         <p:nvSpPr>
-          <p:cNvPr id="10" name="TextBox 9"/>
+          <p:cNvPr id="12" name="TextBox 11"/>
           <p:cNvSpPr txBox="1"/>
           <p:nvPr/>
         </p:nvSpPr>
         <p:spPr>
           <a:xfrm>
-            <a:off x="923544" y="2889504"/>
-            <a:ext cx="2948330" cy="457200"/>
-          </a:xfrm>
-          <a:prstGeom prst="rect">
-            <a:avLst/>
-          </a:prstGeom>
-          <a:noFill/>
-        </p:spPr>
-        <p:txBody>
-          <a:bodyPr wrap="square" lIns="0" rIns="0" tIns="0" bIns="0" anchor="t">
-            <a:spAutoFit/>
-          </a:bodyPr>
-          <a:lstStyle/>
-          <a:p>
-            <a:pPr algn="l">
-              <a:lnSpc>
-                <a:spcPct val="120000"/>
-              </a:lnSpc>
-            </a:pPr>
-            <a:r>
-              <a:rPr sz="1500" b="1">
-                <a:solidFill>
-                  <a:srgbClr val="FFFFFF"/>
-                </a:solidFill>
-                <a:latin typeface="Unbounded"/>
-              </a:rPr>
-              <a:t>Диджитал-агентство</a:t>
-            </a:r>
-          </a:p>
-        </p:txBody>
-      </p:sp>
-      <p:sp>
-        <p:nvSpPr>
-          <p:cNvPr id="11" name="TextBox 10"/>
-          <p:cNvSpPr txBox="1"/>
-          <p:nvPr/>
-        </p:nvSpPr>
-        <p:spPr>
-          <a:xfrm>
-            <a:off x="923544" y="3438144"/>
-            <a:ext cx="2948330" cy="533527"/>
-          </a:xfrm>
-          <a:prstGeom prst="rect">
-            <a:avLst/>
-          </a:prstGeom>
-          <a:noFill/>
-        </p:spPr>
-        <p:txBody>
-          <a:bodyPr wrap="square" lIns="0" rIns="0" tIns="0" bIns="0" anchor="t">
-            <a:spAutoFit/>
-          </a:bodyPr>
-          <a:lstStyle/>
-          <a:p>
-            <a:pPr algn="l">
-              <a:lnSpc>
-                <a:spcPct val="145000"/>
-              </a:lnSpc>
-            </a:pPr>
-            <a:r>
-              <a:rPr sz="1250" b="0">
-                <a:solidFill>
-                  <a:srgbClr val="9FB6DC"/>
-                </a:solidFill>
-                <a:latin typeface="Inter"/>
-              </a:rPr>
-              <a:t>Счёт каждый месяц, правки через менеджера</a:t>
-            </a:r>
-          </a:p>
-        </p:txBody>
-      </p:sp>
-      <p:sp>
-        <p:nvSpPr>
-          <p:cNvPr id="12" name="Rounded Rectangle 11"/>
-          <p:cNvSpPr/>
-          <p:nvPr/>
-        </p:nvSpPr>
-        <p:spPr>
-          <a:xfrm>
-            <a:off x="4383938" y="2651760"/>
-            <a:ext cx="3423818" cy="1783080"/>
-          </a:xfrm>
-          <a:prstGeom prst="roundRect">
-            <a:avLst>
-              <a:gd name="adj" fmla="val 8205"/>
-            </a:avLst>
-          </a:prstGeom>
-          <a:solidFill>
-            <a:srgbClr val="152343"/>
-          </a:solidFill>
-          <a:ln w="12700">
-            <a:solidFill>
-              <a:srgbClr val="2C4478"/>
-            </a:solidFill>
-          </a:ln>
-          <a:effectLst/>
-        </p:spPr>
-        <p:style>
-          <a:lnRef idx="1">
-            <a:schemeClr val="accent1"/>
-          </a:lnRef>
-          <a:fillRef idx="3">
-            <a:schemeClr val="accent1"/>
-          </a:fillRef>
-          <a:effectRef idx="2">
-            <a:schemeClr val="accent1"/>
-          </a:effectRef>
-          <a:fontRef idx="minor">
-            <a:schemeClr val="lt1"/>
-          </a:fontRef>
-        </p:style>
-        <p:txBody>
-          <a:bodyPr rtlCol="0" anchor="ctr"/>
-          <a:lstStyle/>
-          <a:p>
-            <a:pPr algn="ctr"/>
-          </a:p>
-        </p:txBody>
-      </p:sp>
-      <p:sp>
-        <p:nvSpPr>
-          <p:cNvPr id="13" name="TextBox 12"/>
-          <p:cNvSpPr txBox="1"/>
-          <p:nvPr/>
-        </p:nvSpPr>
-        <p:spPr>
-          <a:xfrm>
-            <a:off x="4621682" y="2889504"/>
-            <a:ext cx="2948330" cy="457200"/>
-          </a:xfrm>
-          <a:prstGeom prst="rect">
-            <a:avLst/>
-          </a:prstGeom>
-          <a:noFill/>
-        </p:spPr>
-        <p:txBody>
-          <a:bodyPr wrap="square" lIns="0" rIns="0" tIns="0" bIns="0" anchor="t">
-            <a:spAutoFit/>
-          </a:bodyPr>
-          <a:lstStyle/>
-          <a:p>
-            <a:pPr algn="l">
-              <a:lnSpc>
-                <a:spcPct val="120000"/>
-              </a:lnSpc>
-            </a:pPr>
-            <a:r>
-              <a:rPr sz="1500" b="1">
-                <a:solidFill>
-                  <a:srgbClr val="FFFFFF"/>
-                </a:solidFill>
-                <a:latin typeface="Unbounded"/>
-              </a:rPr>
-              <a:t>Своими силами</a:t>
-            </a:r>
-          </a:p>
-        </p:txBody>
-      </p:sp>
-      <p:sp>
-        <p:nvSpPr>
-          <p:cNvPr id="14" name="TextBox 13"/>
-          <p:cNvSpPr txBox="1"/>
-          <p:nvPr/>
-        </p:nvSpPr>
-        <p:spPr>
-          <a:xfrm>
-            <a:off x="4621682" y="3438144"/>
-            <a:ext cx="2948330" cy="533527"/>
-          </a:xfrm>
-          <a:prstGeom prst="rect">
-            <a:avLst/>
-          </a:prstGeom>
-          <a:noFill/>
-        </p:spPr>
-        <p:txBody>
-          <a:bodyPr wrap="square" lIns="0" rIns="0" tIns="0" bIns="0" anchor="t">
-            <a:spAutoFit/>
-          </a:bodyPr>
-          <a:lstStyle/>
-          <a:p>
-            <a:pPr algn="l">
-              <a:lnSpc>
-                <a:spcPct val="145000"/>
-              </a:lnSpc>
-            </a:pPr>
-            <a:r>
-              <a:rPr sz="1250" b="0">
-                <a:solidFill>
-                  <a:srgbClr val="9FB6DC"/>
-                </a:solidFill>
-                <a:latin typeface="Inter"/>
-              </a:rPr>
-              <a:t>Токены, зарубежные аккаунты, оплата из-за рубежа, блокировки</a:t>
-            </a:r>
-          </a:p>
-        </p:txBody>
-      </p:sp>
-      <p:sp>
-        <p:nvSpPr>
-          <p:cNvPr id="15" name="Rounded Rectangle 14"/>
-          <p:cNvSpPr/>
-          <p:nvPr/>
-        </p:nvSpPr>
-        <p:spPr>
-          <a:xfrm>
-            <a:off x="8082076" y="2651760"/>
-            <a:ext cx="3423818" cy="1783080"/>
-          </a:xfrm>
-          <a:prstGeom prst="roundRect">
-            <a:avLst>
-              <a:gd name="adj" fmla="val 8205"/>
-            </a:avLst>
-          </a:prstGeom>
-          <a:solidFill>
-            <a:srgbClr val="1B2D55"/>
-          </a:solidFill>
-          <a:ln w="20320">
-            <a:solidFill>
-              <a:srgbClr val="4ADE80"/>
-            </a:solidFill>
-          </a:ln>
-          <a:effectLst/>
-        </p:spPr>
-        <p:style>
-          <a:lnRef idx="1">
-            <a:schemeClr val="accent1"/>
-          </a:lnRef>
-          <a:fillRef idx="3">
-            <a:schemeClr val="accent1"/>
-          </a:fillRef>
-          <a:effectRef idx="2">
-            <a:schemeClr val="accent1"/>
-          </a:effectRef>
-          <a:fontRef idx="minor">
-            <a:schemeClr val="lt1"/>
-          </a:fontRef>
-        </p:style>
-        <p:txBody>
-          <a:bodyPr rtlCol="0" anchor="ctr"/>
-          <a:lstStyle/>
-          <a:p>
-            <a:pPr algn="ctr"/>
-          </a:p>
-        </p:txBody>
-      </p:sp>
-      <p:sp>
-        <p:nvSpPr>
-          <p:cNvPr id="16" name="TextBox 15"/>
-          <p:cNvSpPr txBox="1"/>
-          <p:nvPr/>
-        </p:nvSpPr>
-        <p:spPr>
-          <a:xfrm>
-            <a:off x="8319820" y="2889504"/>
-            <a:ext cx="2948330" cy="457200"/>
-          </a:xfrm>
-          <a:prstGeom prst="rect">
-            <a:avLst/>
-          </a:prstGeom>
-          <a:noFill/>
-        </p:spPr>
-        <p:txBody>
-          <a:bodyPr wrap="square" lIns="0" rIns="0" tIns="0" bIns="0" anchor="t">
-            <a:spAutoFit/>
-          </a:bodyPr>
-          <a:lstStyle/>
-          <a:p>
-            <a:pPr algn="l">
-              <a:lnSpc>
-                <a:spcPct val="120000"/>
-              </a:lnSpc>
-            </a:pPr>
-            <a:r>
-              <a:rPr sz="1500" b="1">
-                <a:solidFill>
-                  <a:srgbClr val="4ADE80"/>
-                </a:solidFill>
-                <a:latin typeface="Unbounded"/>
-              </a:rPr>
-              <a:t>Готовый сервис</a:t>
-            </a:r>
-          </a:p>
-        </p:txBody>
-      </p:sp>
-      <p:sp>
-        <p:nvSpPr>
-          <p:cNvPr id="17" name="TextBox 16"/>
-          <p:cNvSpPr txBox="1"/>
-          <p:nvPr/>
-        </p:nvSpPr>
-        <p:spPr>
-          <a:xfrm>
-            <a:off x="8319820" y="3438144"/>
-            <a:ext cx="2948330" cy="533527"/>
-          </a:xfrm>
-          <a:prstGeom prst="rect">
-            <a:avLst/>
-          </a:prstGeom>
-          <a:noFill/>
-        </p:spPr>
-        <p:txBody>
-          <a:bodyPr wrap="square" lIns="0" rIns="0" tIns="0" bIns="0" anchor="t">
-            <a:spAutoFit/>
-          </a:bodyPr>
-          <a:lstStyle/>
-          <a:p>
-            <a:pPr algn="l">
-              <a:lnSpc>
-                <a:spcPct val="145000"/>
-              </a:lnSpc>
-            </a:pPr>
-            <a:r>
-              <a:rPr sz="1250" b="0">
-                <a:solidFill>
-                  <a:srgbClr val="D6E4FF"/>
-                </a:solidFill>
-                <a:latin typeface="Inter"/>
-              </a:rPr>
-              <a:t>Фиксированная плата, те же площадки, сравнимый эффект</a:t>
-            </a:r>
-          </a:p>
-        </p:txBody>
-      </p:sp>
-      <p:sp>
-        <p:nvSpPr>
-          <p:cNvPr id="18" name="TextBox 17"/>
-          <p:cNvSpPr txBox="1"/>
-          <p:nvPr/>
-        </p:nvSpPr>
-        <p:spPr>
-          <a:xfrm>
-            <a:off x="685800" y="4709159"/>
-            <a:ext cx="10820095" cy="321754"/>
-          </a:xfrm>
-          <a:prstGeom prst="rect">
-            <a:avLst/>
-          </a:prstGeom>
-          <a:noFill/>
-        </p:spPr>
-        <p:txBody>
-          <a:bodyPr wrap="square" lIns="0" rIns="0" tIns="0" bIns="0" anchor="t">
-            <a:spAutoFit/>
-          </a:bodyPr>
-          <a:lstStyle/>
-          <a:p>
-            <a:pPr algn="l">
-              <a:lnSpc>
-                <a:spcPct val="145000"/>
-              </a:lnSpc>
-            </a:pPr>
-            <a:r>
-              <a:rPr sz="1350" b="1">
-                <a:solidFill>
-                  <a:srgbClr val="4ADE80"/>
-                </a:solidFill>
-                <a:latin typeface="Inter"/>
-              </a:rPr>
-              <a:t>Разница — от 70–80 тысяч рублей в месяц. </a:t>
-            </a:r>
-            <a:r>
-              <a:rPr sz="1350" b="0">
-                <a:solidFill>
-                  <a:srgbClr val="9FB6DC"/>
-                </a:solidFill>
-                <a:latin typeface="Inter"/>
-              </a:rPr>
-              <a:t>Столько стоят те же роли своими силами.</a:t>
-            </a:r>
-          </a:p>
-        </p:txBody>
-      </p:sp>
-      <p:sp>
-        <p:nvSpPr>
-          <p:cNvPr id="19" name="Rectangle 18"/>
-          <p:cNvSpPr/>
-          <p:nvPr/>
-        </p:nvSpPr>
-        <p:spPr>
-          <a:xfrm>
-            <a:off x="685800" y="5120640"/>
-            <a:ext cx="64008" cy="1417320"/>
-          </a:xfrm>
-          <a:prstGeom prst="rect">
-            <a:avLst/>
-          </a:prstGeom>
-          <a:solidFill>
-            <a:srgbClr val="7FC4FF"/>
-          </a:solidFill>
-          <a:ln>
-            <a:noFill/>
-          </a:ln>
-          <a:effectLst/>
-        </p:spPr>
-        <p:style>
-          <a:lnRef idx="1">
-            <a:schemeClr val="accent1"/>
-          </a:lnRef>
-          <a:fillRef idx="3">
-            <a:schemeClr val="accent1"/>
-          </a:fillRef>
-          <a:effectRef idx="2">
-            <a:schemeClr val="accent1"/>
-          </a:effectRef>
-          <a:fontRef idx="minor">
-            <a:schemeClr val="lt1"/>
-          </a:fontRef>
-        </p:style>
-        <p:txBody>
-          <a:bodyPr rtlCol="0" anchor="ctr"/>
-          <a:lstStyle/>
-          <a:p>
-            <a:pPr algn="ctr"/>
-          </a:p>
-        </p:txBody>
-      </p:sp>
-      <p:sp>
-        <p:nvSpPr>
-          <p:cNvPr id="20" name="TextBox 19"/>
-          <p:cNvSpPr txBox="1"/>
-          <p:nvPr/>
-        </p:nvSpPr>
-        <p:spPr>
-          <a:xfrm>
-            <a:off x="1069848" y="5120640"/>
-            <a:ext cx="10362895" cy="964692"/>
+            <a:off x="1143000" y="5824728"/>
+            <a:ext cx="10271455" cy="320802"/>
           </a:xfrm>
           <a:prstGeom prst="rect">
             <a:avLst/>
@@ -6122,46 +4867,7 @@
               </a:lnSpc>
             </a:pPr>
             <a:r>
-              <a:rPr sz="1800" b="0">
-                <a:solidFill>
-                  <a:srgbClr val="FFFFFF"/>
-                </a:solidFill>
-                <a:latin typeface="Unbounded"/>
-              </a:rPr>
-              <a:t>«Чтобы работать с нейросетями самому, нужно покупать токены, держать зарубежные аккаунты и воевать с блокировками. Готовый сервис снимает это целиком»</a:t>
-            </a:r>
-          </a:p>
-        </p:txBody>
-      </p:sp>
-      <p:sp>
-        <p:nvSpPr>
-          <p:cNvPr id="21" name="TextBox 20"/>
-          <p:cNvSpPr txBox="1"/>
-          <p:nvPr/>
-        </p:nvSpPr>
-        <p:spPr>
-          <a:xfrm>
-            <a:off x="1069848" y="6249923"/>
-            <a:ext cx="10362895" cy="287782"/>
-          </a:xfrm>
-          <a:prstGeom prst="rect">
-            <a:avLst/>
-          </a:prstGeom>
-          <a:noFill/>
-        </p:spPr>
-        <p:txBody>
-          <a:bodyPr wrap="square" lIns="0" rIns="0" tIns="0" bIns="0" anchor="t">
-            <a:spAutoFit/>
-          </a:bodyPr>
-          <a:lstStyle/>
-          <a:p>
-            <a:pPr algn="l">
-              <a:lnSpc>
-                <a:spcPct val="130000"/>
-              </a:lnSpc>
-            </a:pPr>
-            <a:r>
-              <a:rPr sz="1300" b="1">
+              <a:rPr sz="1500" b="1">
                 <a:solidFill>
                   <a:srgbClr val="7FC4FF"/>
                 </a:solidFill>
@@ -6170,7 +4876,7 @@
               <a:t>Руслан Анатольевич Дёмин, </a:t>
             </a:r>
             <a:r>
-              <a:rPr sz="1300" b="0">
+              <a:rPr sz="1500" b="0">
                 <a:solidFill>
                   <a:srgbClr val="9FB6DC"/>
                 </a:solidFill>
@@ -6416,8 +5122,8 @@
         </p:nvSpPr>
         <p:spPr>
           <a:xfrm>
-            <a:off x="685800" y="1417320"/>
-            <a:ext cx="9905695" cy="1074928"/>
+            <a:off x="685800" y="1463040"/>
+            <a:ext cx="4937760" cy="1264920"/>
           </a:xfrm>
           <a:prstGeom prst="rect">
             <a:avLst/>
@@ -6432,44 +5138,79 @@
           <a:p>
             <a:pPr algn="l">
               <a:lnSpc>
-                <a:spcPct val="116000"/>
+                <a:spcPct val="102000"/>
               </a:lnSpc>
             </a:pPr>
             <a:r>
-              <a:rPr sz="3400" b="1">
-                <a:solidFill>
-                  <a:srgbClr val="FFFFFF"/>
+              <a:rPr sz="9200" b="1">
+                <a:solidFill>
+                  <a:srgbClr val="4ADE80"/>
                 </a:solidFill>
                 <a:latin typeface="Unbounded"/>
               </a:rPr>
-              <a:t>Клиент спрашивает нейросеть, а не поисковик</a:t>
-            </a:r>
-          </a:p>
-        </p:txBody>
-      </p:sp>
-      <p:sp>
-        <p:nvSpPr>
-          <p:cNvPr id="9" name="Rounded Rectangle 8"/>
+              <a:t>3–6</a:t>
+            </a:r>
+          </a:p>
+        </p:txBody>
+      </p:sp>
+      <p:sp>
+        <p:nvSpPr>
+          <p:cNvPr id="9" name="TextBox 8"/>
+          <p:cNvSpPr txBox="1"/>
+          <p:nvPr/>
+        </p:nvSpPr>
+        <p:spPr>
+          <a:xfrm>
+            <a:off x="685800" y="2782824"/>
+            <a:ext cx="4937760" cy="347472"/>
+          </a:xfrm>
+          <a:prstGeom prst="rect">
+            <a:avLst/>
+          </a:prstGeom>
+          <a:noFill/>
+        </p:spPr>
+        <p:txBody>
+          <a:bodyPr wrap="square" lIns="0" rIns="0" tIns="0" bIns="0" anchor="t">
+            <a:spAutoFit/>
+          </a:bodyPr>
+          <a:lstStyle/>
+          <a:p>
+            <a:pPr algn="l">
+              <a:lnSpc>
+                <a:spcPct val="135000"/>
+              </a:lnSpc>
+            </a:pPr>
+            <a:r>
+              <a:rPr sz="1600" b="0">
+                <a:solidFill>
+                  <a:srgbClr val="D6E4FF"/>
+                </a:solidFill>
+                <a:latin typeface="Inter"/>
+              </a:rPr>
+              <a:t>месяцев занимает выход в нейровыдачу</a:t>
+            </a:r>
+          </a:p>
+        </p:txBody>
+      </p:sp>
+      <p:sp>
+        <p:nvSpPr>
+          <p:cNvPr id="10" name="Rectangle 9"/>
           <p:cNvSpPr/>
           <p:nvPr/>
         </p:nvSpPr>
         <p:spPr>
           <a:xfrm>
-            <a:off x="685800" y="2651760"/>
-            <a:ext cx="3718407" cy="1874519"/>
-          </a:xfrm>
-          <a:prstGeom prst="roundRect">
-            <a:avLst>
-              <a:gd name="adj" fmla="val 7804"/>
-            </a:avLst>
+            <a:off x="6263640" y="1600200"/>
+            <a:ext cx="45720" cy="1371600"/>
+          </a:xfrm>
+          <a:prstGeom prst="rect">
+            <a:avLst/>
           </a:prstGeom>
           <a:solidFill>
-            <a:srgbClr val="152343"/>
+            <a:srgbClr val="4ADE80"/>
           </a:solidFill>
-          <a:ln w="12700">
-            <a:solidFill>
-              <a:srgbClr val="2C4478"/>
-            </a:solidFill>
+          <a:ln>
+            <a:noFill/>
           </a:ln>
           <a:effectLst/>
         </p:spPr>
@@ -6497,53 +5238,14 @@
       </p:sp>
       <p:sp>
         <p:nvSpPr>
-          <p:cNvPr id="10" name="TextBox 9"/>
-          <p:cNvSpPr txBox="1"/>
-          <p:nvPr/>
-        </p:nvSpPr>
-        <p:spPr>
-          <a:xfrm>
-            <a:off x="960120" y="2889504"/>
-            <a:ext cx="3169767" cy="457200"/>
-          </a:xfrm>
-          <a:prstGeom prst="rect">
-            <a:avLst/>
-          </a:prstGeom>
-          <a:noFill/>
-        </p:spPr>
-        <p:txBody>
-          <a:bodyPr wrap="square" lIns="0" rIns="0" tIns="0" bIns="0" anchor="t">
-            <a:spAutoFit/>
-          </a:bodyPr>
-          <a:lstStyle/>
-          <a:p>
-            <a:pPr algn="l">
-              <a:lnSpc>
-                <a:spcPct val="120000"/>
-              </a:lnSpc>
-            </a:pPr>
-            <a:r>
-              <a:rPr sz="1700" b="1">
-                <a:solidFill>
-                  <a:srgbClr val="FFFFFF"/>
-                </a:solidFill>
-                <a:latin typeface="Unbounded"/>
-              </a:rPr>
-              <a:t>Поиск</a:t>
-            </a:r>
-          </a:p>
-        </p:txBody>
-      </p:sp>
-      <p:sp>
-        <p:nvSpPr>
           <p:cNvPr id="11" name="TextBox 10"/>
           <p:cNvSpPr txBox="1"/>
           <p:nvPr/>
         </p:nvSpPr>
         <p:spPr>
           <a:xfrm>
-            <a:off x="960120" y="3456432"/>
-            <a:ext cx="3169767" cy="321754"/>
+            <a:off x="6583679" y="1554480"/>
+            <a:ext cx="4922215" cy="901827"/>
           </a:xfrm>
           <a:prstGeom prst="rect">
             <a:avLst/>
@@ -6562,13 +5264,22 @@
               </a:lnSpc>
             </a:pPr>
             <a:r>
-              <a:rPr sz="1350" b="0">
-                <a:solidFill>
-                  <a:srgbClr val="9FB6DC"/>
+              <a:rPr sz="1500" b="1">
+                <a:solidFill>
+                  <a:srgbClr val="D6E4FF"/>
                 </a:solidFill>
                 <a:latin typeface="Inter"/>
               </a:rPr>
-              <a:t>Десять ссылок. Выбирает человек</a:t>
+              <a:t>Маркировать фото и видео как созданные ИИ закон сегодня не требует. </a:t>
+            </a:r>
+            <a:r>
+              <a:rPr sz="1500" b="0">
+                <a:solidFill>
+                  <a:srgbClr val="9FB6DC"/>
+                </a:solidFill>
+                <a:latin typeface="Inter"/>
+              </a:rPr>
+              <a:t>Этим грех не пользоваться.</a:t>
             </a:r>
           </a:p>
         </p:txBody>
@@ -6581,8 +5292,8 @@
         </p:nvSpPr>
         <p:spPr>
           <a:xfrm>
-            <a:off x="960120" y="4050791"/>
-            <a:ext cx="3169767" cy="278892"/>
+            <a:off x="1143000" y="3886200"/>
+            <a:ext cx="10271455" cy="1865376"/>
           </a:xfrm>
           <a:prstGeom prst="rect">
             <a:avLst/>
@@ -6597,53 +5308,40 @@
           <a:p>
             <a:pPr algn="l">
               <a:lnSpc>
-                <a:spcPct val="135000"/>
+                <a:spcPct val="126000"/>
               </a:lnSpc>
             </a:pPr>
             <a:r>
-              <a:rPr sz="1200" b="0">
-                <a:solidFill>
-                  <a:srgbClr val="9FB6DC"/>
-                </a:solidFill>
-                <a:latin typeface="Inter"/>
+              <a:rPr sz="2800" b="0">
+                <a:solidFill>
+                  <a:srgbClr val="FFFFFF"/>
+                </a:solidFill>
+                <a:latin typeface="Unbounded"/>
               </a:rPr>
-              <a:t>Борьба за </a:t>
-            </a:r>
-            <a:r>
-              <a:rPr sz="1200" b="1">
-                <a:solidFill>
-                  <a:srgbClr val="FFFFFF"/>
-                </a:solidFill>
-                <a:latin typeface="Inter"/>
-              </a:rPr>
-              <a:t>позицию в списке</a:t>
-            </a:r>
-          </a:p>
-        </p:txBody>
-      </p:sp>
-      <p:sp>
-        <p:nvSpPr>
-          <p:cNvPr id="13" name="Rounded Rectangle 12"/>
+              <a:t>«Клиент больше не листает десять ссылок — он спрашивает нейросеть и получает два-три названия. Попасть в этот ответ можно целенаправленно»</a:t>
+            </a:r>
+          </a:p>
+        </p:txBody>
+      </p:sp>
+      <p:sp>
+        <p:nvSpPr>
+          <p:cNvPr id="13" name="Rectangle 12"/>
           <p:cNvSpPr/>
           <p:nvPr/>
         </p:nvSpPr>
         <p:spPr>
           <a:xfrm>
-            <a:off x="4769967" y="2651760"/>
-            <a:ext cx="3718407" cy="1874519"/>
-          </a:xfrm>
-          <a:prstGeom prst="roundRect">
-            <a:avLst>
-              <a:gd name="adj" fmla="val 7804"/>
-            </a:avLst>
+            <a:off x="685800" y="3959352"/>
+            <a:ext cx="82296" cy="1755648"/>
+          </a:xfrm>
+          <a:prstGeom prst="rect">
+            <a:avLst/>
           </a:prstGeom>
           <a:solidFill>
-            <a:srgbClr val="1B2D55"/>
+            <a:srgbClr val="7FC4FF"/>
           </a:solidFill>
-          <a:ln w="20320">
-            <a:solidFill>
-              <a:srgbClr val="7FC4FF"/>
-            </a:solidFill>
+          <a:ln>
+            <a:noFill/>
           </a:ln>
           <a:effectLst/>
         </p:spPr>
@@ -6677,396 +5375,8 @@
         </p:nvSpPr>
         <p:spPr>
           <a:xfrm>
-            <a:off x="5044287" y="2889504"/>
-            <a:ext cx="3169767" cy="457200"/>
-          </a:xfrm>
-          <a:prstGeom prst="rect">
-            <a:avLst/>
-          </a:prstGeom>
-          <a:noFill/>
-        </p:spPr>
-        <p:txBody>
-          <a:bodyPr wrap="square" lIns="0" rIns="0" tIns="0" bIns="0" anchor="t">
-            <a:spAutoFit/>
-          </a:bodyPr>
-          <a:lstStyle/>
-          <a:p>
-            <a:pPr algn="l">
-              <a:lnSpc>
-                <a:spcPct val="120000"/>
-              </a:lnSpc>
-            </a:pPr>
-            <a:r>
-              <a:rPr sz="1700" b="1">
-                <a:solidFill>
-                  <a:srgbClr val="7FC4FF"/>
-                </a:solidFill>
-                <a:latin typeface="Unbounded"/>
-              </a:rPr>
-              <a:t>Нейроответ</a:t>
-            </a:r>
-          </a:p>
-        </p:txBody>
-      </p:sp>
-      <p:sp>
-        <p:nvSpPr>
-          <p:cNvPr id="15" name="TextBox 14"/>
-          <p:cNvSpPr txBox="1"/>
-          <p:nvPr/>
-        </p:nvSpPr>
-        <p:spPr>
-          <a:xfrm>
-            <a:off x="5044287" y="3456432"/>
-            <a:ext cx="3169767" cy="570356"/>
-          </a:xfrm>
-          <a:prstGeom prst="rect">
-            <a:avLst/>
-          </a:prstGeom>
-          <a:noFill/>
-        </p:spPr>
-        <p:txBody>
-          <a:bodyPr wrap="square" lIns="0" rIns="0" tIns="0" bIns="0" anchor="t">
-            <a:spAutoFit/>
-          </a:bodyPr>
-          <a:lstStyle/>
-          <a:p>
-            <a:pPr algn="l">
-              <a:lnSpc>
-                <a:spcPct val="145000"/>
-              </a:lnSpc>
-            </a:pPr>
-            <a:r>
-              <a:rPr sz="1350" b="0">
-                <a:solidFill>
-                  <a:srgbClr val="D6E4FF"/>
-                </a:solidFill>
-                <a:latin typeface="Inter"/>
-              </a:rPr>
-              <a:t>Два-три названия. Выбор уже сделан</a:t>
-            </a:r>
-          </a:p>
-        </p:txBody>
-      </p:sp>
-      <p:sp>
-        <p:nvSpPr>
-          <p:cNvPr id="16" name="TextBox 15"/>
-          <p:cNvSpPr txBox="1"/>
-          <p:nvPr/>
-        </p:nvSpPr>
-        <p:spPr>
-          <a:xfrm>
-            <a:off x="5044287" y="4050791"/>
-            <a:ext cx="3169767" cy="278892"/>
-          </a:xfrm>
-          <a:prstGeom prst="rect">
-            <a:avLst/>
-          </a:prstGeom>
-          <a:noFill/>
-        </p:spPr>
-        <p:txBody>
-          <a:bodyPr wrap="square" lIns="0" rIns="0" tIns="0" bIns="0" anchor="t">
-            <a:spAutoFit/>
-          </a:bodyPr>
-          <a:lstStyle/>
-          <a:p>
-            <a:pPr algn="l">
-              <a:lnSpc>
-                <a:spcPct val="135000"/>
-              </a:lnSpc>
-            </a:pPr>
-            <a:r>
-              <a:rPr sz="1200" b="0">
-                <a:solidFill>
-                  <a:srgbClr val="9FB6DC"/>
-                </a:solidFill>
-                <a:latin typeface="Inter"/>
-              </a:rPr>
-              <a:t>Борьба за </a:t>
-            </a:r>
-            <a:r>
-              <a:rPr sz="1200" b="1">
-                <a:solidFill>
-                  <a:srgbClr val="FFFFFF"/>
-                </a:solidFill>
-                <a:latin typeface="Inter"/>
-              </a:rPr>
-              <a:t>упоминание в ответе</a:t>
-            </a:r>
-          </a:p>
-        </p:txBody>
-      </p:sp>
-      <p:sp>
-        <p:nvSpPr>
-          <p:cNvPr id="17" name="Rounded Rectangle 16"/>
-          <p:cNvSpPr/>
-          <p:nvPr/>
-        </p:nvSpPr>
-        <p:spPr>
-          <a:xfrm>
-            <a:off x="8854135" y="2651760"/>
-            <a:ext cx="2651760" cy="1874519"/>
-          </a:xfrm>
-          <a:prstGeom prst="roundRect">
-            <a:avLst>
-              <a:gd name="adj" fmla="val 7804"/>
-            </a:avLst>
-          </a:prstGeom>
-          <a:solidFill>
-            <a:srgbClr val="152343"/>
-          </a:solidFill>
-          <a:ln w="12700">
-            <a:solidFill>
-              <a:srgbClr val="3E5C9C"/>
-            </a:solidFill>
-          </a:ln>
-          <a:effectLst/>
-        </p:spPr>
-        <p:style>
-          <a:lnRef idx="1">
-            <a:schemeClr val="accent1"/>
-          </a:lnRef>
-          <a:fillRef idx="3">
-            <a:schemeClr val="accent1"/>
-          </a:fillRef>
-          <a:effectRef idx="2">
-            <a:schemeClr val="accent1"/>
-          </a:effectRef>
-          <a:fontRef idx="minor">
-            <a:schemeClr val="lt1"/>
-          </a:fontRef>
-        </p:style>
-        <p:txBody>
-          <a:bodyPr rtlCol="0" anchor="ctr"/>
-          <a:lstStyle/>
-          <a:p>
-            <a:pPr algn="ctr"/>
-          </a:p>
-        </p:txBody>
-      </p:sp>
-      <p:sp>
-        <p:nvSpPr>
-          <p:cNvPr id="18" name="TextBox 17"/>
-          <p:cNvSpPr txBox="1"/>
-          <p:nvPr/>
-        </p:nvSpPr>
-        <p:spPr>
-          <a:xfrm>
-            <a:off x="9128455" y="2926079"/>
-            <a:ext cx="2103120" cy="731520"/>
-          </a:xfrm>
-          <a:prstGeom prst="rect">
-            <a:avLst/>
-          </a:prstGeom>
-          <a:noFill/>
-        </p:spPr>
-        <p:txBody>
-          <a:bodyPr wrap="square" lIns="0" rIns="0" tIns="0" bIns="0" anchor="t">
-            <a:spAutoFit/>
-          </a:bodyPr>
-          <a:lstStyle/>
-          <a:p>
-            <a:pPr algn="l">
-              <a:lnSpc>
-                <a:spcPct val="100000"/>
-              </a:lnSpc>
-            </a:pPr>
-            <a:r>
-              <a:rPr sz="4000" b="1">
-                <a:solidFill>
-                  <a:srgbClr val="4ADE80"/>
-                </a:solidFill>
-                <a:latin typeface="Unbounded"/>
-              </a:rPr>
-              <a:t>3–6</a:t>
-            </a:r>
-          </a:p>
-        </p:txBody>
-      </p:sp>
-      <p:sp>
-        <p:nvSpPr>
-          <p:cNvPr id="19" name="TextBox 18"/>
-          <p:cNvSpPr txBox="1"/>
-          <p:nvPr/>
-        </p:nvSpPr>
-        <p:spPr>
-          <a:xfrm>
-            <a:off x="9128455" y="3566160"/>
-            <a:ext cx="2103120" cy="517652"/>
-          </a:xfrm>
-          <a:prstGeom prst="rect">
-            <a:avLst/>
-          </a:prstGeom>
-          <a:noFill/>
-        </p:spPr>
-        <p:txBody>
-          <a:bodyPr wrap="square" lIns="0" rIns="0" tIns="0" bIns="0" anchor="t">
-            <a:spAutoFit/>
-          </a:bodyPr>
-          <a:lstStyle/>
-          <a:p>
-            <a:pPr algn="l">
-              <a:lnSpc>
-                <a:spcPct val="140000"/>
-              </a:lnSpc>
-            </a:pPr>
-            <a:r>
-              <a:rPr sz="1250" b="0">
-                <a:solidFill>
-                  <a:srgbClr val="D6E4FF"/>
-                </a:solidFill>
-                <a:latin typeface="Inter"/>
-              </a:rPr>
-              <a:t>месяцев занимает выход в нейровыдачу</a:t>
-            </a:r>
-          </a:p>
-        </p:txBody>
-      </p:sp>
-      <p:sp>
-        <p:nvSpPr>
-          <p:cNvPr id="20" name="Rectangle 19"/>
-          <p:cNvSpPr/>
-          <p:nvPr/>
-        </p:nvSpPr>
-        <p:spPr>
-          <a:xfrm>
-            <a:off x="685800" y="4700016"/>
-            <a:ext cx="201168" cy="20116"/>
-          </a:xfrm>
-          <a:prstGeom prst="rect">
-            <a:avLst/>
-          </a:prstGeom>
-          <a:solidFill>
-            <a:srgbClr val="4ADE80"/>
-          </a:solidFill>
-          <a:ln>
-            <a:noFill/>
-          </a:ln>
-          <a:effectLst/>
-        </p:spPr>
-        <p:style>
-          <a:lnRef idx="1">
-            <a:schemeClr val="accent1"/>
-          </a:lnRef>
-          <a:fillRef idx="3">
-            <a:schemeClr val="accent1"/>
-          </a:fillRef>
-          <a:effectRef idx="2">
-            <a:schemeClr val="accent1"/>
-          </a:effectRef>
-          <a:fontRef idx="minor">
-            <a:schemeClr val="lt1"/>
-          </a:fontRef>
-        </p:style>
-        <p:txBody>
-          <a:bodyPr rtlCol="0" anchor="ctr"/>
-          <a:lstStyle/>
-          <a:p>
-            <a:pPr algn="ctr"/>
-          </a:p>
-        </p:txBody>
-      </p:sp>
-      <p:sp>
-        <p:nvSpPr>
-          <p:cNvPr id="21" name="TextBox 20"/>
-          <p:cNvSpPr txBox="1"/>
-          <p:nvPr/>
-        </p:nvSpPr>
-        <p:spPr>
-          <a:xfrm>
-            <a:off x="1069848" y="4572000"/>
-            <a:ext cx="10436047" cy="295402"/>
-          </a:xfrm>
-          <a:prstGeom prst="rect">
-            <a:avLst/>
-          </a:prstGeom>
-          <a:noFill/>
-        </p:spPr>
-        <p:txBody>
-          <a:bodyPr wrap="square" lIns="0" rIns="0" tIns="0" bIns="0" anchor="t">
-            <a:spAutoFit/>
-          </a:bodyPr>
-          <a:lstStyle/>
-          <a:p>
-            <a:pPr algn="l">
-              <a:lnSpc>
-                <a:spcPct val="140000"/>
-              </a:lnSpc>
-            </a:pPr>
-            <a:r>
-              <a:rPr sz="1250" b="1">
-                <a:solidFill>
-                  <a:srgbClr val="D6E4FF"/>
-                </a:solidFill>
-                <a:latin typeface="Inter"/>
-              </a:rPr>
-              <a:t>Маркировать фото и видео как созданные ИИ закон сегодня не требует. </a:t>
-            </a:r>
-            <a:r>
-              <a:rPr sz="1250" b="0">
-                <a:solidFill>
-                  <a:srgbClr val="9FB6DC"/>
-                </a:solidFill>
-                <a:latin typeface="Inter"/>
-              </a:rPr>
-              <a:t>Этим грех не пользоваться.</a:t>
-            </a:r>
-          </a:p>
-        </p:txBody>
-      </p:sp>
-      <p:sp>
-        <p:nvSpPr>
-          <p:cNvPr id="22" name="Rectangle 21"/>
-          <p:cNvSpPr/>
-          <p:nvPr/>
-        </p:nvSpPr>
-        <p:spPr>
-          <a:xfrm>
-            <a:off x="685800" y="5138928"/>
-            <a:ext cx="64008" cy="1371600"/>
-          </a:xfrm>
-          <a:prstGeom prst="rect">
-            <a:avLst/>
-          </a:prstGeom>
-          <a:solidFill>
-            <a:srgbClr val="7FC4FF"/>
-          </a:solidFill>
-          <a:ln>
-            <a:noFill/>
-          </a:ln>
-          <a:effectLst/>
-        </p:spPr>
-        <p:style>
-          <a:lnRef idx="1">
-            <a:schemeClr val="accent1"/>
-          </a:lnRef>
-          <a:fillRef idx="3">
-            <a:schemeClr val="accent1"/>
-          </a:fillRef>
-          <a:effectRef idx="2">
-            <a:schemeClr val="accent1"/>
-          </a:effectRef>
-          <a:fontRef idx="minor">
-            <a:schemeClr val="lt1"/>
-          </a:fontRef>
-        </p:style>
-        <p:txBody>
-          <a:bodyPr rtlCol="0" anchor="ctr"/>
-          <a:lstStyle/>
-          <a:p>
-            <a:pPr algn="ctr"/>
-          </a:p>
-        </p:txBody>
-      </p:sp>
-      <p:sp>
-        <p:nvSpPr>
-          <p:cNvPr id="23" name="TextBox 22"/>
-          <p:cNvSpPr txBox="1"/>
-          <p:nvPr/>
-        </p:nvSpPr>
-        <p:spPr>
-          <a:xfrm>
-            <a:off x="1069848" y="5138928"/>
-            <a:ext cx="10362895" cy="964692"/>
+            <a:off x="1143000" y="6044184"/>
+            <a:ext cx="10271455" cy="320802"/>
           </a:xfrm>
           <a:prstGeom prst="rect">
             <a:avLst/>
@@ -7085,46 +5395,7 @@
               </a:lnSpc>
             </a:pPr>
             <a:r>
-              <a:rPr sz="1800" b="0">
-                <a:solidFill>
-                  <a:srgbClr val="FFFFFF"/>
-                </a:solidFill>
-                <a:latin typeface="Unbounded"/>
-              </a:rPr>
-              <a:t>«Попасть в нейроответ можно целенаправленно, но это не кнопка: от трёх до шести месяцев работы. Зато эту работу машина делает лучше человека — и без агентского счёта каждый месяц»</a:t>
-            </a:r>
-          </a:p>
-        </p:txBody>
-      </p:sp>
-      <p:sp>
-        <p:nvSpPr>
-          <p:cNvPr id="24" name="TextBox 23"/>
-          <p:cNvSpPr txBox="1"/>
-          <p:nvPr/>
-        </p:nvSpPr>
-        <p:spPr>
-          <a:xfrm>
-            <a:off x="1069848" y="6268212"/>
-            <a:ext cx="10362895" cy="287782"/>
-          </a:xfrm>
-          <a:prstGeom prst="rect">
-            <a:avLst/>
-          </a:prstGeom>
-          <a:noFill/>
-        </p:spPr>
-        <p:txBody>
-          <a:bodyPr wrap="square" lIns="0" rIns="0" tIns="0" bIns="0" anchor="t">
-            <a:spAutoFit/>
-          </a:bodyPr>
-          <a:lstStyle/>
-          <a:p>
-            <a:pPr algn="l">
-              <a:lnSpc>
-                <a:spcPct val="130000"/>
-              </a:lnSpc>
-            </a:pPr>
-            <a:r>
-              <a:rPr sz="1300" b="1">
+              <a:rPr sz="1500" b="1">
                 <a:solidFill>
                   <a:srgbClr val="7FC4FF"/>
                 </a:solidFill>
@@ -7133,7 +5404,7 @@
               <a:t>Руслан Анатольевич Дёмин, </a:t>
             </a:r>
             <a:r>
-              <a:rPr sz="1300" b="0">
+              <a:rPr sz="1500" b="0">
                 <a:solidFill>
                   <a:srgbClr val="9FB6DC"/>
                 </a:solidFill>
@@ -7379,8 +5650,8 @@
         </p:nvSpPr>
         <p:spPr>
           <a:xfrm>
-            <a:off x="685800" y="1463040"/>
-            <a:ext cx="7863840" cy="515111"/>
+            <a:off x="685800" y="1325880"/>
+            <a:ext cx="7680960" cy="1097280"/>
           </a:xfrm>
           <a:prstGeom prst="rect">
             <a:avLst/>
@@ -7395,44 +5666,79 @@
           <a:p>
             <a:pPr algn="l">
               <a:lnSpc>
-                <a:spcPct val="116000"/>
+                <a:spcPct val="112000"/>
               </a:lnSpc>
             </a:pPr>
             <a:r>
-              <a:rPr sz="3000" b="1">
+              <a:rPr sz="3600" b="1">
                 <a:solidFill>
                   <a:srgbClr val="FFFFFF"/>
                 </a:solidFill>
                 <a:latin typeface="Unbounded"/>
               </a:rPr>
-              <a:t>Справка и контакты</a:t>
-            </a:r>
-          </a:p>
-        </p:txBody>
-      </p:sp>
-      <p:sp>
-        <p:nvSpPr>
-          <p:cNvPr id="9" name="Rounded Rectangle 8"/>
+              <a:t>Руслан Анатольевич Дёмин</a:t>
+            </a:r>
+          </a:p>
+        </p:txBody>
+      </p:sp>
+      <p:sp>
+        <p:nvSpPr>
+          <p:cNvPr id="9" name="TextBox 8"/>
+          <p:cNvSpPr txBox="1"/>
+          <p:nvPr/>
+        </p:nvSpPr>
+        <p:spPr>
+          <a:xfrm>
+            <a:off x="685800" y="2532888"/>
+            <a:ext cx="7315200" cy="386842"/>
+          </a:xfrm>
+          <a:prstGeom prst="rect">
+            <a:avLst/>
+          </a:prstGeom>
+          <a:noFill/>
+        </p:spPr>
+        <p:txBody>
+          <a:bodyPr wrap="square" lIns="0" rIns="0" tIns="0" bIns="0" anchor="t">
+            <a:spAutoFit/>
+          </a:bodyPr>
+          <a:lstStyle/>
+          <a:p>
+            <a:pPr algn="l">
+              <a:lnSpc>
+                <a:spcPct val="130000"/>
+              </a:lnSpc>
+            </a:pPr>
+            <a:r>
+              <a:rPr sz="1900" b="0">
+                <a:solidFill>
+                  <a:srgbClr val="9FB6DC"/>
+                </a:solidFill>
+                <a:latin typeface="Inter"/>
+              </a:rPr>
+              <a:t>управляющий партнёр</a:t>
+            </a:r>
+          </a:p>
+        </p:txBody>
+      </p:sp>
+      <p:sp>
+        <p:nvSpPr>
+          <p:cNvPr id="10" name="Rectangle 9"/>
           <p:cNvSpPr/>
           <p:nvPr/>
         </p:nvSpPr>
         <p:spPr>
           <a:xfrm>
-            <a:off x="685800" y="2468880"/>
-            <a:ext cx="6675120" cy="1234440"/>
-          </a:xfrm>
-          <a:prstGeom prst="roundRect">
-            <a:avLst>
-              <a:gd name="adj" fmla="val 11851"/>
-            </a:avLst>
+            <a:off x="685800" y="3230626"/>
+            <a:ext cx="2011680" cy="32004"/>
+          </a:xfrm>
+          <a:prstGeom prst="rect">
+            <a:avLst/>
           </a:prstGeom>
           <a:solidFill>
-            <a:srgbClr val="152343"/>
+            <a:srgbClr val="7FC4FF"/>
           </a:solidFill>
-          <a:ln w="12700">
-            <a:solidFill>
-              <a:srgbClr val="2C4478"/>
-            </a:solidFill>
+          <a:ln>
+            <a:noFill/>
           </a:ln>
           <a:effectLst/>
         </p:spPr>
@@ -7460,14 +5766,14 @@
       </p:sp>
       <p:sp>
         <p:nvSpPr>
-          <p:cNvPr id="10" name="TextBox 9"/>
+          <p:cNvPr id="11" name="TextBox 10"/>
           <p:cNvSpPr txBox="1"/>
           <p:nvPr/>
         </p:nvSpPr>
         <p:spPr>
           <a:xfrm>
-            <a:off x="941832" y="2670048"/>
-            <a:ext cx="6126480" cy="329184"/>
+            <a:off x="685800" y="3504946"/>
+            <a:ext cx="7315200" cy="403352"/>
           </a:xfrm>
           <a:prstGeom prst="rect">
             <a:avLst/>
@@ -7482,31 +5788,31 @@
           <a:p>
             <a:pPr algn="l">
               <a:lnSpc>
-                <a:spcPct val="120000"/>
+                <a:spcPct val="130000"/>
               </a:lnSpc>
             </a:pPr>
             <a:r>
-              <a:rPr sz="1450" b="1">
-                <a:solidFill>
-                  <a:srgbClr val="7FC4FF"/>
-                </a:solidFill>
-                <a:latin typeface="Unbounded"/>
+              <a:rPr sz="2000" b="1">
+                <a:solidFill>
+                  <a:srgbClr val="FFFFFF"/>
+                </a:solidFill>
+                <a:latin typeface="Inter"/>
               </a:rPr>
-              <a:t>Промптер</a:t>
-            </a:r>
-          </a:p>
-        </p:txBody>
-      </p:sp>
-      <p:sp>
-        <p:nvSpPr>
-          <p:cNvPr id="11" name="TextBox 10"/>
+              <a:t>+7 906 758-77-77</a:t>
+            </a:r>
+          </a:p>
+        </p:txBody>
+      </p:sp>
+      <p:sp>
+        <p:nvSpPr>
+          <p:cNvPr id="12" name="TextBox 11"/>
           <p:cNvSpPr txBox="1"/>
           <p:nvPr/>
         </p:nvSpPr>
         <p:spPr>
           <a:xfrm>
-            <a:off x="941832" y="3090672"/>
-            <a:ext cx="6163056" cy="499871"/>
+            <a:off x="685800" y="3944874"/>
+            <a:ext cx="7315200" cy="403352"/>
           </a:xfrm>
           <a:prstGeom prst="rect">
             <a:avLst/>
@@ -7521,44 +5827,103 @@
           <a:p>
             <a:pPr algn="l">
               <a:lnSpc>
-                <a:spcPct val="140000"/>
+                <a:spcPct val="130000"/>
               </a:lnSpc>
             </a:pPr>
             <a:r>
-              <a:rPr sz="1200" b="0">
-                <a:solidFill>
-                  <a:srgbClr val="D6E4FF"/>
+              <a:rPr sz="2000" b="1">
+                <a:solidFill>
+                  <a:srgbClr val="FFFFFF"/>
                 </a:solidFill>
                 <a:latin typeface="Inter"/>
               </a:rPr>
-              <a:t>Российский сервис автоматизации SMM: исследование ниши, стратегия, генерация текстов, изображений и видео, публикация на 6+ площадках.</a:t>
-            </a:r>
-          </a:p>
-        </p:txBody>
-      </p:sp>
-      <p:sp>
-        <p:nvSpPr>
-          <p:cNvPr id="12" name="Rounded Rectangle 11"/>
+              <a:t>ubeto@mail.ru</a:t>
+            </a:r>
+          </a:p>
+        </p:txBody>
+      </p:sp>
+      <p:sp>
+        <p:nvSpPr>
+          <p:cNvPr id="13" name="TextBox 12"/>
+          <p:cNvSpPr txBox="1"/>
+          <p:nvPr/>
+        </p:nvSpPr>
+        <p:spPr>
+          <a:xfrm>
+            <a:off x="685800" y="4384802"/>
+            <a:ext cx="7315200" cy="403352"/>
+          </a:xfrm>
+          <a:prstGeom prst="rect">
+            <a:avLst/>
+          </a:prstGeom>
+          <a:noFill/>
+        </p:spPr>
+        <p:txBody>
+          <a:bodyPr wrap="square" lIns="0" rIns="0" tIns="0" bIns="0" anchor="t">
+            <a:spAutoFit/>
+          </a:bodyPr>
+          <a:lstStyle/>
+          <a:p>
+            <a:pPr algn="l">
+              <a:lnSpc>
+                <a:spcPct val="130000"/>
+              </a:lnSpc>
+            </a:pPr>
+            <a:r>
+              <a:rPr sz="2000" b="1">
+                <a:solidFill>
+                  <a:srgbClr val="7FC4FF"/>
+                </a:solidFill>
+                <a:latin typeface="Inter"/>
+              </a:rPr>
+              <a:t>genii-ai.ru</a:t>
+            </a:r>
+          </a:p>
+        </p:txBody>
+      </p:sp>
+      <p:pic>
+        <p:nvPicPr>
+          <p:cNvPr id="14" name="Picture 13" descr="press-qr.png"/>
+          <p:cNvPicPr>
+            <a:picLocks noChangeAspect="1"/>
+          </p:cNvPicPr>
+          <p:nvPr/>
+        </p:nvPicPr>
+        <p:blipFill>
+          <a:blip r:embed="rId4"/>
+          <a:stretch>
+            <a:fillRect/>
+          </a:stretch>
+        </p:blipFill>
+        <p:spPr>
+          <a:xfrm>
+            <a:off x="9859975" y="1554480"/>
+            <a:ext cx="1645920" cy="1645920"/>
+          </a:xfrm>
+          <a:prstGeom prst="rect">
+            <a:avLst/>
+          </a:prstGeom>
+        </p:spPr>
+      </p:pic>
+      <p:sp>
+        <p:nvSpPr>
+          <p:cNvPr id="15" name="Rectangle 14"/>
           <p:cNvSpPr/>
           <p:nvPr/>
         </p:nvSpPr>
         <p:spPr>
           <a:xfrm>
-            <a:off x="685800" y="3931920"/>
-            <a:ext cx="6675120" cy="1234440"/>
-          </a:xfrm>
-          <a:prstGeom prst="roundRect">
-            <a:avLst>
-              <a:gd name="adj" fmla="val 11851"/>
-            </a:avLst>
+            <a:off x="685800" y="5257800"/>
+            <a:ext cx="10820095" cy="10972"/>
+          </a:xfrm>
+          <a:prstGeom prst="rect">
+            <a:avLst/>
           </a:prstGeom>
           <a:solidFill>
-            <a:srgbClr val="152343"/>
+            <a:srgbClr val="3E5C9C"/>
           </a:solidFill>
-          <a:ln w="12700">
-            <a:solidFill>
-              <a:srgbClr val="2C4478"/>
-            </a:solidFill>
+          <a:ln>
+            <a:noFill/>
           </a:ln>
           <a:effectLst/>
         </p:spPr>
@@ -7586,53 +5951,14 @@
       </p:sp>
       <p:sp>
         <p:nvSpPr>
-          <p:cNvPr id="13" name="TextBox 12"/>
+          <p:cNvPr id="16" name="TextBox 15"/>
           <p:cNvSpPr txBox="1"/>
           <p:nvPr/>
         </p:nvSpPr>
         <p:spPr>
           <a:xfrm>
-            <a:off x="941832" y="4133088"/>
-            <a:ext cx="6126480" cy="329184"/>
-          </a:xfrm>
-          <a:prstGeom prst="rect">
-            <a:avLst/>
-          </a:prstGeom>
-          <a:noFill/>
-        </p:spPr>
-        <p:txBody>
-          <a:bodyPr wrap="square" lIns="0" rIns="0" tIns="0" bIns="0" anchor="t">
-            <a:spAutoFit/>
-          </a:bodyPr>
-          <a:lstStyle/>
-          <a:p>
-            <a:pPr algn="l">
-              <a:lnSpc>
-                <a:spcPct val="120000"/>
-              </a:lnSpc>
-            </a:pPr>
-            <a:r>
-              <a:rPr sz="1450" b="1">
-                <a:solidFill>
-                  <a:srgbClr val="7FC4FF"/>
-                </a:solidFill>
-                <a:latin typeface="Unbounded"/>
-              </a:rPr>
-              <a:t>ГенИИ</a:t>
-            </a:r>
-          </a:p>
-        </p:txBody>
-      </p:sp>
-      <p:sp>
-        <p:nvSpPr>
-          <p:cNvPr id="14" name="TextBox 13"/>
-          <p:cNvSpPr txBox="1"/>
-          <p:nvPr/>
-        </p:nvSpPr>
-        <p:spPr>
-          <a:xfrm>
-            <a:off x="941832" y="4553712"/>
-            <a:ext cx="6163056" cy="499871"/>
+            <a:off x="685800" y="5486400"/>
+            <a:ext cx="10820095" cy="517652"/>
           </a:xfrm>
           <a:prstGeom prst="rect">
             <a:avLst/>
@@ -7651,100 +5977,22 @@
               </a:lnSpc>
             </a:pPr>
             <a:r>
-              <a:rPr sz="1200" b="0">
-                <a:solidFill>
-                  <a:srgbClr val="D6E4FF"/>
+              <a:rPr sz="1250" b="1">
+                <a:solidFill>
+                  <a:srgbClr val="7FC4FF"/>
                 </a:solidFill>
                 <a:latin typeface="Inter"/>
               </a:rPr>
-              <a:t>Официальный партнёр «Промптера» по Москве и области. Продвижение компаний в ответах нейросетей — SEO и GEO.</a:t>
-            </a:r>
-          </a:p>
-        </p:txBody>
-      </p:sp>
-      <p:sp>
-        <p:nvSpPr>
-          <p:cNvPr id="15" name="Rounded Rectangle 14"/>
-          <p:cNvSpPr/>
-          <p:nvPr/>
-        </p:nvSpPr>
-        <p:spPr>
-          <a:xfrm>
-            <a:off x="7818120" y="2468880"/>
-            <a:ext cx="3687775" cy="2697480"/>
-          </a:xfrm>
-          <a:prstGeom prst="roundRect">
-            <a:avLst>
-              <a:gd name="adj" fmla="val 5423"/>
-            </a:avLst>
-          </a:prstGeom>
-          <a:solidFill>
-            <a:srgbClr val="1B2D55"/>
-          </a:solidFill>
-          <a:ln w="12700">
-            <a:solidFill>
-              <a:srgbClr val="3E5C9C"/>
-            </a:solidFill>
-          </a:ln>
-          <a:effectLst/>
-        </p:spPr>
-        <p:style>
-          <a:lnRef idx="1">
-            <a:schemeClr val="accent1"/>
-          </a:lnRef>
-          <a:fillRef idx="3">
-            <a:schemeClr val="accent1"/>
-          </a:fillRef>
-          <a:effectRef idx="2">
-            <a:schemeClr val="accent1"/>
-          </a:effectRef>
-          <a:fontRef idx="minor">
-            <a:schemeClr val="lt1"/>
-          </a:fontRef>
-        </p:style>
-        <p:txBody>
-          <a:bodyPr rtlCol="0" anchor="ctr"/>
-          <a:lstStyle/>
-          <a:p>
-            <a:pPr algn="ctr"/>
-          </a:p>
-        </p:txBody>
-      </p:sp>
-      <p:sp>
-        <p:nvSpPr>
-          <p:cNvPr id="16" name="TextBox 15"/>
-          <p:cNvSpPr txBox="1"/>
-          <p:nvPr/>
-        </p:nvSpPr>
-        <p:spPr>
-          <a:xfrm>
-            <a:off x="8092440" y="2697480"/>
-            <a:ext cx="3139135" cy="568959"/>
-          </a:xfrm>
-          <a:prstGeom prst="rect">
-            <a:avLst/>
-          </a:prstGeom>
-          <a:noFill/>
-        </p:spPr>
-        <p:txBody>
-          <a:bodyPr wrap="square" lIns="0" rIns="0" tIns="0" bIns="0" anchor="t">
-            <a:spAutoFit/>
-          </a:bodyPr>
-          <a:lstStyle/>
-          <a:p>
-            <a:pPr algn="l">
-              <a:lnSpc>
-                <a:spcPct val="122000"/>
-              </a:lnSpc>
-            </a:pPr>
-            <a:r>
-              <a:rPr sz="1600" b="1">
-                <a:solidFill>
-                  <a:srgbClr val="FFFFFF"/>
-                </a:solidFill>
-                <a:latin typeface="Unbounded"/>
+              <a:t>Промптер — </a:t>
+            </a:r>
+            <a:r>
+              <a:rPr sz="1250" b="0">
+                <a:solidFill>
+                  <a:srgbClr val="9FB6DC"/>
+                </a:solidFill>
+                <a:latin typeface="Inter"/>
               </a:rPr>
-              <a:t>Руслан Анатольевич Дёмин</a:t>
+              <a:t>российский сервис автоматизации SMM: исследование ниши, стратегия, генерация текстов, изображений и видео, публикация на 6+ площадках.</a:t>
             </a:r>
           </a:p>
         </p:txBody>
@@ -7757,130 +6005,8 @@
         </p:nvSpPr>
         <p:spPr>
           <a:xfrm>
-            <a:off x="8092440" y="3310128"/>
-            <a:ext cx="3139135" cy="271272"/>
-          </a:xfrm>
-          <a:prstGeom prst="rect">
-            <a:avLst/>
-          </a:prstGeom>
-          <a:noFill/>
-        </p:spPr>
-        <p:txBody>
-          <a:bodyPr wrap="square" lIns="0" rIns="0" tIns="0" bIns="0" anchor="t">
-            <a:spAutoFit/>
-          </a:bodyPr>
-          <a:lstStyle/>
-          <a:p>
-            <a:pPr algn="l">
-              <a:lnSpc>
-                <a:spcPct val="130000"/>
-              </a:lnSpc>
-            </a:pPr>
-            <a:r>
-              <a:rPr sz="1200" b="0">
-                <a:solidFill>
-                  <a:srgbClr val="9FB6DC"/>
-                </a:solidFill>
-                <a:latin typeface="Inter"/>
-              </a:rPr>
-              <a:t>управляющий партнёр</a:t>
-            </a:r>
-          </a:p>
-        </p:txBody>
-      </p:sp>
-      <p:pic>
-        <p:nvPicPr>
-          <p:cNvPr id="18" name="Picture 17" descr="press-qr.png"/>
-          <p:cNvPicPr>
-            <a:picLocks noChangeAspect="1"/>
-          </p:cNvPicPr>
-          <p:nvPr/>
-        </p:nvPicPr>
-        <p:blipFill>
-          <a:blip r:embed="rId4"/>
-          <a:stretch>
-            <a:fillRect/>
-          </a:stretch>
-        </p:blipFill>
-        <p:spPr>
-          <a:xfrm>
-            <a:off x="8092440" y="3749039"/>
-            <a:ext cx="1143000" cy="1143000"/>
-          </a:xfrm>
-          <a:prstGeom prst="rect">
-            <a:avLst/>
-          </a:prstGeom>
-        </p:spPr>
-      </p:pic>
-      <p:sp>
-        <p:nvSpPr>
-          <p:cNvPr id="19" name="TextBox 18"/>
-          <p:cNvSpPr txBox="1"/>
-          <p:nvPr/>
-        </p:nvSpPr>
-        <p:spPr>
-          <a:xfrm>
-            <a:off x="9418320" y="3822191"/>
-            <a:ext cx="1813255" cy="840867"/>
-          </a:xfrm>
-          <a:prstGeom prst="rect">
-            <a:avLst/>
-          </a:prstGeom>
-          <a:noFill/>
-        </p:spPr>
-        <p:txBody>
-          <a:bodyPr wrap="square" lIns="0" rIns="0" tIns="0" bIns="0" anchor="t">
-            <a:spAutoFit/>
-          </a:bodyPr>
-          <a:lstStyle/>
-          <a:p>
-            <a:pPr algn="l">
-              <a:lnSpc>
-                <a:spcPct val="155000"/>
-              </a:lnSpc>
-            </a:pPr>
-            <a:r>
-              <a:rPr sz="1300" b="1">
-                <a:solidFill>
-                  <a:srgbClr val="FFFFFF"/>
-                </a:solidFill>
-                <a:latin typeface="Inter"/>
-              </a:rPr>
-              <a:t>+7 906 758-77-77
-</a:t>
-            </a:r>
-            <a:r>
-              <a:rPr sz="1300" b="0">
-                <a:solidFill>
-                  <a:srgbClr val="D6E4FF"/>
-                </a:solidFill>
-                <a:latin typeface="Inter"/>
-              </a:rPr>
-              <a:t>ubeto@mail.ru
-</a:t>
-            </a:r>
-            <a:r>
-              <a:rPr sz="1300" b="1">
-                <a:solidFill>
-                  <a:srgbClr val="7FC4FF"/>
-                </a:solidFill>
-                <a:latin typeface="Inter"/>
-              </a:rPr>
-              <a:t>genii-ai.ru</a:t>
-            </a:r>
-          </a:p>
-        </p:txBody>
-      </p:sp>
-      <p:sp>
-        <p:nvSpPr>
-          <p:cNvPr id="20" name="TextBox 19"/>
-          <p:cNvSpPr txBox="1"/>
-          <p:nvPr/>
-        </p:nvSpPr>
-        <p:spPr>
-          <a:xfrm>
-            <a:off x="685800" y="5943600"/>
-            <a:ext cx="10789920" cy="277622"/>
+            <a:off x="685800" y="6058915"/>
+            <a:ext cx="10820095" cy="295402"/>
           </a:xfrm>
           <a:prstGeom prst="rect">
             <a:avLst/>
@@ -7899,13 +6025,22 @@
               </a:lnSpc>
             </a:pPr>
             <a:r>
-              <a:rPr sz="1150" b="0">
-                <a:solidFill>
-                  <a:srgbClr val="9FB6DC"/>
+              <a:rPr sz="1250" b="1">
+                <a:solidFill>
+                  <a:srgbClr val="7FC4FF"/>
                 </a:solidFill>
                 <a:latin typeface="Inter"/>
               </a:rPr>
-              <a:t>Пресс-конференция «Эффективные инструменты привлечения клиентов»   ·   20 октября 2026   ·   Москва, Кузнецкий мост, 7</a:t>
+              <a:t>ГенИИ — </a:t>
+            </a:r>
+            <a:r>
+              <a:rPr sz="1250" b="0">
+                <a:solidFill>
+                  <a:srgbClr val="9FB6DC"/>
+                </a:solidFill>
+                <a:latin typeface="Inter"/>
+              </a:rPr>
+              <a:t>официальный партнёр «Промптера» по Москве и области. Продвижение компаний в ответах нейросетей: SEO и GEO.</a:t>
             </a:r>
           </a:p>
         </p:txBody>

--- a/pressa/press-kit-genii-prompter.pptx
+++ b/pressa/press-kit-genii-prompter.pptx
@@ -11,6 +11,7 @@
     <p:sldId id="259" r:id="rId10"/>
     <p:sldId id="260" r:id="rId11"/>
     <p:sldId id="261" r:id="rId12"/>
+    <p:sldId id="262" r:id="rId13"/>
   </p:sldIdLst>
   <p:sldSz cx="12191695" cy="6858000" type="screen4x3"/>
   <p:notesSz cx="6858000" cy="9144000"/>
@@ -3139,7 +3140,7 @@
       </p:sp>
       <p:pic>
         <p:nvPicPr>
-          <p:cNvPr id="3" name="Picture 2" descr="press-fon.png"/>
+          <p:cNvPr id="3" name="Picture 2" descr="press-muzhik.png"/>
           <p:cNvPicPr>
             <a:picLocks noChangeAspect="1"/>
           </p:cNvPicPr>
@@ -3153,8 +3154,8 @@
         </p:blipFill>
         <p:spPr>
           <a:xfrm>
-            <a:off x="0" y="0"/>
-            <a:ext cx="12191695" cy="6858000"/>
+            <a:off x="7345375" y="0"/>
+            <a:ext cx="4846320" cy="6858000"/>
           </a:xfrm>
           <a:prstGeom prst="rect">
             <a:avLst/>
@@ -3163,7 +3164,7 @@
       </p:pic>
       <p:pic>
         <p:nvPicPr>
-          <p:cNvPr id="4" name="Picture 3" descr="mark.png"/>
+          <p:cNvPr id="4" name="Picture 3" descr="press-fon.png"/>
           <p:cNvPicPr>
             <a:picLocks noChangeAspect="1"/>
           </p:cNvPicPr>
@@ -3177,8 +3178,8 @@
         </p:blipFill>
         <p:spPr>
           <a:xfrm>
-            <a:off x="685800" y="457200"/>
-            <a:ext cx="480290" cy="457200"/>
+            <a:off x="0" y="0"/>
+            <a:ext cx="8168335" cy="6858000"/>
           </a:xfrm>
           <a:prstGeom prst="rect">
             <a:avLst/>
@@ -3187,7 +3188,7 @@
       </p:pic>
       <p:pic>
         <p:nvPicPr>
-          <p:cNvPr id="5" name="Picture 4" descr="logo.png"/>
+          <p:cNvPr id="5" name="Picture 4" descr="mark.png"/>
           <p:cNvPicPr>
             <a:picLocks noChangeAspect="1"/>
           </p:cNvPicPr>
@@ -3201,8 +3202,8 @@
         </p:blipFill>
         <p:spPr>
           <a:xfrm>
-            <a:off x="11048695" y="457200"/>
-            <a:ext cx="457200" cy="457200"/>
+            <a:off x="685800" y="457200"/>
+            <a:ext cx="480290" cy="457200"/>
           </a:xfrm>
           <a:prstGeom prst="rect">
             <a:avLst/>
@@ -3211,177 +3212,22 @@
       </p:pic>
       <p:sp>
         <p:nvSpPr>
-          <p:cNvPr id="6" name="TextBox 5"/>
-          <p:cNvSpPr txBox="1"/>
-          <p:nvPr/>
-        </p:nvSpPr>
-        <p:spPr>
-          <a:xfrm>
-            <a:off x="685800" y="987552"/>
-            <a:ext cx="2743200" cy="201168"/>
-          </a:xfrm>
-          <a:prstGeom prst="rect">
-            <a:avLst/>
-          </a:prstGeom>
-          <a:noFill/>
-        </p:spPr>
-        <p:txBody>
-          <a:bodyPr wrap="square" lIns="0" rIns="0" tIns="0" bIns="0" anchor="t">
-            <a:spAutoFit/>
-          </a:bodyPr>
-          <a:lstStyle/>
-          <a:p>
-            <a:pPr algn="l">
-              <a:lnSpc>
-                <a:spcPct val="120000"/>
-              </a:lnSpc>
-            </a:pPr>
-            <a:r>
-              <a:rPr sz="950" b="0">
-                <a:solidFill>
-                  <a:srgbClr val="9FB6DC"/>
-                </a:solidFill>
-                <a:latin typeface="Inter"/>
-              </a:rPr>
-              <a:t>ГенИИ</a:t>
-            </a:r>
-          </a:p>
-        </p:txBody>
-      </p:sp>
-      <p:sp>
-        <p:nvSpPr>
-          <p:cNvPr id="7" name="TextBox 6"/>
-          <p:cNvSpPr txBox="1"/>
-          <p:nvPr/>
-        </p:nvSpPr>
-        <p:spPr>
-          <a:xfrm>
-            <a:off x="8762695" y="987552"/>
-            <a:ext cx="2743200" cy="201168"/>
-          </a:xfrm>
-          <a:prstGeom prst="rect">
-            <a:avLst/>
-          </a:prstGeom>
-          <a:noFill/>
-        </p:spPr>
-        <p:txBody>
-          <a:bodyPr wrap="square" lIns="0" rIns="0" tIns="0" bIns="0" anchor="t">
-            <a:spAutoFit/>
-          </a:bodyPr>
-          <a:lstStyle/>
-          <a:p>
-            <a:pPr algn="r">
-              <a:lnSpc>
-                <a:spcPct val="120000"/>
-              </a:lnSpc>
-            </a:pPr>
-            <a:r>
-              <a:rPr sz="950" b="0">
-                <a:solidFill>
-                  <a:srgbClr val="9FB6DC"/>
-                </a:solidFill>
-                <a:latin typeface="Inter"/>
-              </a:rPr>
-              <a:t>Промптер</a:t>
-            </a:r>
-          </a:p>
-        </p:txBody>
-      </p:sp>
-      <p:sp>
-        <p:nvSpPr>
-          <p:cNvPr id="8" name="TextBox 7"/>
-          <p:cNvSpPr txBox="1"/>
-          <p:nvPr/>
-        </p:nvSpPr>
-        <p:spPr>
-          <a:xfrm>
-            <a:off x="685800" y="1965960"/>
-            <a:ext cx="10424160" cy="1805432"/>
-          </a:xfrm>
-          <a:prstGeom prst="rect">
-            <a:avLst/>
-          </a:prstGeom>
-          <a:noFill/>
-        </p:spPr>
-        <p:txBody>
-          <a:bodyPr wrap="square" lIns="0" rIns="0" tIns="0" bIns="0" anchor="t">
-            <a:spAutoFit/>
-          </a:bodyPr>
-          <a:lstStyle/>
-          <a:p>
-            <a:pPr algn="l">
-              <a:lnSpc>
-                <a:spcPct val="110000"/>
-              </a:lnSpc>
-            </a:pPr>
-            <a:r>
-              <a:rPr sz="6200" b="1">
-                <a:solidFill>
-                  <a:srgbClr val="FFFFFF"/>
-                </a:solidFill>
-                <a:latin typeface="Unbounded"/>
-              </a:rPr>
-              <a:t>Полный ИИ-цикл
-для бизнеса</a:t>
-            </a:r>
-          </a:p>
-        </p:txBody>
-      </p:sp>
-      <p:sp>
-        <p:nvSpPr>
-          <p:cNvPr id="9" name="TextBox 8"/>
-          <p:cNvSpPr txBox="1"/>
-          <p:nvPr/>
-        </p:nvSpPr>
-        <p:spPr>
-          <a:xfrm>
-            <a:off x="685800" y="4082288"/>
-            <a:ext cx="9509760" cy="464312"/>
-          </a:xfrm>
-          <a:prstGeom prst="rect">
-            <a:avLst/>
-          </a:prstGeom>
-          <a:noFill/>
-        </p:spPr>
-        <p:txBody>
-          <a:bodyPr wrap="square" lIns="0" rIns="0" tIns="0" bIns="0" anchor="t">
-            <a:spAutoFit/>
-          </a:bodyPr>
-          <a:lstStyle/>
-          <a:p>
-            <a:pPr algn="l">
-              <a:lnSpc>
-                <a:spcPct val="140000"/>
-              </a:lnSpc>
-            </a:pPr>
-            <a:r>
-              <a:rPr sz="2200" b="0">
-                <a:solidFill>
-                  <a:srgbClr val="D6E4FF"/>
-                </a:solidFill>
-                <a:latin typeface="Inter"/>
-              </a:rPr>
-              <a:t>От исследования ниши до публикации на шести площадках</a:t>
-            </a:r>
-          </a:p>
-        </p:txBody>
-      </p:sp>
-      <p:sp>
-        <p:nvSpPr>
-          <p:cNvPr id="10" name="Rectangle 9"/>
+          <p:cNvPr id="6" name="Rounded Rectangle 5"/>
           <p:cNvSpPr/>
           <p:nvPr/>
         </p:nvSpPr>
         <p:spPr>
           <a:xfrm>
-            <a:off x="685800" y="5113528"/>
-            <a:ext cx="2011680" cy="32004"/>
-          </a:xfrm>
-          <a:prstGeom prst="rect">
-            <a:avLst/>
+            <a:off x="10774375" y="219456"/>
+            <a:ext cx="1005840" cy="1316736"/>
+          </a:xfrm>
+          <a:prstGeom prst="roundRect">
+            <a:avLst>
+              <a:gd name="adj" fmla="val 12727"/>
+            </a:avLst>
           </a:prstGeom>
           <a:solidFill>
-            <a:srgbClr val="7FC4FF"/>
+            <a:srgbClr val="0A0A0E"/>
           </a:solidFill>
           <a:ln>
             <a:noFill/>
@@ -3410,16 +3256,40 @@
           </a:p>
         </p:txBody>
       </p:sp>
-      <p:sp>
-        <p:nvSpPr>
-          <p:cNvPr id="11" name="TextBox 10"/>
+      <p:pic>
+        <p:nvPicPr>
+          <p:cNvPr id="7" name="Picture 6" descr="logo.png"/>
+          <p:cNvPicPr>
+            <a:picLocks noChangeAspect="1"/>
+          </p:cNvPicPr>
+          <p:nvPr/>
+        </p:nvPicPr>
+        <p:blipFill>
+          <a:blip r:embed="rId5"/>
+          <a:stretch>
+            <a:fillRect/>
+          </a:stretch>
+        </p:blipFill>
+        <p:spPr>
+          <a:xfrm>
+            <a:off x="11048695" y="457200"/>
+            <a:ext cx="457200" cy="457200"/>
+          </a:xfrm>
+          <a:prstGeom prst="rect">
+            <a:avLst/>
+          </a:prstGeom>
+        </p:spPr>
+      </p:pic>
+      <p:sp>
+        <p:nvSpPr>
+          <p:cNvPr id="8" name="TextBox 7"/>
           <p:cNvSpPr txBox="1"/>
           <p:nvPr/>
         </p:nvSpPr>
         <p:spPr>
           <a:xfrm>
-            <a:off x="685800" y="5433568"/>
-            <a:ext cx="9144000" cy="386842"/>
+            <a:off x="685800" y="987552"/>
+            <a:ext cx="2743200" cy="201168"/>
           </a:xfrm>
           <a:prstGeom prst="rect">
             <a:avLst/>
@@ -3434,40 +3304,31 @@
           <a:p>
             <a:pPr algn="l">
               <a:lnSpc>
-                <a:spcPct val="130000"/>
+                <a:spcPct val="120000"/>
               </a:lnSpc>
             </a:pPr>
             <a:r>
-              <a:rPr sz="1900" b="1">
-                <a:solidFill>
-                  <a:srgbClr val="FFFFFF"/>
-                </a:solidFill>
-                <a:latin typeface="Unbounded"/>
-              </a:rPr>
-              <a:t>Руслан Анатольевич Дёмин</a:t>
-            </a:r>
-            <a:r>
-              <a:rPr sz="1900" b="0">
+              <a:rPr sz="950" b="0">
                 <a:solidFill>
                   <a:srgbClr val="9FB6DC"/>
                 </a:solidFill>
                 <a:latin typeface="Inter"/>
               </a:rPr>
-              <a:t>    управляющий партнёр</a:t>
-            </a:r>
-          </a:p>
-        </p:txBody>
-      </p:sp>
-      <p:sp>
-        <p:nvSpPr>
-          <p:cNvPr id="12" name="TextBox 11"/>
+              <a:t>ГенИИ</a:t>
+            </a:r>
+          </a:p>
+        </p:txBody>
+      </p:sp>
+      <p:sp>
+        <p:nvSpPr>
+          <p:cNvPr id="9" name="TextBox 8"/>
           <p:cNvSpPr txBox="1"/>
           <p:nvPr/>
         </p:nvSpPr>
         <p:spPr>
           <a:xfrm>
-            <a:off x="685800" y="6144768"/>
-            <a:ext cx="10789920" cy="286511"/>
+            <a:off x="8762695" y="987552"/>
+            <a:ext cx="2743200" cy="201168"/>
           </a:xfrm>
           <a:prstGeom prst="rect">
             <a:avLst/>
@@ -3480,19 +3341,224 @@
           </a:bodyPr>
           <a:lstStyle/>
           <a:p>
+            <a:pPr algn="r">
+              <a:lnSpc>
+                <a:spcPct val="120000"/>
+              </a:lnSpc>
+            </a:pPr>
+            <a:r>
+              <a:rPr sz="950" b="0">
+                <a:solidFill>
+                  <a:srgbClr val="9FB6DC"/>
+                </a:solidFill>
+                <a:latin typeface="Inter"/>
+              </a:rPr>
+              <a:t>Промптер</a:t>
+            </a:r>
+          </a:p>
+        </p:txBody>
+      </p:sp>
+      <p:sp>
+        <p:nvSpPr>
+          <p:cNvPr id="10" name="TextBox 9"/>
+          <p:cNvSpPr txBox="1"/>
+          <p:nvPr/>
+        </p:nvSpPr>
+        <p:spPr>
+          <a:xfrm>
+            <a:off x="685800" y="1828800"/>
+            <a:ext cx="6751015" cy="2073402"/>
+          </a:xfrm>
+          <a:prstGeom prst="rect">
+            <a:avLst/>
+          </a:prstGeom>
+          <a:noFill/>
+        </p:spPr>
+        <p:txBody>
+          <a:bodyPr wrap="square" lIns="0" rIns="0" tIns="0" bIns="0" anchor="t">
+            <a:spAutoFit/>
+          </a:bodyPr>
+          <a:lstStyle/>
+          <a:p>
             <a:pPr algn="l">
               <a:lnSpc>
-                <a:spcPct val="140000"/>
+                <a:spcPct val="126000"/>
               </a:lnSpc>
             </a:pPr>
             <a:r>
-              <a:rPr sz="1200" b="0">
-                <a:solidFill>
-                  <a:srgbClr val="9FB6DC"/>
+              <a:rPr sz="2500" b="1">
+                <a:solidFill>
+                  <a:srgbClr val="FFFFFF"/>
+                </a:solidFill>
+                <a:latin typeface="Unbounded"/>
+              </a:rPr>
+              <a:t>ИНТЕЛЛЕКТУАЛЬНЫЙ СЕРВИС
+ДЛЯ АВТОМАТИЗАЦИИ SMM
+И УСИЛЕНИЯ ЦИФРОВОГО
+ПРИСУТСТВИЯ КОМПАНИЙ
+В ИНТЕРНЕТЕ</a:t>
+            </a:r>
+          </a:p>
+        </p:txBody>
+      </p:sp>
+      <p:sp>
+        <p:nvSpPr>
+          <p:cNvPr id="11" name="Rectangle 10"/>
+          <p:cNvSpPr/>
+          <p:nvPr/>
+        </p:nvSpPr>
+        <p:spPr>
+          <a:xfrm>
+            <a:off x="685800" y="4304538"/>
+            <a:ext cx="1828800" cy="32004"/>
+          </a:xfrm>
+          <a:prstGeom prst="rect">
+            <a:avLst/>
+          </a:prstGeom>
+          <a:solidFill>
+            <a:srgbClr val="7FC4FF"/>
+          </a:solidFill>
+          <a:ln>
+            <a:noFill/>
+          </a:ln>
+          <a:effectLst/>
+        </p:spPr>
+        <p:style>
+          <a:lnRef idx="1">
+            <a:schemeClr val="accent1"/>
+          </a:lnRef>
+          <a:fillRef idx="3">
+            <a:schemeClr val="accent1"/>
+          </a:fillRef>
+          <a:effectRef idx="2">
+            <a:schemeClr val="accent1"/>
+          </a:effectRef>
+          <a:fontRef idx="minor">
+            <a:schemeClr val="lt1"/>
+          </a:fontRef>
+        </p:style>
+        <p:txBody>
+          <a:bodyPr rtlCol="0" anchor="ctr"/>
+          <a:lstStyle/>
+          <a:p>
+            <a:pPr algn="ctr"/>
+          </a:p>
+        </p:txBody>
+      </p:sp>
+      <p:sp>
+        <p:nvSpPr>
+          <p:cNvPr id="12" name="TextBox 11"/>
+          <p:cNvSpPr txBox="1"/>
+          <p:nvPr/>
+        </p:nvSpPr>
+        <p:spPr>
+          <a:xfrm>
+            <a:off x="685800" y="4606290"/>
+            <a:ext cx="6659575" cy="347472"/>
+          </a:xfrm>
+          <a:prstGeom prst="rect">
+            <a:avLst/>
+          </a:prstGeom>
+          <a:noFill/>
+        </p:spPr>
+        <p:txBody>
+          <a:bodyPr wrap="square" lIns="0" rIns="0" tIns="0" bIns="0" anchor="t">
+            <a:spAutoFit/>
+          </a:bodyPr>
+          <a:lstStyle/>
+          <a:p>
+            <a:pPr algn="l">
+              <a:lnSpc>
+                <a:spcPct val="135000"/>
+              </a:lnSpc>
+            </a:pPr>
+            <a:r>
+              <a:rPr sz="1600" b="1">
+                <a:solidFill>
+                  <a:srgbClr val="FFFFFF"/>
                 </a:solidFill>
                 <a:latin typeface="Inter"/>
               </a:rPr>
-              <a:t>Пресс-конференция «Эффективные инструменты привлечения клиентов»   ·   20 октября 2026   ·   Москва, Кузнецкий мост, 7</a:t>
+              <a:t>Руслан Анатольевич Дёмин</a:t>
+            </a:r>
+          </a:p>
+        </p:txBody>
+      </p:sp>
+      <p:sp>
+        <p:nvSpPr>
+          <p:cNvPr id="13" name="TextBox 12"/>
+          <p:cNvSpPr txBox="1"/>
+          <p:nvPr/>
+        </p:nvSpPr>
+        <p:spPr>
+          <a:xfrm>
+            <a:off x="685800" y="4935473"/>
+            <a:ext cx="6659575" cy="313182"/>
+          </a:xfrm>
+          <a:prstGeom prst="rect">
+            <a:avLst/>
+          </a:prstGeom>
+          <a:noFill/>
+        </p:spPr>
+        <p:txBody>
+          <a:bodyPr wrap="square" lIns="0" rIns="0" tIns="0" bIns="0" anchor="t">
+            <a:spAutoFit/>
+          </a:bodyPr>
+          <a:lstStyle/>
+          <a:p>
+            <a:pPr algn="l">
+              <a:lnSpc>
+                <a:spcPct val="135000"/>
+              </a:lnSpc>
+            </a:pPr>
+            <a:r>
+              <a:rPr sz="1400" b="0">
+                <a:solidFill>
+                  <a:srgbClr val="9FB6DC"/>
+                </a:solidFill>
+                <a:latin typeface="Inter"/>
+              </a:rPr>
+              <a:t>управляющий партнёр</a:t>
+            </a:r>
+          </a:p>
+        </p:txBody>
+      </p:sp>
+      <p:sp>
+        <p:nvSpPr>
+          <p:cNvPr id="14" name="TextBox 13"/>
+          <p:cNvSpPr txBox="1"/>
+          <p:nvPr/>
+        </p:nvSpPr>
+        <p:spPr>
+          <a:xfrm>
+            <a:off x="685800" y="5897880"/>
+            <a:ext cx="6842455" cy="478281"/>
+          </a:xfrm>
+          <a:prstGeom prst="rect">
+            <a:avLst/>
+          </a:prstGeom>
+          <a:noFill/>
+        </p:spPr>
+        <p:txBody>
+          <a:bodyPr wrap="square" lIns="0" rIns="0" tIns="0" bIns="0" anchor="t">
+            <a:spAutoFit/>
+          </a:bodyPr>
+          <a:lstStyle/>
+          <a:p>
+            <a:pPr algn="l">
+              <a:lnSpc>
+                <a:spcPct val="145000"/>
+              </a:lnSpc>
+            </a:pPr>
+            <a:r>
+              <a:rPr sz="1100" b="0">
+                <a:solidFill>
+                  <a:srgbClr val="9FB6DC"/>
+                </a:solidFill>
+                <a:latin typeface="Inter"/>
+              </a:rPr>
+              <a:t>Пресс-конференция «Эффективные инструменты привлечения клиентов»
+20 октября 2026 · Москва, Кузнецкий мост, 7</a:t>
             </a:r>
           </a:p>
         </p:txBody>
@@ -3719,7 +3785,7 @@
                 </a:solidFill>
                 <a:latin typeface="Inter"/>
               </a:rPr>
-              <a:t>2 / 6</a:t>
+              <a:t>2 / 7</a:t>
             </a:r>
           </a:p>
         </p:txBody>
@@ -3732,8 +3798,8 @@
         </p:nvSpPr>
         <p:spPr>
           <a:xfrm>
-            <a:off x="1143000" y="1600200"/>
-            <a:ext cx="10271455" cy="2473452"/>
+            <a:off x="685800" y="1463040"/>
+            <a:ext cx="10454335" cy="623315"/>
           </a:xfrm>
           <a:prstGeom prst="rect">
             <a:avLst/>
@@ -3748,17 +3814,17 @@
           <a:p>
             <a:pPr algn="l">
               <a:lnSpc>
-                <a:spcPct val="126000"/>
+                <a:spcPct val="114000"/>
               </a:lnSpc>
             </a:pPr>
             <a:r>
-              <a:rPr sz="3000" b="0">
+              <a:rPr sz="3800" b="1">
                 <a:solidFill>
                   <a:srgbClr val="FFFFFF"/>
                 </a:solidFill>
                 <a:latin typeface="Unbounded"/>
               </a:rPr>
-              <a:t>«Контент-фабрики есть у всех, это не новость. Новость в том, что управление циклом можно отдать самому ИИ: он знает правила своих собратьев лучше человека»</a:t>
+              <a:t>Пять ИИ-агентов вместо отдела</a:t>
             </a:r>
           </a:p>
         </p:txBody>
@@ -3771,8 +3837,8 @@
         </p:nvSpPr>
         <p:spPr>
           <a:xfrm>
-            <a:off x="685800" y="1673352"/>
-            <a:ext cx="82296" cy="2363724"/>
+            <a:off x="685800" y="2523744"/>
+            <a:ext cx="256032" cy="25603"/>
           </a:xfrm>
           <a:prstGeom prst="rect">
             <a:avLst/>
@@ -3815,8 +3881,8 @@
         </p:nvSpPr>
         <p:spPr>
           <a:xfrm>
-            <a:off x="1143000" y="4366260"/>
-            <a:ext cx="10271455" cy="320802"/>
+            <a:off x="1143000" y="2377440"/>
+            <a:ext cx="4587087" cy="362712"/>
           </a:xfrm>
           <a:prstGeom prst="rect">
             <a:avLst/>
@@ -3831,46 +3897,76 @@
           <a:p>
             <a:pPr algn="l">
               <a:lnSpc>
-                <a:spcPct val="130000"/>
+                <a:spcPct val="120000"/>
               </a:lnSpc>
             </a:pPr>
             <a:r>
-              <a:rPr sz="1500" b="1">
-                <a:solidFill>
-                  <a:srgbClr val="7FC4FF"/>
+              <a:rPr sz="1900" b="1">
+                <a:solidFill>
+                  <a:srgbClr val="FFFFFF"/>
+                </a:solidFill>
+                <a:latin typeface="Unbounded"/>
+              </a:rPr>
+              <a:t>AI-маркетолог</a:t>
+            </a:r>
+          </a:p>
+        </p:txBody>
+      </p:sp>
+      <p:sp>
+        <p:nvSpPr>
+          <p:cNvPr id="11" name="TextBox 10"/>
+          <p:cNvSpPr txBox="1"/>
+          <p:nvPr/>
+        </p:nvSpPr>
+        <p:spPr>
+          <a:xfrm>
+            <a:off x="1143000" y="2758440"/>
+            <a:ext cx="4587087" cy="313182"/>
+          </a:xfrm>
+          <a:prstGeom prst="rect">
+            <a:avLst/>
+          </a:prstGeom>
+          <a:noFill/>
+        </p:spPr>
+        <p:txBody>
+          <a:bodyPr wrap="square" lIns="0" rIns="0" tIns="0" bIns="0" anchor="t">
+            <a:spAutoFit/>
+          </a:bodyPr>
+          <a:lstStyle/>
+          <a:p>
+            <a:pPr algn="l">
+              <a:lnSpc>
+                <a:spcPct val="135000"/>
+              </a:lnSpc>
+            </a:pPr>
+            <a:r>
+              <a:rPr sz="1400" b="0">
+                <a:solidFill>
+                  <a:srgbClr val="9FB6DC"/>
                 </a:solidFill>
                 <a:latin typeface="Inter"/>
               </a:rPr>
-              <a:t>Руслан Анатольевич Дёмин, </a:t>
-            </a:r>
-            <a:r>
-              <a:rPr sz="1500" b="0">
-                <a:solidFill>
-                  <a:srgbClr val="9FB6DC"/>
-                </a:solidFill>
-                <a:latin typeface="Inter"/>
-              </a:rPr>
-              <a:t>управляющий партнёр</a:t>
-            </a:r>
-          </a:p>
-        </p:txBody>
-      </p:sp>
-      <p:sp>
-        <p:nvSpPr>
-          <p:cNvPr id="11" name="Rectangle 10"/>
+              <a:t>ниша, конкуренты и запросы</a:t>
+            </a:r>
+          </a:p>
+        </p:txBody>
+      </p:sp>
+      <p:sp>
+        <p:nvSpPr>
+          <p:cNvPr id="12" name="Rectangle 11"/>
           <p:cNvSpPr/>
           <p:nvPr/>
         </p:nvSpPr>
         <p:spPr>
           <a:xfrm>
-            <a:off x="685800" y="5166360"/>
-            <a:ext cx="10820095" cy="10972"/>
+            <a:off x="6461607" y="2523744"/>
+            <a:ext cx="256032" cy="25603"/>
           </a:xfrm>
           <a:prstGeom prst="rect">
             <a:avLst/>
           </a:prstGeom>
           <a:solidFill>
-            <a:srgbClr val="3E5C9C"/>
+            <a:srgbClr val="7FC4FF"/>
           </a:solidFill>
           <a:ln>
             <a:noFill/>
@@ -3901,14 +3997,53 @@
       </p:sp>
       <p:sp>
         <p:nvSpPr>
-          <p:cNvPr id="12" name="TextBox 11"/>
+          <p:cNvPr id="13" name="TextBox 12"/>
           <p:cNvSpPr txBox="1"/>
           <p:nvPr/>
         </p:nvSpPr>
         <p:spPr>
           <a:xfrm>
-            <a:off x="685800" y="5413248"/>
-            <a:ext cx="10820095" cy="381762"/>
+            <a:off x="6918807" y="2377440"/>
+            <a:ext cx="4587087" cy="362712"/>
+          </a:xfrm>
+          <a:prstGeom prst="rect">
+            <a:avLst/>
+          </a:prstGeom>
+          <a:noFill/>
+        </p:spPr>
+        <p:txBody>
+          <a:bodyPr wrap="square" lIns="0" rIns="0" tIns="0" bIns="0" anchor="t">
+            <a:spAutoFit/>
+          </a:bodyPr>
+          <a:lstStyle/>
+          <a:p>
+            <a:pPr algn="l">
+              <a:lnSpc>
+                <a:spcPct val="120000"/>
+              </a:lnSpc>
+            </a:pPr>
+            <a:r>
+              <a:rPr sz="1900" b="1">
+                <a:solidFill>
+                  <a:srgbClr val="FFFFFF"/>
+                </a:solidFill>
+                <a:latin typeface="Unbounded"/>
+              </a:rPr>
+              <a:t>AI-копирайтер</a:t>
+            </a:r>
+          </a:p>
+        </p:txBody>
+      </p:sp>
+      <p:sp>
+        <p:nvSpPr>
+          <p:cNvPr id="14" name="TextBox 13"/>
+          <p:cNvSpPr txBox="1"/>
+          <p:nvPr/>
+        </p:nvSpPr>
+        <p:spPr>
+          <a:xfrm>
+            <a:off x="6918807" y="2758440"/>
+            <a:ext cx="4587087" cy="313182"/>
           </a:xfrm>
           <a:prstGeom prst="rect">
             <a:avLst/>
@@ -3927,36 +4062,110 @@
               </a:lnSpc>
             </a:pPr>
             <a:r>
-              <a:rPr sz="1800" b="0">
+              <a:rPr sz="1400" b="0">
                 <a:solidFill>
                   <a:srgbClr val="9FB6DC"/>
                 </a:solidFill>
                 <a:latin typeface="Inter"/>
               </a:rPr>
-              <a:t>Исследование · Стратегия · Генерация</a:t>
-            </a:r>
-            <a:r>
-              <a:rPr sz="1800" b="1">
+              <a:t>тексты в стиле бренда</a:t>
+            </a:r>
+          </a:p>
+        </p:txBody>
+      </p:sp>
+      <p:sp>
+        <p:nvSpPr>
+          <p:cNvPr id="15" name="Rectangle 14"/>
+          <p:cNvSpPr/>
+          <p:nvPr/>
+        </p:nvSpPr>
+        <p:spPr>
+          <a:xfrm>
+            <a:off x="685800" y="3456432"/>
+            <a:ext cx="256032" cy="25603"/>
+          </a:xfrm>
+          <a:prstGeom prst="rect">
+            <a:avLst/>
+          </a:prstGeom>
+          <a:solidFill>
+            <a:srgbClr val="7FC4FF"/>
+          </a:solidFill>
+          <a:ln>
+            <a:noFill/>
+          </a:ln>
+          <a:effectLst/>
+        </p:spPr>
+        <p:style>
+          <a:lnRef idx="1">
+            <a:schemeClr val="accent1"/>
+          </a:lnRef>
+          <a:fillRef idx="3">
+            <a:schemeClr val="accent1"/>
+          </a:fillRef>
+          <a:effectRef idx="2">
+            <a:schemeClr val="accent1"/>
+          </a:effectRef>
+          <a:fontRef idx="minor">
+            <a:schemeClr val="lt1"/>
+          </a:fontRef>
+        </p:style>
+        <p:txBody>
+          <a:bodyPr rtlCol="0" anchor="ctr"/>
+          <a:lstStyle/>
+          <a:p>
+            <a:pPr algn="ctr"/>
+          </a:p>
+        </p:txBody>
+      </p:sp>
+      <p:sp>
+        <p:nvSpPr>
+          <p:cNvPr id="16" name="TextBox 15"/>
+          <p:cNvSpPr txBox="1"/>
+          <p:nvPr/>
+        </p:nvSpPr>
+        <p:spPr>
+          <a:xfrm>
+            <a:off x="1143000" y="3310128"/>
+            <a:ext cx="4587087" cy="362712"/>
+          </a:xfrm>
+          <a:prstGeom prst="rect">
+            <a:avLst/>
+          </a:prstGeom>
+          <a:noFill/>
+        </p:spPr>
+        <p:txBody>
+          <a:bodyPr wrap="square" lIns="0" rIns="0" tIns="0" bIns="0" anchor="t">
+            <a:spAutoFit/>
+          </a:bodyPr>
+          <a:lstStyle/>
+          <a:p>
+            <a:pPr algn="l">
+              <a:lnSpc>
+                <a:spcPct val="120000"/>
+              </a:lnSpc>
+            </a:pPr>
+            <a:r>
+              <a:rPr sz="1900" b="1">
                 <a:solidFill>
                   <a:srgbClr val="FFFFFF"/>
                 </a:solidFill>
-                <a:latin typeface="Inter"/>
+                <a:latin typeface="Unbounded"/>
               </a:rPr>
-              <a:t>      Проверка · Публикация · Анализ</a:t>
-            </a:r>
-          </a:p>
-        </p:txBody>
-      </p:sp>
-      <p:sp>
-        <p:nvSpPr>
-          <p:cNvPr id="13" name="TextBox 12"/>
+              <a:t>AI-дизайнер</a:t>
+            </a:r>
+          </a:p>
+        </p:txBody>
+      </p:sp>
+      <p:sp>
+        <p:nvSpPr>
+          <p:cNvPr id="17" name="TextBox 16"/>
           <p:cNvSpPr txBox="1"/>
           <p:nvPr/>
         </p:nvSpPr>
         <p:spPr>
           <a:xfrm>
-            <a:off x="685800" y="5943600"/>
-            <a:ext cx="10820095" cy="313182"/>
+            <a:off x="1143000" y="3691127"/>
+            <a:ext cx="4587087" cy="313182"/>
           </a:xfrm>
           <a:prstGeom prst="rect">
             <a:avLst/>
@@ -3981,7 +4190,430 @@
                 </a:solidFill>
                 <a:latin typeface="Inter"/>
               </a:rPr>
-              <a:t>Светлым — то, что почти везде до сих пор делает человек</a:t>
+              <a:t>визуал под каждую площадку</a:t>
+            </a:r>
+          </a:p>
+        </p:txBody>
+      </p:sp>
+      <p:sp>
+        <p:nvSpPr>
+          <p:cNvPr id="18" name="Rectangle 17"/>
+          <p:cNvSpPr/>
+          <p:nvPr/>
+        </p:nvSpPr>
+        <p:spPr>
+          <a:xfrm>
+            <a:off x="6461607" y="3456432"/>
+            <a:ext cx="256032" cy="25603"/>
+          </a:xfrm>
+          <a:prstGeom prst="rect">
+            <a:avLst/>
+          </a:prstGeom>
+          <a:solidFill>
+            <a:srgbClr val="7FC4FF"/>
+          </a:solidFill>
+          <a:ln>
+            <a:noFill/>
+          </a:ln>
+          <a:effectLst/>
+        </p:spPr>
+        <p:style>
+          <a:lnRef idx="1">
+            <a:schemeClr val="accent1"/>
+          </a:lnRef>
+          <a:fillRef idx="3">
+            <a:schemeClr val="accent1"/>
+          </a:fillRef>
+          <a:effectRef idx="2">
+            <a:schemeClr val="accent1"/>
+          </a:effectRef>
+          <a:fontRef idx="minor">
+            <a:schemeClr val="lt1"/>
+          </a:fontRef>
+        </p:style>
+        <p:txBody>
+          <a:bodyPr rtlCol="0" anchor="ctr"/>
+          <a:lstStyle/>
+          <a:p>
+            <a:pPr algn="ctr"/>
+          </a:p>
+        </p:txBody>
+      </p:sp>
+      <p:sp>
+        <p:nvSpPr>
+          <p:cNvPr id="19" name="TextBox 18"/>
+          <p:cNvSpPr txBox="1"/>
+          <p:nvPr/>
+        </p:nvSpPr>
+        <p:spPr>
+          <a:xfrm>
+            <a:off x="6918807" y="3310128"/>
+            <a:ext cx="4587087" cy="362712"/>
+          </a:xfrm>
+          <a:prstGeom prst="rect">
+            <a:avLst/>
+          </a:prstGeom>
+          <a:noFill/>
+        </p:spPr>
+        <p:txBody>
+          <a:bodyPr wrap="square" lIns="0" rIns="0" tIns="0" bIns="0" anchor="t">
+            <a:spAutoFit/>
+          </a:bodyPr>
+          <a:lstStyle/>
+          <a:p>
+            <a:pPr algn="l">
+              <a:lnSpc>
+                <a:spcPct val="120000"/>
+              </a:lnSpc>
+            </a:pPr>
+            <a:r>
+              <a:rPr sz="1900" b="1">
+                <a:solidFill>
+                  <a:srgbClr val="FFFFFF"/>
+                </a:solidFill>
+                <a:latin typeface="Unbounded"/>
+              </a:rPr>
+              <a:t>AI-сценарист и оператор</a:t>
+            </a:r>
+          </a:p>
+        </p:txBody>
+      </p:sp>
+      <p:sp>
+        <p:nvSpPr>
+          <p:cNvPr id="20" name="TextBox 19"/>
+          <p:cNvSpPr txBox="1"/>
+          <p:nvPr/>
+        </p:nvSpPr>
+        <p:spPr>
+          <a:xfrm>
+            <a:off x="6918807" y="3691127"/>
+            <a:ext cx="4587087" cy="313182"/>
+          </a:xfrm>
+          <a:prstGeom prst="rect">
+            <a:avLst/>
+          </a:prstGeom>
+          <a:noFill/>
+        </p:spPr>
+        <p:txBody>
+          <a:bodyPr wrap="square" lIns="0" rIns="0" tIns="0" bIns="0" anchor="t">
+            <a:spAutoFit/>
+          </a:bodyPr>
+          <a:lstStyle/>
+          <a:p>
+            <a:pPr algn="l">
+              <a:lnSpc>
+                <a:spcPct val="135000"/>
+              </a:lnSpc>
+            </a:pPr>
+            <a:r>
+              <a:rPr sz="1400" b="0">
+                <a:solidFill>
+                  <a:srgbClr val="9FB6DC"/>
+                </a:solidFill>
+                <a:latin typeface="Inter"/>
+              </a:rPr>
+              <a:t>сценарий и готовый ролик</a:t>
+            </a:r>
+          </a:p>
+        </p:txBody>
+      </p:sp>
+      <p:sp>
+        <p:nvSpPr>
+          <p:cNvPr id="21" name="Rectangle 20"/>
+          <p:cNvSpPr/>
+          <p:nvPr/>
+        </p:nvSpPr>
+        <p:spPr>
+          <a:xfrm>
+            <a:off x="685800" y="4389120"/>
+            <a:ext cx="256032" cy="25603"/>
+          </a:xfrm>
+          <a:prstGeom prst="rect">
+            <a:avLst/>
+          </a:prstGeom>
+          <a:solidFill>
+            <a:srgbClr val="7FC4FF"/>
+          </a:solidFill>
+          <a:ln>
+            <a:noFill/>
+          </a:ln>
+          <a:effectLst/>
+        </p:spPr>
+        <p:style>
+          <a:lnRef idx="1">
+            <a:schemeClr val="accent1"/>
+          </a:lnRef>
+          <a:fillRef idx="3">
+            <a:schemeClr val="accent1"/>
+          </a:fillRef>
+          <a:effectRef idx="2">
+            <a:schemeClr val="accent1"/>
+          </a:effectRef>
+          <a:fontRef idx="minor">
+            <a:schemeClr val="lt1"/>
+          </a:fontRef>
+        </p:style>
+        <p:txBody>
+          <a:bodyPr rtlCol="0" anchor="ctr"/>
+          <a:lstStyle/>
+          <a:p>
+            <a:pPr algn="ctr"/>
+          </a:p>
+        </p:txBody>
+      </p:sp>
+      <p:sp>
+        <p:nvSpPr>
+          <p:cNvPr id="22" name="TextBox 21"/>
+          <p:cNvSpPr txBox="1"/>
+          <p:nvPr/>
+        </p:nvSpPr>
+        <p:spPr>
+          <a:xfrm>
+            <a:off x="1143000" y="4242816"/>
+            <a:ext cx="4587087" cy="362712"/>
+          </a:xfrm>
+          <a:prstGeom prst="rect">
+            <a:avLst/>
+          </a:prstGeom>
+          <a:noFill/>
+        </p:spPr>
+        <p:txBody>
+          <a:bodyPr wrap="square" lIns="0" rIns="0" tIns="0" bIns="0" anchor="t">
+            <a:spAutoFit/>
+          </a:bodyPr>
+          <a:lstStyle/>
+          <a:p>
+            <a:pPr algn="l">
+              <a:lnSpc>
+                <a:spcPct val="120000"/>
+              </a:lnSpc>
+            </a:pPr>
+            <a:r>
+              <a:rPr sz="1900" b="1">
+                <a:solidFill>
+                  <a:srgbClr val="FFFFFF"/>
+                </a:solidFill>
+                <a:latin typeface="Unbounded"/>
+              </a:rPr>
+              <a:t>AI СММ-менеджер</a:t>
+            </a:r>
+          </a:p>
+        </p:txBody>
+      </p:sp>
+      <p:sp>
+        <p:nvSpPr>
+          <p:cNvPr id="23" name="TextBox 22"/>
+          <p:cNvSpPr txBox="1"/>
+          <p:nvPr/>
+        </p:nvSpPr>
+        <p:spPr>
+          <a:xfrm>
+            <a:off x="1143000" y="4623816"/>
+            <a:ext cx="4587087" cy="313182"/>
+          </a:xfrm>
+          <a:prstGeom prst="rect">
+            <a:avLst/>
+          </a:prstGeom>
+          <a:noFill/>
+        </p:spPr>
+        <p:txBody>
+          <a:bodyPr wrap="square" lIns="0" rIns="0" tIns="0" bIns="0" anchor="t">
+            <a:spAutoFit/>
+          </a:bodyPr>
+          <a:lstStyle/>
+          <a:p>
+            <a:pPr algn="l">
+              <a:lnSpc>
+                <a:spcPct val="135000"/>
+              </a:lnSpc>
+            </a:pPr>
+            <a:r>
+              <a:rPr sz="1400" b="0">
+                <a:solidFill>
+                  <a:srgbClr val="9FB6DC"/>
+                </a:solidFill>
+                <a:latin typeface="Inter"/>
+              </a:rPr>
+              <a:t>проверка, публикация, контроль выдачи</a:t>
+            </a:r>
+          </a:p>
+        </p:txBody>
+      </p:sp>
+      <p:sp>
+        <p:nvSpPr>
+          <p:cNvPr id="24" name="Rectangle 23"/>
+          <p:cNvSpPr/>
+          <p:nvPr/>
+        </p:nvSpPr>
+        <p:spPr>
+          <a:xfrm>
+            <a:off x="685800" y="5221224"/>
+            <a:ext cx="10820095" cy="10972"/>
+          </a:xfrm>
+          <a:prstGeom prst="rect">
+            <a:avLst/>
+          </a:prstGeom>
+          <a:solidFill>
+            <a:srgbClr val="3E5C9C"/>
+          </a:solidFill>
+          <a:ln>
+            <a:noFill/>
+          </a:ln>
+          <a:effectLst/>
+        </p:spPr>
+        <p:style>
+          <a:lnRef idx="1">
+            <a:schemeClr val="accent1"/>
+          </a:lnRef>
+          <a:fillRef idx="3">
+            <a:schemeClr val="accent1"/>
+          </a:fillRef>
+          <a:effectRef idx="2">
+            <a:schemeClr val="accent1"/>
+          </a:effectRef>
+          <a:fontRef idx="minor">
+            <a:schemeClr val="lt1"/>
+          </a:fontRef>
+        </p:style>
+        <p:txBody>
+          <a:bodyPr rtlCol="0" anchor="ctr"/>
+          <a:lstStyle/>
+          <a:p>
+            <a:pPr algn="ctr"/>
+          </a:p>
+        </p:txBody>
+      </p:sp>
+      <p:sp>
+        <p:nvSpPr>
+          <p:cNvPr id="25" name="TextBox 24"/>
+          <p:cNvSpPr txBox="1"/>
+          <p:nvPr/>
+        </p:nvSpPr>
+        <p:spPr>
+          <a:xfrm>
+            <a:off x="685800" y="5440680"/>
+            <a:ext cx="10820095" cy="357632"/>
+          </a:xfrm>
+          <a:prstGeom prst="rect">
+            <a:avLst/>
+          </a:prstGeom>
+          <a:noFill/>
+        </p:spPr>
+        <p:txBody>
+          <a:bodyPr wrap="square" lIns="0" rIns="0" tIns="0" bIns="0" anchor="t">
+            <a:spAutoFit/>
+          </a:bodyPr>
+          <a:lstStyle/>
+          <a:p>
+            <a:pPr algn="l">
+              <a:lnSpc>
+                <a:spcPct val="140000"/>
+              </a:lnSpc>
+            </a:pPr>
+            <a:r>
+              <a:rPr sz="1600" b="1">
+                <a:solidFill>
+                  <a:srgbClr val="FFFFFF"/>
+                </a:solidFill>
+                <a:latin typeface="Inter"/>
+              </a:rPr>
+              <a:t>Автопубликация: </a:t>
+            </a:r>
+            <a:r>
+              <a:rPr sz="1600" b="0">
+                <a:solidFill>
+                  <a:srgbClr val="D6E4FF"/>
+                </a:solidFill>
+                <a:latin typeface="Inter"/>
+              </a:rPr>
+              <a:t>Telegram · VK · Дзен · Одноклассники · Max · Instagram*</a:t>
+            </a:r>
+          </a:p>
+        </p:txBody>
+      </p:sp>
+      <p:sp>
+        <p:nvSpPr>
+          <p:cNvPr id="26" name="TextBox 25"/>
+          <p:cNvSpPr txBox="1"/>
+          <p:nvPr/>
+        </p:nvSpPr>
+        <p:spPr>
+          <a:xfrm>
+            <a:off x="685800" y="5908040"/>
+            <a:ext cx="10820095" cy="339852"/>
+          </a:xfrm>
+          <a:prstGeom prst="rect">
+            <a:avLst/>
+          </a:prstGeom>
+          <a:noFill/>
+        </p:spPr>
+        <p:txBody>
+          <a:bodyPr wrap="square" lIns="0" rIns="0" tIns="0" bIns="0" anchor="t">
+            <a:spAutoFit/>
+          </a:bodyPr>
+          <a:lstStyle/>
+          <a:p>
+            <a:pPr algn="l">
+              <a:lnSpc>
+                <a:spcPct val="140000"/>
+              </a:lnSpc>
+            </a:pPr>
+            <a:r>
+              <a:rPr sz="1500" b="1">
+                <a:solidFill>
+                  <a:srgbClr val="FFFFFF"/>
+                </a:solidFill>
+                <a:latin typeface="Inter"/>
+              </a:rPr>
+              <a:t>Сверх цикла: </a:t>
+            </a:r>
+            <a:r>
+              <a:rPr sz="1500" b="0">
+                <a:solidFill>
+                  <a:srgbClr val="9FB6DC"/>
+                </a:solidFill>
+                <a:latin typeface="Inter"/>
+              </a:rPr>
+              <a:t>Цифровой двойник · Видео по сценарию · Сайт под заявки · Брендбук и мерч</a:t>
+            </a:r>
+          </a:p>
+        </p:txBody>
+      </p:sp>
+      <p:sp>
+        <p:nvSpPr>
+          <p:cNvPr id="27" name="TextBox 26"/>
+          <p:cNvSpPr txBox="1"/>
+          <p:nvPr/>
+        </p:nvSpPr>
+        <p:spPr>
+          <a:xfrm>
+            <a:off x="685800" y="6412484"/>
+            <a:ext cx="10820095" cy="236029"/>
+          </a:xfrm>
+          <a:prstGeom prst="rect">
+            <a:avLst/>
+          </a:prstGeom>
+          <a:noFill/>
+        </p:spPr>
+        <p:txBody>
+          <a:bodyPr wrap="square" lIns="0" rIns="0" tIns="0" bIns="0" anchor="t">
+            <a:spAutoFit/>
+          </a:bodyPr>
+          <a:lstStyle/>
+          <a:p>
+            <a:pPr algn="l">
+              <a:lnSpc>
+                <a:spcPct val="135000"/>
+              </a:lnSpc>
+            </a:pPr>
+            <a:r>
+              <a:rPr sz="950" b="0">
+                <a:solidFill>
+                  <a:srgbClr val="9FB6DC"/>
+                </a:solidFill>
+                <a:latin typeface="Inter"/>
+              </a:rPr>
+              <a:t>* Instagram принадлежит компании Meta, признанной экстремистской организацией и запрещённой на территории Российской Федерации.</a:t>
             </a:r>
           </a:p>
         </p:txBody>
@@ -4048,48 +4680,9 @@
           </a:p>
         </p:txBody>
       </p:sp>
-      <p:sp>
-        <p:nvSpPr>
-          <p:cNvPr id="3" name="TextBox 2"/>
-          <p:cNvSpPr txBox="1"/>
-          <p:nvPr/>
-        </p:nvSpPr>
-        <p:spPr>
-          <a:xfrm>
-            <a:off x="10408615" y="6291072"/>
-            <a:ext cx="1097280" cy="274320"/>
-          </a:xfrm>
-          <a:prstGeom prst="rect">
-            <a:avLst/>
-          </a:prstGeom>
-          <a:noFill/>
-        </p:spPr>
-        <p:txBody>
-          <a:bodyPr wrap="square" lIns="0" rIns="0" tIns="0" bIns="0" anchor="t">
-            <a:spAutoFit/>
-          </a:bodyPr>
-          <a:lstStyle/>
-          <a:p>
-            <a:pPr algn="r">
-              <a:lnSpc>
-                <a:spcPct val="120000"/>
-              </a:lnSpc>
-            </a:pPr>
-            <a:r>
-              <a:rPr sz="1000" b="0">
-                <a:solidFill>
-                  <a:srgbClr val="9FB6DC"/>
-                </a:solidFill>
-                <a:latin typeface="Inter"/>
-              </a:rPr>
-              <a:t>3 / 6</a:t>
-            </a:r>
-          </a:p>
-        </p:txBody>
-      </p:sp>
       <p:pic>
         <p:nvPicPr>
-          <p:cNvPr id="4" name="Picture 3" descr="press-nejrony.png"/>
+          <p:cNvPr id="3" name="Picture 2" descr="mark.png"/>
           <p:cNvPicPr>
             <a:picLocks noChangeAspect="1"/>
           </p:cNvPicPr>
@@ -4103,8 +4696,8 @@
         </p:blipFill>
         <p:spPr>
           <a:xfrm>
-            <a:off x="8259775" y="0"/>
-            <a:ext cx="3931920" cy="6858000"/>
+            <a:off x="685800" y="457200"/>
+            <a:ext cx="480290" cy="457200"/>
           </a:xfrm>
           <a:prstGeom prst="rect">
             <a:avLst/>
@@ -4113,7 +4706,7 @@
       </p:pic>
       <p:pic>
         <p:nvPicPr>
-          <p:cNvPr id="5" name="Picture 4" descr="mark.png"/>
+          <p:cNvPr id="4" name="Picture 3" descr="logo.png"/>
           <p:cNvPicPr>
             <a:picLocks noChangeAspect="1"/>
           </p:cNvPicPr>
@@ -4127,30 +4720,6 @@
         </p:blipFill>
         <p:spPr>
           <a:xfrm>
-            <a:off x="685800" y="457200"/>
-            <a:ext cx="480290" cy="457200"/>
-          </a:xfrm>
-          <a:prstGeom prst="rect">
-            <a:avLst/>
-          </a:prstGeom>
-        </p:spPr>
-      </p:pic>
-      <p:pic>
-        <p:nvPicPr>
-          <p:cNvPr id="6" name="Picture 5" descr="logo.png"/>
-          <p:cNvPicPr>
-            <a:picLocks noChangeAspect="1"/>
-          </p:cNvPicPr>
-          <p:nvPr/>
-        </p:nvPicPr>
-        <p:blipFill>
-          <a:blip r:embed="rId4"/>
-          <a:stretch>
-            <a:fillRect/>
-          </a:stretch>
-        </p:blipFill>
-        <p:spPr>
-          <a:xfrm>
             <a:off x="11048695" y="457200"/>
             <a:ext cx="457200" cy="457200"/>
           </a:xfrm>
@@ -4161,7 +4730,7 @@
       </p:pic>
       <p:sp>
         <p:nvSpPr>
-          <p:cNvPr id="7" name="TextBox 6"/>
+          <p:cNvPr id="5" name="TextBox 4"/>
           <p:cNvSpPr txBox="1"/>
           <p:nvPr/>
         </p:nvSpPr>
@@ -4200,7 +4769,7 @@
       </p:sp>
       <p:sp>
         <p:nvSpPr>
-          <p:cNvPr id="8" name="TextBox 7"/>
+          <p:cNvPr id="6" name="TextBox 5"/>
           <p:cNvSpPr txBox="1"/>
           <p:nvPr/>
         </p:nvSpPr>
@@ -4239,14 +4808,53 @@
       </p:sp>
       <p:sp>
         <p:nvSpPr>
-          <p:cNvPr id="9" name="TextBox 8"/>
+          <p:cNvPr id="7" name="TextBox 6"/>
           <p:cNvSpPr txBox="1"/>
           <p:nvPr/>
         </p:nvSpPr>
         <p:spPr>
           <a:xfrm>
-            <a:off x="1143000" y="1737360"/>
-            <a:ext cx="6568135" cy="2633472"/>
+            <a:off x="10408615" y="6291072"/>
+            <a:ext cx="1097280" cy="274320"/>
+          </a:xfrm>
+          <a:prstGeom prst="rect">
+            <a:avLst/>
+          </a:prstGeom>
+          <a:noFill/>
+        </p:spPr>
+        <p:txBody>
+          <a:bodyPr wrap="square" lIns="0" rIns="0" tIns="0" bIns="0" anchor="t">
+            <a:spAutoFit/>
+          </a:bodyPr>
+          <a:lstStyle/>
+          <a:p>
+            <a:pPr algn="r">
+              <a:lnSpc>
+                <a:spcPct val="120000"/>
+              </a:lnSpc>
+            </a:pPr>
+            <a:r>
+              <a:rPr sz="1000" b="0">
+                <a:solidFill>
+                  <a:srgbClr val="9FB6DC"/>
+                </a:solidFill>
+                <a:latin typeface="Inter"/>
+              </a:rPr>
+              <a:t>3 / 7</a:t>
+            </a:r>
+          </a:p>
+        </p:txBody>
+      </p:sp>
+      <p:sp>
+        <p:nvSpPr>
+          <p:cNvPr id="8" name="TextBox 7"/>
+          <p:cNvSpPr txBox="1"/>
+          <p:nvPr/>
+        </p:nvSpPr>
+        <p:spPr>
+          <a:xfrm>
+            <a:off x="1143000" y="1600200"/>
+            <a:ext cx="10271455" cy="2473452"/>
           </a:xfrm>
           <a:prstGeom prst="rect">
             <a:avLst/>
@@ -4265,27 +4873,27 @@
               </a:lnSpc>
             </a:pPr>
             <a:r>
-              <a:rPr sz="3200" b="0">
+              <a:rPr sz="3000" b="0">
                 <a:solidFill>
                   <a:srgbClr val="FFFFFF"/>
                 </a:solidFill>
                 <a:latin typeface="Unbounded"/>
               </a:rPr>
-              <a:t>«Предприниматель тратит на соцсети не деньги, а своё время — самый дорогой ресурс в компании»</a:t>
-            </a:r>
-          </a:p>
-        </p:txBody>
-      </p:sp>
-      <p:sp>
-        <p:nvSpPr>
-          <p:cNvPr id="10" name="Rectangle 9"/>
+              <a:t>«Контент-фабрики есть у всех, это не новость. Новость в том, что управление циклом можно отдать самому ИИ: он знает правила своих собратьев лучше человека»</a:t>
+            </a:r>
+          </a:p>
+        </p:txBody>
+      </p:sp>
+      <p:sp>
+        <p:nvSpPr>
+          <p:cNvPr id="9" name="Rectangle 8"/>
           <p:cNvSpPr/>
           <p:nvPr/>
         </p:nvSpPr>
         <p:spPr>
           <a:xfrm>
-            <a:off x="685800" y="1810512"/>
-            <a:ext cx="82296" cy="2523743"/>
+            <a:off x="685800" y="1673352"/>
+            <a:ext cx="82296" cy="2363724"/>
           </a:xfrm>
           <a:prstGeom prst="rect">
             <a:avLst/>
@@ -4322,14 +4930,14 @@
       </p:sp>
       <p:sp>
         <p:nvSpPr>
-          <p:cNvPr id="11" name="TextBox 10"/>
+          <p:cNvPr id="10" name="TextBox 9"/>
           <p:cNvSpPr txBox="1"/>
           <p:nvPr/>
         </p:nvSpPr>
         <p:spPr>
           <a:xfrm>
-            <a:off x="1143000" y="4663440"/>
-            <a:ext cx="6568135" cy="320802"/>
+            <a:off x="1143000" y="4366260"/>
+            <a:ext cx="10271455" cy="320802"/>
           </a:xfrm>
           <a:prstGeom prst="rect">
             <a:avLst/>
@@ -4370,14 +4978,14 @@
       </p:sp>
       <p:sp>
         <p:nvSpPr>
-          <p:cNvPr id="12" name="Rectangle 11"/>
+          <p:cNvPr id="11" name="Rectangle 10"/>
           <p:cNvSpPr/>
           <p:nvPr/>
         </p:nvSpPr>
         <p:spPr>
           <a:xfrm>
-            <a:off x="685800" y="5394960"/>
-            <a:ext cx="7025335" cy="10972"/>
+            <a:off x="685800" y="5166360"/>
+            <a:ext cx="10820095" cy="10972"/>
           </a:xfrm>
           <a:prstGeom prst="rect">
             <a:avLst/>
@@ -4414,14 +5022,14 @@
       </p:sp>
       <p:sp>
         <p:nvSpPr>
-          <p:cNvPr id="13" name="TextBox 12"/>
+          <p:cNvPr id="12" name="TextBox 11"/>
           <p:cNvSpPr txBox="1"/>
           <p:nvPr/>
         </p:nvSpPr>
         <p:spPr>
           <a:xfrm>
-            <a:off x="685800" y="5632704"/>
-            <a:ext cx="7025335" cy="347472"/>
+            <a:off x="685800" y="5413248"/>
+            <a:ext cx="10820095" cy="381762"/>
           </a:xfrm>
           <a:prstGeom prst="rect">
             <a:avLst/>
@@ -4440,13 +5048,61 @@
               </a:lnSpc>
             </a:pPr>
             <a:r>
-              <a:rPr sz="1600" b="0">
+              <a:rPr sz="1800" b="0">
                 <a:solidFill>
                   <a:srgbClr val="9FB6DC"/>
                 </a:solidFill>
                 <a:latin typeface="Inter"/>
               </a:rPr>
-              <a:t>Согласование тем · Правки текстов · Раскладка по площадкам</a:t>
+              <a:t>Исследование · Стратегия · Генерация</a:t>
+            </a:r>
+            <a:r>
+              <a:rPr sz="1800" b="1">
+                <a:solidFill>
+                  <a:srgbClr val="FFFFFF"/>
+                </a:solidFill>
+                <a:latin typeface="Inter"/>
+              </a:rPr>
+              <a:t>      Проверка · Публикация · Анализ</a:t>
+            </a:r>
+          </a:p>
+        </p:txBody>
+      </p:sp>
+      <p:sp>
+        <p:nvSpPr>
+          <p:cNvPr id="13" name="TextBox 12"/>
+          <p:cNvSpPr txBox="1"/>
+          <p:nvPr/>
+        </p:nvSpPr>
+        <p:spPr>
+          <a:xfrm>
+            <a:off x="685800" y="5943600"/>
+            <a:ext cx="10820095" cy="313182"/>
+          </a:xfrm>
+          <a:prstGeom prst="rect">
+            <a:avLst/>
+          </a:prstGeom>
+          <a:noFill/>
+        </p:spPr>
+        <p:txBody>
+          <a:bodyPr wrap="square" lIns="0" rIns="0" tIns="0" bIns="0" anchor="t">
+            <a:spAutoFit/>
+          </a:bodyPr>
+          <a:lstStyle/>
+          <a:p>
+            <a:pPr algn="l">
+              <a:lnSpc>
+                <a:spcPct val="135000"/>
+              </a:lnSpc>
+            </a:pPr>
+            <a:r>
+              <a:rPr sz="1400" b="0">
+                <a:solidFill>
+                  <a:srgbClr val="9FB6DC"/>
+                </a:solidFill>
+                <a:latin typeface="Inter"/>
+              </a:rPr>
+              <a:t>Светлым — то, что почти везде до сих пор делает человек</a:t>
             </a:r>
           </a:p>
         </p:txBody>
@@ -4513,9 +5169,48 @@
           </a:p>
         </p:txBody>
       </p:sp>
+      <p:sp>
+        <p:nvSpPr>
+          <p:cNvPr id="3" name="TextBox 2"/>
+          <p:cNvSpPr txBox="1"/>
+          <p:nvPr/>
+        </p:nvSpPr>
+        <p:spPr>
+          <a:xfrm>
+            <a:off x="10408615" y="6291072"/>
+            <a:ext cx="1097280" cy="274320"/>
+          </a:xfrm>
+          <a:prstGeom prst="rect">
+            <a:avLst/>
+          </a:prstGeom>
+          <a:noFill/>
+        </p:spPr>
+        <p:txBody>
+          <a:bodyPr wrap="square" lIns="0" rIns="0" tIns="0" bIns="0" anchor="t">
+            <a:spAutoFit/>
+          </a:bodyPr>
+          <a:lstStyle/>
+          <a:p>
+            <a:pPr algn="r">
+              <a:lnSpc>
+                <a:spcPct val="120000"/>
+              </a:lnSpc>
+            </a:pPr>
+            <a:r>
+              <a:rPr sz="1000" b="0">
+                <a:solidFill>
+                  <a:srgbClr val="9FB6DC"/>
+                </a:solidFill>
+                <a:latin typeface="Inter"/>
+              </a:rPr>
+              <a:t>4 / 7</a:t>
+            </a:r>
+          </a:p>
+        </p:txBody>
+      </p:sp>
       <p:pic>
         <p:nvPicPr>
-          <p:cNvPr id="3" name="Picture 2" descr="mark.png"/>
+          <p:cNvPr id="4" name="Picture 3" descr="press-nejrony.png"/>
           <p:cNvPicPr>
             <a:picLocks noChangeAspect="1"/>
           </p:cNvPicPr>
@@ -4529,8 +5224,8 @@
         </p:blipFill>
         <p:spPr>
           <a:xfrm>
-            <a:off x="685800" y="457200"/>
-            <a:ext cx="480290" cy="457200"/>
+            <a:off x="8259775" y="0"/>
+            <a:ext cx="3931920" cy="6858000"/>
           </a:xfrm>
           <a:prstGeom prst="rect">
             <a:avLst/>
@@ -4539,7 +5234,7 @@
       </p:pic>
       <p:pic>
         <p:nvPicPr>
-          <p:cNvPr id="4" name="Picture 3" descr="logo.png"/>
+          <p:cNvPr id="5" name="Picture 4" descr="mark.png"/>
           <p:cNvPicPr>
             <a:picLocks noChangeAspect="1"/>
           </p:cNvPicPr>
@@ -4553,6 +5248,30 @@
         </p:blipFill>
         <p:spPr>
           <a:xfrm>
+            <a:off x="685800" y="457200"/>
+            <a:ext cx="480290" cy="457200"/>
+          </a:xfrm>
+          <a:prstGeom prst="rect">
+            <a:avLst/>
+          </a:prstGeom>
+        </p:spPr>
+      </p:pic>
+      <p:pic>
+        <p:nvPicPr>
+          <p:cNvPr id="6" name="Picture 5" descr="logo.png"/>
+          <p:cNvPicPr>
+            <a:picLocks noChangeAspect="1"/>
+          </p:cNvPicPr>
+          <p:nvPr/>
+        </p:nvPicPr>
+        <p:blipFill>
+          <a:blip r:embed="rId4"/>
+          <a:stretch>
+            <a:fillRect/>
+          </a:stretch>
+        </p:blipFill>
+        <p:spPr>
+          <a:xfrm>
             <a:off x="11048695" y="457200"/>
             <a:ext cx="457200" cy="457200"/>
           </a:xfrm>
@@ -4563,7 +5282,7 @@
       </p:pic>
       <p:sp>
         <p:nvSpPr>
-          <p:cNvPr id="5" name="TextBox 4"/>
+          <p:cNvPr id="7" name="TextBox 6"/>
           <p:cNvSpPr txBox="1"/>
           <p:nvPr/>
         </p:nvSpPr>
@@ -4602,7 +5321,7 @@
       </p:sp>
       <p:sp>
         <p:nvSpPr>
-          <p:cNvPr id="6" name="TextBox 5"/>
+          <p:cNvPr id="8" name="TextBox 7"/>
           <p:cNvSpPr txBox="1"/>
           <p:nvPr/>
         </p:nvSpPr>
@@ -4641,131 +5360,14 @@
       </p:sp>
       <p:sp>
         <p:nvSpPr>
-          <p:cNvPr id="7" name="TextBox 6"/>
-          <p:cNvSpPr txBox="1"/>
-          <p:nvPr/>
-        </p:nvSpPr>
-        <p:spPr>
-          <a:xfrm>
-            <a:off x="10408615" y="6291072"/>
-            <a:ext cx="1097280" cy="274320"/>
-          </a:xfrm>
-          <a:prstGeom prst="rect">
-            <a:avLst/>
-          </a:prstGeom>
-          <a:noFill/>
-        </p:spPr>
-        <p:txBody>
-          <a:bodyPr wrap="square" lIns="0" rIns="0" tIns="0" bIns="0" anchor="t">
-            <a:spAutoFit/>
-          </a:bodyPr>
-          <a:lstStyle/>
-          <a:p>
-            <a:pPr algn="r">
-              <a:lnSpc>
-                <a:spcPct val="120000"/>
-              </a:lnSpc>
-            </a:pPr>
-            <a:r>
-              <a:rPr sz="1000" b="0">
-                <a:solidFill>
-                  <a:srgbClr val="9FB6DC"/>
-                </a:solidFill>
-                <a:latin typeface="Inter"/>
-              </a:rPr>
-              <a:t>4 / 6</a:t>
-            </a:r>
-          </a:p>
-        </p:txBody>
-      </p:sp>
-      <p:sp>
-        <p:nvSpPr>
-          <p:cNvPr id="8" name="TextBox 7"/>
-          <p:cNvSpPr txBox="1"/>
-          <p:nvPr/>
-        </p:nvSpPr>
-        <p:spPr>
-          <a:xfrm>
-            <a:off x="685800" y="1463040"/>
-            <a:ext cx="5486400" cy="1264920"/>
-          </a:xfrm>
-          <a:prstGeom prst="rect">
-            <a:avLst/>
-          </a:prstGeom>
-          <a:noFill/>
-        </p:spPr>
-        <p:txBody>
-          <a:bodyPr wrap="square" lIns="0" rIns="0" tIns="0" bIns="0" anchor="t">
-            <a:spAutoFit/>
-          </a:bodyPr>
-          <a:lstStyle/>
-          <a:p>
-            <a:pPr algn="l">
-              <a:lnSpc>
-                <a:spcPct val="102000"/>
-              </a:lnSpc>
-            </a:pPr>
-            <a:r>
-              <a:rPr sz="9200" b="1">
-                <a:solidFill>
-                  <a:srgbClr val="4ADE80"/>
-                </a:solidFill>
-                <a:latin typeface="Unbounded"/>
-              </a:rPr>
-              <a:t>70–80</a:t>
-            </a:r>
-          </a:p>
-        </p:txBody>
-      </p:sp>
-      <p:sp>
-        <p:nvSpPr>
           <p:cNvPr id="9" name="TextBox 8"/>
           <p:cNvSpPr txBox="1"/>
           <p:nvPr/>
         </p:nvSpPr>
         <p:spPr>
           <a:xfrm>
-            <a:off x="685800" y="2782824"/>
-            <a:ext cx="5486400" cy="621792"/>
-          </a:xfrm>
-          <a:prstGeom prst="rect">
-            <a:avLst/>
-          </a:prstGeom>
-          <a:noFill/>
-        </p:spPr>
-        <p:txBody>
-          <a:bodyPr wrap="square" lIns="0" rIns="0" tIns="0" bIns="0" anchor="t">
-            <a:spAutoFit/>
-          </a:bodyPr>
-          <a:lstStyle/>
-          <a:p>
-            <a:pPr algn="l">
-              <a:lnSpc>
-                <a:spcPct val="135000"/>
-              </a:lnSpc>
-            </a:pPr>
-            <a:r>
-              <a:rPr sz="1600" b="0">
-                <a:solidFill>
-                  <a:srgbClr val="D6E4FF"/>
-                </a:solidFill>
-                <a:latin typeface="Inter"/>
-              </a:rPr>
-              <a:t>тысяч рублей в месяц — столько стоят те же роли своими силами</a:t>
-            </a:r>
-          </a:p>
-        </p:txBody>
-      </p:sp>
-      <p:sp>
-        <p:nvSpPr>
-          <p:cNvPr id="10" name="TextBox 9"/>
-          <p:cNvSpPr txBox="1"/>
-          <p:nvPr/>
-        </p:nvSpPr>
-        <p:spPr>
-          <a:xfrm>
-            <a:off x="1143000" y="3794760"/>
-            <a:ext cx="10271455" cy="1737360"/>
+            <a:off x="1143000" y="1737360"/>
+            <a:ext cx="6568135" cy="2633472"/>
           </a:xfrm>
           <a:prstGeom prst="rect">
             <a:avLst/>
@@ -4784,27 +5386,27 @@
               </a:lnSpc>
             </a:pPr>
             <a:r>
-              <a:rPr sz="2600" b="0">
+              <a:rPr sz="3200" b="0">
                 <a:solidFill>
                   <a:srgbClr val="FFFFFF"/>
                 </a:solidFill>
                 <a:latin typeface="Unbounded"/>
               </a:rPr>
-              <a:t>«Чтобы работать с нейросетями самому, нужно покупать токены, держать зарубежные аккаунты и воевать с блокировками. Готовый сервис снимает это целиком»</a:t>
-            </a:r>
-          </a:p>
-        </p:txBody>
-      </p:sp>
-      <p:sp>
-        <p:nvSpPr>
-          <p:cNvPr id="11" name="Rectangle 10"/>
+              <a:t>«Предприниматель тратит на соцсети не деньги, а своё время — самый дорогой ресурс в компании»</a:t>
+            </a:r>
+          </a:p>
+        </p:txBody>
+      </p:sp>
+      <p:sp>
+        <p:nvSpPr>
+          <p:cNvPr id="10" name="Rectangle 9"/>
           <p:cNvSpPr/>
           <p:nvPr/>
         </p:nvSpPr>
         <p:spPr>
           <a:xfrm>
-            <a:off x="685800" y="3867912"/>
-            <a:ext cx="82296" cy="1627632"/>
+            <a:off x="685800" y="1810512"/>
+            <a:ext cx="82296" cy="2523743"/>
           </a:xfrm>
           <a:prstGeom prst="rect">
             <a:avLst/>
@@ -4841,14 +5443,14 @@
       </p:sp>
       <p:sp>
         <p:nvSpPr>
-          <p:cNvPr id="12" name="TextBox 11"/>
+          <p:cNvPr id="11" name="TextBox 10"/>
           <p:cNvSpPr txBox="1"/>
           <p:nvPr/>
         </p:nvSpPr>
         <p:spPr>
           <a:xfrm>
-            <a:off x="1143000" y="5824728"/>
-            <a:ext cx="10271455" cy="320802"/>
+            <a:off x="1143000" y="4663440"/>
+            <a:ext cx="6568135" cy="320802"/>
           </a:xfrm>
           <a:prstGeom prst="rect">
             <a:avLst/>
@@ -4883,6 +5485,89 @@
                 <a:latin typeface="Inter"/>
               </a:rPr>
               <a:t>управляющий партнёр</a:t>
+            </a:r>
+          </a:p>
+        </p:txBody>
+      </p:sp>
+      <p:sp>
+        <p:nvSpPr>
+          <p:cNvPr id="12" name="Rectangle 11"/>
+          <p:cNvSpPr/>
+          <p:nvPr/>
+        </p:nvSpPr>
+        <p:spPr>
+          <a:xfrm>
+            <a:off x="685800" y="5394960"/>
+            <a:ext cx="7025335" cy="10972"/>
+          </a:xfrm>
+          <a:prstGeom prst="rect">
+            <a:avLst/>
+          </a:prstGeom>
+          <a:solidFill>
+            <a:srgbClr val="3E5C9C"/>
+          </a:solidFill>
+          <a:ln>
+            <a:noFill/>
+          </a:ln>
+          <a:effectLst/>
+        </p:spPr>
+        <p:style>
+          <a:lnRef idx="1">
+            <a:schemeClr val="accent1"/>
+          </a:lnRef>
+          <a:fillRef idx="3">
+            <a:schemeClr val="accent1"/>
+          </a:fillRef>
+          <a:effectRef idx="2">
+            <a:schemeClr val="accent1"/>
+          </a:effectRef>
+          <a:fontRef idx="minor">
+            <a:schemeClr val="lt1"/>
+          </a:fontRef>
+        </p:style>
+        <p:txBody>
+          <a:bodyPr rtlCol="0" anchor="ctr"/>
+          <a:lstStyle/>
+          <a:p>
+            <a:pPr algn="ctr"/>
+          </a:p>
+        </p:txBody>
+      </p:sp>
+      <p:sp>
+        <p:nvSpPr>
+          <p:cNvPr id="13" name="TextBox 12"/>
+          <p:cNvSpPr txBox="1"/>
+          <p:nvPr/>
+        </p:nvSpPr>
+        <p:spPr>
+          <a:xfrm>
+            <a:off x="685800" y="5632704"/>
+            <a:ext cx="7025335" cy="347472"/>
+          </a:xfrm>
+          <a:prstGeom prst="rect">
+            <a:avLst/>
+          </a:prstGeom>
+          <a:noFill/>
+        </p:spPr>
+        <p:txBody>
+          <a:bodyPr wrap="square" lIns="0" rIns="0" tIns="0" bIns="0" anchor="t">
+            <a:spAutoFit/>
+          </a:bodyPr>
+          <a:lstStyle/>
+          <a:p>
+            <a:pPr algn="l">
+              <a:lnSpc>
+                <a:spcPct val="135000"/>
+              </a:lnSpc>
+            </a:pPr>
+            <a:r>
+              <a:rPr sz="1600" b="0">
+                <a:solidFill>
+                  <a:srgbClr val="9FB6DC"/>
+                </a:solidFill>
+                <a:latin typeface="Inter"/>
+              </a:rPr>
+              <a:t>Согласование тем · Правки текстов · Раскладка по площадкам</a:t>
             </a:r>
           </a:p>
         </p:txBody>
@@ -5109,7 +5794,7 @@
                 </a:solidFill>
                 <a:latin typeface="Inter"/>
               </a:rPr>
-              <a:t>5 / 6</a:t>
+              <a:t>5 / 7</a:t>
             </a:r>
           </a:p>
         </p:txBody>
@@ -5123,7 +5808,7 @@
         <p:spPr>
           <a:xfrm>
             <a:off x="685800" y="1463040"/>
-            <a:ext cx="4937760" cy="1264920"/>
+            <a:ext cx="5486400" cy="1264920"/>
           </a:xfrm>
           <a:prstGeom prst="rect">
             <a:avLst/>
@@ -5148,7 +5833,7 @@
                 </a:solidFill>
                 <a:latin typeface="Unbounded"/>
               </a:rPr>
-              <a:t>3–6</a:t>
+              <a:t>70–80</a:t>
             </a:r>
           </a:p>
         </p:txBody>
@@ -5162,7 +5847,7 @@
         <p:spPr>
           <a:xfrm>
             <a:off x="685800" y="2782824"/>
-            <a:ext cx="4937760" cy="347472"/>
+            <a:ext cx="5486400" cy="621792"/>
           </a:xfrm>
           <a:prstGeom prst="rect">
             <a:avLst/>
@@ -5187,27 +5872,66 @@
                 </a:solidFill>
                 <a:latin typeface="Inter"/>
               </a:rPr>
-              <a:t>месяцев занимает выход в нейровыдачу</a:t>
-            </a:r>
-          </a:p>
-        </p:txBody>
-      </p:sp>
-      <p:sp>
-        <p:nvSpPr>
-          <p:cNvPr id="10" name="Rectangle 9"/>
+              <a:t>тысяч рублей в месяц — столько стоят те же роли своими силами</a:t>
+            </a:r>
+          </a:p>
+        </p:txBody>
+      </p:sp>
+      <p:sp>
+        <p:nvSpPr>
+          <p:cNvPr id="10" name="TextBox 9"/>
+          <p:cNvSpPr txBox="1"/>
+          <p:nvPr/>
+        </p:nvSpPr>
+        <p:spPr>
+          <a:xfrm>
+            <a:off x="1143000" y="3794760"/>
+            <a:ext cx="10271455" cy="1737360"/>
+          </a:xfrm>
+          <a:prstGeom prst="rect">
+            <a:avLst/>
+          </a:prstGeom>
+          <a:noFill/>
+        </p:spPr>
+        <p:txBody>
+          <a:bodyPr wrap="square" lIns="0" rIns="0" tIns="0" bIns="0" anchor="t">
+            <a:spAutoFit/>
+          </a:bodyPr>
+          <a:lstStyle/>
+          <a:p>
+            <a:pPr algn="l">
+              <a:lnSpc>
+                <a:spcPct val="126000"/>
+              </a:lnSpc>
+            </a:pPr>
+            <a:r>
+              <a:rPr sz="2600" b="0">
+                <a:solidFill>
+                  <a:srgbClr val="FFFFFF"/>
+                </a:solidFill>
+                <a:latin typeface="Unbounded"/>
+              </a:rPr>
+              <a:t>«Чтобы работать с нейросетями самому, нужно покупать токены, держать зарубежные аккаунты и воевать с блокировками. Готовый сервис снимает это целиком»</a:t>
+            </a:r>
+          </a:p>
+        </p:txBody>
+      </p:sp>
+      <p:sp>
+        <p:nvSpPr>
+          <p:cNvPr id="11" name="Rectangle 10"/>
           <p:cNvSpPr/>
           <p:nvPr/>
         </p:nvSpPr>
         <p:spPr>
           <a:xfrm>
-            <a:off x="6263640" y="1600200"/>
-            <a:ext cx="45720" cy="1371600"/>
+            <a:off x="685800" y="3867912"/>
+            <a:ext cx="82296" cy="1627632"/>
           </a:xfrm>
           <a:prstGeom prst="rect">
             <a:avLst/>
           </a:prstGeom>
           <a:solidFill>
-            <a:srgbClr val="4ADE80"/>
+            <a:srgbClr val="7FC4FF"/>
           </a:solidFill>
           <a:ln>
             <a:noFill/>
@@ -5238,144 +5962,13 @@
       </p:sp>
       <p:sp>
         <p:nvSpPr>
-          <p:cNvPr id="11" name="TextBox 10"/>
-          <p:cNvSpPr txBox="1"/>
-          <p:nvPr/>
-        </p:nvSpPr>
-        <p:spPr>
-          <a:xfrm>
-            <a:off x="6583679" y="1554480"/>
-            <a:ext cx="4922215" cy="901827"/>
-          </a:xfrm>
-          <a:prstGeom prst="rect">
-            <a:avLst/>
-          </a:prstGeom>
-          <a:noFill/>
-        </p:spPr>
-        <p:txBody>
-          <a:bodyPr wrap="square" lIns="0" rIns="0" tIns="0" bIns="0" anchor="t">
-            <a:spAutoFit/>
-          </a:bodyPr>
-          <a:lstStyle/>
-          <a:p>
-            <a:pPr algn="l">
-              <a:lnSpc>
-                <a:spcPct val="145000"/>
-              </a:lnSpc>
-            </a:pPr>
-            <a:r>
-              <a:rPr sz="1500" b="1">
-                <a:solidFill>
-                  <a:srgbClr val="D6E4FF"/>
-                </a:solidFill>
-                <a:latin typeface="Inter"/>
-              </a:rPr>
-              <a:t>Маркировать фото и видео как созданные ИИ закон сегодня не требует. </a:t>
-            </a:r>
-            <a:r>
-              <a:rPr sz="1500" b="0">
-                <a:solidFill>
-                  <a:srgbClr val="9FB6DC"/>
-                </a:solidFill>
-                <a:latin typeface="Inter"/>
-              </a:rPr>
-              <a:t>Этим грех не пользоваться.</a:t>
-            </a:r>
-          </a:p>
-        </p:txBody>
-      </p:sp>
-      <p:sp>
-        <p:nvSpPr>
           <p:cNvPr id="12" name="TextBox 11"/>
           <p:cNvSpPr txBox="1"/>
           <p:nvPr/>
         </p:nvSpPr>
         <p:spPr>
           <a:xfrm>
-            <a:off x="1143000" y="3886200"/>
-            <a:ext cx="10271455" cy="1865376"/>
-          </a:xfrm>
-          <a:prstGeom prst="rect">
-            <a:avLst/>
-          </a:prstGeom>
-          <a:noFill/>
-        </p:spPr>
-        <p:txBody>
-          <a:bodyPr wrap="square" lIns="0" rIns="0" tIns="0" bIns="0" anchor="t">
-            <a:spAutoFit/>
-          </a:bodyPr>
-          <a:lstStyle/>
-          <a:p>
-            <a:pPr algn="l">
-              <a:lnSpc>
-                <a:spcPct val="126000"/>
-              </a:lnSpc>
-            </a:pPr>
-            <a:r>
-              <a:rPr sz="2800" b="0">
-                <a:solidFill>
-                  <a:srgbClr val="FFFFFF"/>
-                </a:solidFill>
-                <a:latin typeface="Unbounded"/>
-              </a:rPr>
-              <a:t>«Клиент больше не листает десять ссылок — он спрашивает нейросеть и получает два-три названия. Попасть в этот ответ можно целенаправленно»</a:t>
-            </a:r>
-          </a:p>
-        </p:txBody>
-      </p:sp>
-      <p:sp>
-        <p:nvSpPr>
-          <p:cNvPr id="13" name="Rectangle 12"/>
-          <p:cNvSpPr/>
-          <p:nvPr/>
-        </p:nvSpPr>
-        <p:spPr>
-          <a:xfrm>
-            <a:off x="685800" y="3959352"/>
-            <a:ext cx="82296" cy="1755648"/>
-          </a:xfrm>
-          <a:prstGeom prst="rect">
-            <a:avLst/>
-          </a:prstGeom>
-          <a:solidFill>
-            <a:srgbClr val="7FC4FF"/>
-          </a:solidFill>
-          <a:ln>
-            <a:noFill/>
-          </a:ln>
-          <a:effectLst/>
-        </p:spPr>
-        <p:style>
-          <a:lnRef idx="1">
-            <a:schemeClr val="accent1"/>
-          </a:lnRef>
-          <a:fillRef idx="3">
-            <a:schemeClr val="accent1"/>
-          </a:fillRef>
-          <a:effectRef idx="2">
-            <a:schemeClr val="accent1"/>
-          </a:effectRef>
-          <a:fontRef idx="minor">
-            <a:schemeClr val="lt1"/>
-          </a:fontRef>
-        </p:style>
-        <p:txBody>
-          <a:bodyPr rtlCol="0" anchor="ctr"/>
-          <a:lstStyle/>
-          <a:p>
-            <a:pPr algn="ctr"/>
-          </a:p>
-        </p:txBody>
-      </p:sp>
-      <p:sp>
-        <p:nvSpPr>
-          <p:cNvPr id="14" name="TextBox 13"/>
-          <p:cNvSpPr txBox="1"/>
-          <p:nvPr/>
-        </p:nvSpPr>
-        <p:spPr>
-          <a:xfrm>
-            <a:off x="1143000" y="6044184"/>
+            <a:off x="1143000" y="5824728"/>
             <a:ext cx="10271455" cy="320802"/>
           </a:xfrm>
           <a:prstGeom prst="rect">
@@ -5637,7 +6230,535 @@
                 </a:solidFill>
                 <a:latin typeface="Inter"/>
               </a:rPr>
-              <a:t>6 / 6</a:t>
+              <a:t>6 / 7</a:t>
+            </a:r>
+          </a:p>
+        </p:txBody>
+      </p:sp>
+      <p:sp>
+        <p:nvSpPr>
+          <p:cNvPr id="8" name="TextBox 7"/>
+          <p:cNvSpPr txBox="1"/>
+          <p:nvPr/>
+        </p:nvSpPr>
+        <p:spPr>
+          <a:xfrm>
+            <a:off x="685800" y="1463040"/>
+            <a:ext cx="4937760" cy="1264920"/>
+          </a:xfrm>
+          <a:prstGeom prst="rect">
+            <a:avLst/>
+          </a:prstGeom>
+          <a:noFill/>
+        </p:spPr>
+        <p:txBody>
+          <a:bodyPr wrap="square" lIns="0" rIns="0" tIns="0" bIns="0" anchor="t">
+            <a:spAutoFit/>
+          </a:bodyPr>
+          <a:lstStyle/>
+          <a:p>
+            <a:pPr algn="l">
+              <a:lnSpc>
+                <a:spcPct val="102000"/>
+              </a:lnSpc>
+            </a:pPr>
+            <a:r>
+              <a:rPr sz="9200" b="1">
+                <a:solidFill>
+                  <a:srgbClr val="4ADE80"/>
+                </a:solidFill>
+                <a:latin typeface="Unbounded"/>
+              </a:rPr>
+              <a:t>3–6</a:t>
+            </a:r>
+          </a:p>
+        </p:txBody>
+      </p:sp>
+      <p:sp>
+        <p:nvSpPr>
+          <p:cNvPr id="9" name="TextBox 8"/>
+          <p:cNvSpPr txBox="1"/>
+          <p:nvPr/>
+        </p:nvSpPr>
+        <p:spPr>
+          <a:xfrm>
+            <a:off x="685800" y="2782824"/>
+            <a:ext cx="4937760" cy="347472"/>
+          </a:xfrm>
+          <a:prstGeom prst="rect">
+            <a:avLst/>
+          </a:prstGeom>
+          <a:noFill/>
+        </p:spPr>
+        <p:txBody>
+          <a:bodyPr wrap="square" lIns="0" rIns="0" tIns="0" bIns="0" anchor="t">
+            <a:spAutoFit/>
+          </a:bodyPr>
+          <a:lstStyle/>
+          <a:p>
+            <a:pPr algn="l">
+              <a:lnSpc>
+                <a:spcPct val="135000"/>
+              </a:lnSpc>
+            </a:pPr>
+            <a:r>
+              <a:rPr sz="1600" b="0">
+                <a:solidFill>
+                  <a:srgbClr val="D6E4FF"/>
+                </a:solidFill>
+                <a:latin typeface="Inter"/>
+              </a:rPr>
+              <a:t>месяцев занимает выход в нейровыдачу</a:t>
+            </a:r>
+          </a:p>
+        </p:txBody>
+      </p:sp>
+      <p:sp>
+        <p:nvSpPr>
+          <p:cNvPr id="10" name="Rectangle 9"/>
+          <p:cNvSpPr/>
+          <p:nvPr/>
+        </p:nvSpPr>
+        <p:spPr>
+          <a:xfrm>
+            <a:off x="6263640" y="1600200"/>
+            <a:ext cx="45720" cy="1371600"/>
+          </a:xfrm>
+          <a:prstGeom prst="rect">
+            <a:avLst/>
+          </a:prstGeom>
+          <a:solidFill>
+            <a:srgbClr val="4ADE80"/>
+          </a:solidFill>
+          <a:ln>
+            <a:noFill/>
+          </a:ln>
+          <a:effectLst/>
+        </p:spPr>
+        <p:style>
+          <a:lnRef idx="1">
+            <a:schemeClr val="accent1"/>
+          </a:lnRef>
+          <a:fillRef idx="3">
+            <a:schemeClr val="accent1"/>
+          </a:fillRef>
+          <a:effectRef idx="2">
+            <a:schemeClr val="accent1"/>
+          </a:effectRef>
+          <a:fontRef idx="minor">
+            <a:schemeClr val="lt1"/>
+          </a:fontRef>
+        </p:style>
+        <p:txBody>
+          <a:bodyPr rtlCol="0" anchor="ctr"/>
+          <a:lstStyle/>
+          <a:p>
+            <a:pPr algn="ctr"/>
+          </a:p>
+        </p:txBody>
+      </p:sp>
+      <p:sp>
+        <p:nvSpPr>
+          <p:cNvPr id="11" name="TextBox 10"/>
+          <p:cNvSpPr txBox="1"/>
+          <p:nvPr/>
+        </p:nvSpPr>
+        <p:spPr>
+          <a:xfrm>
+            <a:off x="6583679" y="1554480"/>
+            <a:ext cx="4922215" cy="901827"/>
+          </a:xfrm>
+          <a:prstGeom prst="rect">
+            <a:avLst/>
+          </a:prstGeom>
+          <a:noFill/>
+        </p:spPr>
+        <p:txBody>
+          <a:bodyPr wrap="square" lIns="0" rIns="0" tIns="0" bIns="0" anchor="t">
+            <a:spAutoFit/>
+          </a:bodyPr>
+          <a:lstStyle/>
+          <a:p>
+            <a:pPr algn="l">
+              <a:lnSpc>
+                <a:spcPct val="145000"/>
+              </a:lnSpc>
+            </a:pPr>
+            <a:r>
+              <a:rPr sz="1500" b="1">
+                <a:solidFill>
+                  <a:srgbClr val="D6E4FF"/>
+                </a:solidFill>
+                <a:latin typeface="Inter"/>
+              </a:rPr>
+              <a:t>Маркировать фото и видео как созданные ИИ закон сегодня не требует. </a:t>
+            </a:r>
+            <a:r>
+              <a:rPr sz="1500" b="0">
+                <a:solidFill>
+                  <a:srgbClr val="9FB6DC"/>
+                </a:solidFill>
+                <a:latin typeface="Inter"/>
+              </a:rPr>
+              <a:t>Этим грех не пользоваться.</a:t>
+            </a:r>
+          </a:p>
+        </p:txBody>
+      </p:sp>
+      <p:sp>
+        <p:nvSpPr>
+          <p:cNvPr id="12" name="TextBox 11"/>
+          <p:cNvSpPr txBox="1"/>
+          <p:nvPr/>
+        </p:nvSpPr>
+        <p:spPr>
+          <a:xfrm>
+            <a:off x="1143000" y="3886200"/>
+            <a:ext cx="10271455" cy="1865376"/>
+          </a:xfrm>
+          <a:prstGeom prst="rect">
+            <a:avLst/>
+          </a:prstGeom>
+          <a:noFill/>
+        </p:spPr>
+        <p:txBody>
+          <a:bodyPr wrap="square" lIns="0" rIns="0" tIns="0" bIns="0" anchor="t">
+            <a:spAutoFit/>
+          </a:bodyPr>
+          <a:lstStyle/>
+          <a:p>
+            <a:pPr algn="l">
+              <a:lnSpc>
+                <a:spcPct val="126000"/>
+              </a:lnSpc>
+            </a:pPr>
+            <a:r>
+              <a:rPr sz="2800" b="0">
+                <a:solidFill>
+                  <a:srgbClr val="FFFFFF"/>
+                </a:solidFill>
+                <a:latin typeface="Unbounded"/>
+              </a:rPr>
+              <a:t>«Клиент больше не листает десять ссылок — он спрашивает нейросеть и получает два-три названия. Попасть в этот ответ можно целенаправленно»</a:t>
+            </a:r>
+          </a:p>
+        </p:txBody>
+      </p:sp>
+      <p:sp>
+        <p:nvSpPr>
+          <p:cNvPr id="13" name="Rectangle 12"/>
+          <p:cNvSpPr/>
+          <p:nvPr/>
+        </p:nvSpPr>
+        <p:spPr>
+          <a:xfrm>
+            <a:off x="685800" y="3959352"/>
+            <a:ext cx="82296" cy="1755648"/>
+          </a:xfrm>
+          <a:prstGeom prst="rect">
+            <a:avLst/>
+          </a:prstGeom>
+          <a:solidFill>
+            <a:srgbClr val="7FC4FF"/>
+          </a:solidFill>
+          <a:ln>
+            <a:noFill/>
+          </a:ln>
+          <a:effectLst/>
+        </p:spPr>
+        <p:style>
+          <a:lnRef idx="1">
+            <a:schemeClr val="accent1"/>
+          </a:lnRef>
+          <a:fillRef idx="3">
+            <a:schemeClr val="accent1"/>
+          </a:fillRef>
+          <a:effectRef idx="2">
+            <a:schemeClr val="accent1"/>
+          </a:effectRef>
+          <a:fontRef idx="minor">
+            <a:schemeClr val="lt1"/>
+          </a:fontRef>
+        </p:style>
+        <p:txBody>
+          <a:bodyPr rtlCol="0" anchor="ctr"/>
+          <a:lstStyle/>
+          <a:p>
+            <a:pPr algn="ctr"/>
+          </a:p>
+        </p:txBody>
+      </p:sp>
+      <p:sp>
+        <p:nvSpPr>
+          <p:cNvPr id="14" name="TextBox 13"/>
+          <p:cNvSpPr txBox="1"/>
+          <p:nvPr/>
+        </p:nvSpPr>
+        <p:spPr>
+          <a:xfrm>
+            <a:off x="1143000" y="6044184"/>
+            <a:ext cx="10271455" cy="320802"/>
+          </a:xfrm>
+          <a:prstGeom prst="rect">
+            <a:avLst/>
+          </a:prstGeom>
+          <a:noFill/>
+        </p:spPr>
+        <p:txBody>
+          <a:bodyPr wrap="square" lIns="0" rIns="0" tIns="0" bIns="0" anchor="t">
+            <a:spAutoFit/>
+          </a:bodyPr>
+          <a:lstStyle/>
+          <a:p>
+            <a:pPr algn="l">
+              <a:lnSpc>
+                <a:spcPct val="130000"/>
+              </a:lnSpc>
+            </a:pPr>
+            <a:r>
+              <a:rPr sz="1500" b="1">
+                <a:solidFill>
+                  <a:srgbClr val="7FC4FF"/>
+                </a:solidFill>
+                <a:latin typeface="Inter"/>
+              </a:rPr>
+              <a:t>Руслан Анатольевич Дёмин, </a:t>
+            </a:r>
+            <a:r>
+              <a:rPr sz="1500" b="0">
+                <a:solidFill>
+                  <a:srgbClr val="9FB6DC"/>
+                </a:solidFill>
+                <a:latin typeface="Inter"/>
+              </a:rPr>
+              <a:t>управляющий партнёр</a:t>
+            </a:r>
+          </a:p>
+        </p:txBody>
+      </p:sp>
+    </p:spTree>
+  </p:cSld>
+  <p:clrMapOvr>
+    <a:masterClrMapping/>
+  </p:clrMapOvr>
+</p:sld>
+</file>
+
+<file path=ppt/slides/slide7.xml><?xml version="1.0" encoding="utf-8"?>
+<p:sld xmlns:a="http://schemas.openxmlformats.org/drawingml/2006/main" xmlns:p="http://schemas.openxmlformats.org/presentationml/2006/main" xmlns:r="http://schemas.openxmlformats.org/officeDocument/2006/relationships">
+  <p:cSld>
+    <p:spTree>
+      <p:nvGrpSpPr>
+        <p:cNvPr id="1" name=""/>
+        <p:cNvGrpSpPr/>
+        <p:nvPr/>
+      </p:nvGrpSpPr>
+      <p:grpSpPr/>
+      <p:sp>
+        <p:nvSpPr>
+          <p:cNvPr id="2" name="Rectangle 1"/>
+          <p:cNvSpPr/>
+          <p:nvPr/>
+        </p:nvSpPr>
+        <p:spPr>
+          <a:xfrm>
+            <a:off x="0" y="0"/>
+            <a:ext cx="12191695" cy="6858000"/>
+          </a:xfrm>
+          <a:prstGeom prst="rect">
+            <a:avLst/>
+          </a:prstGeom>
+          <a:solidFill>
+            <a:srgbClr val="0A0A0E"/>
+          </a:solidFill>
+          <a:ln>
+            <a:noFill/>
+          </a:ln>
+          <a:effectLst/>
+        </p:spPr>
+        <p:style>
+          <a:lnRef idx="1">
+            <a:schemeClr val="accent1"/>
+          </a:lnRef>
+          <a:fillRef idx="3">
+            <a:schemeClr val="accent1"/>
+          </a:fillRef>
+          <a:effectRef idx="2">
+            <a:schemeClr val="accent1"/>
+          </a:effectRef>
+          <a:fontRef idx="minor">
+            <a:schemeClr val="lt1"/>
+          </a:fontRef>
+        </p:style>
+        <p:txBody>
+          <a:bodyPr rtlCol="0" anchor="ctr"/>
+          <a:lstStyle/>
+          <a:p>
+            <a:pPr algn="ctr"/>
+          </a:p>
+        </p:txBody>
+      </p:sp>
+      <p:pic>
+        <p:nvPicPr>
+          <p:cNvPr id="3" name="Picture 2" descr="mark.png"/>
+          <p:cNvPicPr>
+            <a:picLocks noChangeAspect="1"/>
+          </p:cNvPicPr>
+          <p:nvPr/>
+        </p:nvPicPr>
+        <p:blipFill>
+          <a:blip r:embed="rId2"/>
+          <a:stretch>
+            <a:fillRect/>
+          </a:stretch>
+        </p:blipFill>
+        <p:spPr>
+          <a:xfrm>
+            <a:off x="685800" y="457200"/>
+            <a:ext cx="480290" cy="457200"/>
+          </a:xfrm>
+          <a:prstGeom prst="rect">
+            <a:avLst/>
+          </a:prstGeom>
+        </p:spPr>
+      </p:pic>
+      <p:pic>
+        <p:nvPicPr>
+          <p:cNvPr id="4" name="Picture 3" descr="logo.png"/>
+          <p:cNvPicPr>
+            <a:picLocks noChangeAspect="1"/>
+          </p:cNvPicPr>
+          <p:nvPr/>
+        </p:nvPicPr>
+        <p:blipFill>
+          <a:blip r:embed="rId3"/>
+          <a:stretch>
+            <a:fillRect/>
+          </a:stretch>
+        </p:blipFill>
+        <p:spPr>
+          <a:xfrm>
+            <a:off x="11048695" y="457200"/>
+            <a:ext cx="457200" cy="457200"/>
+          </a:xfrm>
+          <a:prstGeom prst="rect">
+            <a:avLst/>
+          </a:prstGeom>
+        </p:spPr>
+      </p:pic>
+      <p:sp>
+        <p:nvSpPr>
+          <p:cNvPr id="5" name="TextBox 4"/>
+          <p:cNvSpPr txBox="1"/>
+          <p:nvPr/>
+        </p:nvSpPr>
+        <p:spPr>
+          <a:xfrm>
+            <a:off x="685800" y="987552"/>
+            <a:ext cx="2743200" cy="201168"/>
+          </a:xfrm>
+          <a:prstGeom prst="rect">
+            <a:avLst/>
+          </a:prstGeom>
+          <a:noFill/>
+        </p:spPr>
+        <p:txBody>
+          <a:bodyPr wrap="square" lIns="0" rIns="0" tIns="0" bIns="0" anchor="t">
+            <a:spAutoFit/>
+          </a:bodyPr>
+          <a:lstStyle/>
+          <a:p>
+            <a:pPr algn="l">
+              <a:lnSpc>
+                <a:spcPct val="120000"/>
+              </a:lnSpc>
+            </a:pPr>
+            <a:r>
+              <a:rPr sz="950" b="0">
+                <a:solidFill>
+                  <a:srgbClr val="9FB6DC"/>
+                </a:solidFill>
+                <a:latin typeface="Inter"/>
+              </a:rPr>
+              <a:t>ГенИИ</a:t>
+            </a:r>
+          </a:p>
+        </p:txBody>
+      </p:sp>
+      <p:sp>
+        <p:nvSpPr>
+          <p:cNvPr id="6" name="TextBox 5"/>
+          <p:cNvSpPr txBox="1"/>
+          <p:nvPr/>
+        </p:nvSpPr>
+        <p:spPr>
+          <a:xfrm>
+            <a:off x="8762695" y="987552"/>
+            <a:ext cx="2743200" cy="201168"/>
+          </a:xfrm>
+          <a:prstGeom prst="rect">
+            <a:avLst/>
+          </a:prstGeom>
+          <a:noFill/>
+        </p:spPr>
+        <p:txBody>
+          <a:bodyPr wrap="square" lIns="0" rIns="0" tIns="0" bIns="0" anchor="t">
+            <a:spAutoFit/>
+          </a:bodyPr>
+          <a:lstStyle/>
+          <a:p>
+            <a:pPr algn="r">
+              <a:lnSpc>
+                <a:spcPct val="120000"/>
+              </a:lnSpc>
+            </a:pPr>
+            <a:r>
+              <a:rPr sz="950" b="0">
+                <a:solidFill>
+                  <a:srgbClr val="9FB6DC"/>
+                </a:solidFill>
+                <a:latin typeface="Inter"/>
+              </a:rPr>
+              <a:t>Промптер</a:t>
+            </a:r>
+          </a:p>
+        </p:txBody>
+      </p:sp>
+      <p:sp>
+        <p:nvSpPr>
+          <p:cNvPr id="7" name="TextBox 6"/>
+          <p:cNvSpPr txBox="1"/>
+          <p:nvPr/>
+        </p:nvSpPr>
+        <p:spPr>
+          <a:xfrm>
+            <a:off x="10408615" y="6291072"/>
+            <a:ext cx="1097280" cy="274320"/>
+          </a:xfrm>
+          <a:prstGeom prst="rect">
+            <a:avLst/>
+          </a:prstGeom>
+          <a:noFill/>
+        </p:spPr>
+        <p:txBody>
+          <a:bodyPr wrap="square" lIns="0" rIns="0" tIns="0" bIns="0" anchor="t">
+            <a:spAutoFit/>
+          </a:bodyPr>
+          <a:lstStyle/>
+          <a:p>
+            <a:pPr algn="r">
+              <a:lnSpc>
+                <a:spcPct val="120000"/>
+              </a:lnSpc>
+            </a:pPr>
+            <a:r>
+              <a:rPr sz="1000" b="0">
+                <a:solidFill>
+                  <a:srgbClr val="9FB6DC"/>
+                </a:solidFill>
+                <a:latin typeface="Inter"/>
+              </a:rPr>
+              <a:t>7 / 7</a:t>
             </a:r>
           </a:p>
         </p:txBody>

--- a/pressa/press-kit-genii-prompter.pptx
+++ b/pressa/press-kit-genii-prompter.pptx
@@ -12,6 +12,7 @@
     <p:sldId id="260" r:id="rId11"/>
     <p:sldId id="261" r:id="rId12"/>
     <p:sldId id="262" r:id="rId13"/>
+    <p:sldId id="263" r:id="rId14"/>
   </p:sldIdLst>
   <p:sldSz cx="12191695" cy="6858000" type="screen4x3"/>
   <p:notesSz cx="6858000" cy="9144000"/>
@@ -3785,7 +3786,7 @@
                 </a:solidFill>
                 <a:latin typeface="Inter"/>
               </a:rPr>
-              <a:t>2 / 7</a:t>
+              <a:t>2 / 8</a:t>
             </a:r>
           </a:p>
         </p:txBody>
@@ -4840,7 +4841,7 @@
                 </a:solidFill>
                 <a:latin typeface="Inter"/>
               </a:rPr>
-              <a:t>3 / 7</a:t>
+              <a:t>3 / 8</a:t>
             </a:r>
           </a:p>
         </p:txBody>
@@ -5203,7 +5204,7 @@
                 </a:solidFill>
                 <a:latin typeface="Inter"/>
               </a:rPr>
-              <a:t>4 / 7</a:t>
+              <a:t>4 / 8</a:t>
             </a:r>
           </a:p>
         </p:txBody>
@@ -5794,7 +5795,7 @@
                 </a:solidFill>
                 <a:latin typeface="Inter"/>
               </a:rPr>
-              <a:t>5 / 7</a:t>
+              <a:t>5 / 8</a:t>
             </a:r>
           </a:p>
         </p:txBody>
@@ -6230,7 +6231,7 @@
                 </a:solidFill>
                 <a:latin typeface="Inter"/>
               </a:rPr>
-              <a:t>6 / 7</a:t>
+              <a:t>6 / 8</a:t>
             </a:r>
           </a:p>
         </p:txBody>
@@ -6758,7 +6759,1633 @@
                 </a:solidFill>
                 <a:latin typeface="Inter"/>
               </a:rPr>
-              <a:t>7 / 7</a:t>
+              <a:t>7 / 8</a:t>
+            </a:r>
+          </a:p>
+        </p:txBody>
+      </p:sp>
+      <p:sp>
+        <p:nvSpPr>
+          <p:cNvPr id="8" name="TextBox 7"/>
+          <p:cNvSpPr txBox="1"/>
+          <p:nvPr/>
+        </p:nvSpPr>
+        <p:spPr>
+          <a:xfrm>
+            <a:off x="685800" y="1463040"/>
+            <a:ext cx="10454335" cy="623315"/>
+          </a:xfrm>
+          <a:prstGeom prst="rect">
+            <a:avLst/>
+          </a:prstGeom>
+          <a:noFill/>
+        </p:spPr>
+        <p:txBody>
+          <a:bodyPr wrap="square" lIns="0" rIns="0" tIns="0" bIns="0" anchor="t">
+            <a:spAutoFit/>
+          </a:bodyPr>
+          <a:lstStyle/>
+          <a:p>
+            <a:pPr algn="l">
+              <a:lnSpc>
+                <a:spcPct val="114000"/>
+              </a:lnSpc>
+            </a:pPr>
+            <a:r>
+              <a:rPr sz="3800" b="1">
+                <a:solidFill>
+                  <a:srgbClr val="FFFFFF"/>
+                </a:solidFill>
+                <a:latin typeface="Unbounded"/>
+              </a:rPr>
+              <a:t>Кейсы 2026</a:t>
+            </a:r>
+          </a:p>
+        </p:txBody>
+      </p:sp>
+      <p:sp>
+        <p:nvSpPr>
+          <p:cNvPr id="9" name="Rectangle 8"/>
+          <p:cNvSpPr/>
+          <p:nvPr/>
+        </p:nvSpPr>
+        <p:spPr>
+          <a:xfrm>
+            <a:off x="685800" y="2514600"/>
+            <a:ext cx="1006493" cy="27432"/>
+          </a:xfrm>
+          <a:prstGeom prst="rect">
+            <a:avLst/>
+          </a:prstGeom>
+          <a:solidFill>
+            <a:srgbClr val="7FC4FF"/>
+          </a:solidFill>
+          <a:ln>
+            <a:noFill/>
+          </a:ln>
+          <a:effectLst/>
+        </p:spPr>
+        <p:style>
+          <a:lnRef idx="1">
+            <a:schemeClr val="accent1"/>
+          </a:lnRef>
+          <a:fillRef idx="3">
+            <a:schemeClr val="accent1"/>
+          </a:fillRef>
+          <a:effectRef idx="2">
+            <a:schemeClr val="accent1"/>
+          </a:effectRef>
+          <a:fontRef idx="minor">
+            <a:schemeClr val="lt1"/>
+          </a:fontRef>
+        </p:style>
+        <p:txBody>
+          <a:bodyPr rtlCol="0" anchor="ctr"/>
+          <a:lstStyle/>
+          <a:p>
+            <a:pPr algn="ctr"/>
+          </a:p>
+        </p:txBody>
+      </p:sp>
+      <p:sp>
+        <p:nvSpPr>
+          <p:cNvPr id="10" name="TextBox 9"/>
+          <p:cNvSpPr txBox="1"/>
+          <p:nvPr/>
+        </p:nvSpPr>
+        <p:spPr>
+          <a:xfrm>
+            <a:off x="685800" y="2752344"/>
+            <a:ext cx="2396413" cy="347472"/>
+          </a:xfrm>
+          <a:prstGeom prst="rect">
+            <a:avLst/>
+          </a:prstGeom>
+          <a:noFill/>
+        </p:spPr>
+        <p:txBody>
+          <a:bodyPr wrap="square" lIns="0" rIns="0" tIns="0" bIns="0" anchor="t">
+            <a:spAutoFit/>
+          </a:bodyPr>
+          <a:lstStyle/>
+          <a:p>
+            <a:pPr algn="l">
+              <a:lnSpc>
+                <a:spcPct val="120000"/>
+              </a:lnSpc>
+            </a:pPr>
+            <a:r>
+              <a:rPr sz="1800" b="1">
+                <a:solidFill>
+                  <a:srgbClr val="FFFFFF"/>
+                </a:solidFill>
+                <a:latin typeface="Unbounded"/>
+              </a:rPr>
+              <a:t>55 РозДари</a:t>
+            </a:r>
+          </a:p>
+        </p:txBody>
+      </p:sp>
+      <p:sp>
+        <p:nvSpPr>
+          <p:cNvPr id="11" name="TextBox 10"/>
+          <p:cNvSpPr txBox="1"/>
+          <p:nvPr/>
+        </p:nvSpPr>
+        <p:spPr>
+          <a:xfrm>
+            <a:off x="685800" y="3136391"/>
+            <a:ext cx="2396413" cy="501776"/>
+          </a:xfrm>
+          <a:prstGeom prst="rect">
+            <a:avLst/>
+          </a:prstGeom>
+          <a:noFill/>
+        </p:spPr>
+        <p:txBody>
+          <a:bodyPr wrap="square" lIns="0" rIns="0" tIns="0" bIns="0" anchor="t">
+            <a:spAutoFit/>
+          </a:bodyPr>
+          <a:lstStyle/>
+          <a:p>
+            <a:pPr algn="l">
+              <a:lnSpc>
+                <a:spcPct val="135000"/>
+              </a:lnSpc>
+            </a:pPr>
+            <a:r>
+              <a:rPr sz="1250" b="0">
+                <a:solidFill>
+                  <a:srgbClr val="9FB6DC"/>
+                </a:solidFill>
+                <a:latin typeface="Inter"/>
+              </a:rPr>
+              <a:t>доставка цветов · Нижний Новгород</a:t>
+            </a:r>
+          </a:p>
+        </p:txBody>
+      </p:sp>
+      <p:sp>
+        <p:nvSpPr>
+          <p:cNvPr id="12" name="TextBox 11"/>
+          <p:cNvSpPr txBox="1"/>
+          <p:nvPr/>
+        </p:nvSpPr>
+        <p:spPr>
+          <a:xfrm>
+            <a:off x="685800" y="3904487"/>
+            <a:ext cx="2396413" cy="271272"/>
+          </a:xfrm>
+          <a:prstGeom prst="rect">
+            <a:avLst/>
+          </a:prstGeom>
+          <a:noFill/>
+        </p:spPr>
+        <p:txBody>
+          <a:bodyPr wrap="square" lIns="0" rIns="0" tIns="0" bIns="0" anchor="t">
+            <a:spAutoFit/>
+          </a:bodyPr>
+          <a:lstStyle/>
+          <a:p>
+            <a:pPr algn="l">
+              <a:lnSpc>
+                <a:spcPct val="130000"/>
+              </a:lnSpc>
+            </a:pPr>
+            <a:r>
+              <a:rPr sz="1200" b="0">
+                <a:solidFill>
+                  <a:srgbClr val="7FC4FF"/>
+                </a:solidFill>
+                <a:latin typeface="Inter"/>
+              </a:rPr>
+              <a:t>6 месяцев</a:t>
+            </a:r>
+          </a:p>
+        </p:txBody>
+      </p:sp>
+      <p:sp>
+        <p:nvSpPr>
+          <p:cNvPr id="13" name="TextBox 12"/>
+          <p:cNvSpPr txBox="1"/>
+          <p:nvPr/>
+        </p:nvSpPr>
+        <p:spPr>
+          <a:xfrm>
+            <a:off x="685800" y="4361688"/>
+            <a:ext cx="2396413" cy="553212"/>
+          </a:xfrm>
+          <a:prstGeom prst="rect">
+            <a:avLst/>
+          </a:prstGeom>
+          <a:noFill/>
+        </p:spPr>
+        <p:txBody>
+          <a:bodyPr wrap="square" lIns="0" rIns="0" tIns="0" bIns="0" anchor="t">
+            <a:spAutoFit/>
+          </a:bodyPr>
+          <a:lstStyle/>
+          <a:p>
+            <a:pPr algn="l">
+              <a:lnSpc>
+                <a:spcPct val="105000"/>
+              </a:lnSpc>
+            </a:pPr>
+            <a:r>
+              <a:rPr sz="3600" b="1">
+                <a:solidFill>
+                  <a:srgbClr val="4ADE80"/>
+                </a:solidFill>
+                <a:latin typeface="Unbounded"/>
+              </a:rPr>
+              <a:t>745</a:t>
+            </a:r>
+          </a:p>
+        </p:txBody>
+      </p:sp>
+      <p:sp>
+        <p:nvSpPr>
+          <p:cNvPr id="14" name="TextBox 13"/>
+          <p:cNvSpPr txBox="1"/>
+          <p:nvPr/>
+        </p:nvSpPr>
+        <p:spPr>
+          <a:xfrm>
+            <a:off x="685800" y="4878324"/>
+            <a:ext cx="2396413" cy="271272"/>
+          </a:xfrm>
+          <a:prstGeom prst="rect">
+            <a:avLst/>
+          </a:prstGeom>
+          <a:noFill/>
+        </p:spPr>
+        <p:txBody>
+          <a:bodyPr wrap="square" lIns="0" rIns="0" tIns="0" bIns="0" anchor="t">
+            <a:spAutoFit/>
+          </a:bodyPr>
+          <a:lstStyle/>
+          <a:p>
+            <a:pPr algn="l">
+              <a:lnSpc>
+                <a:spcPct val="130000"/>
+              </a:lnSpc>
+            </a:pPr>
+            <a:r>
+              <a:rPr sz="1200" b="0">
+                <a:solidFill>
+                  <a:srgbClr val="D6E4FF"/>
+                </a:solidFill>
+                <a:latin typeface="Inter"/>
+              </a:rPr>
+              <a:t>заявок</a:t>
+            </a:r>
+          </a:p>
+        </p:txBody>
+      </p:sp>
+      <p:sp>
+        <p:nvSpPr>
+          <p:cNvPr id="15" name="TextBox 14"/>
+          <p:cNvSpPr txBox="1"/>
+          <p:nvPr/>
+        </p:nvSpPr>
+        <p:spPr>
+          <a:xfrm>
+            <a:off x="685800" y="5259324"/>
+            <a:ext cx="2396413" cy="553212"/>
+          </a:xfrm>
+          <a:prstGeom prst="rect">
+            <a:avLst/>
+          </a:prstGeom>
+          <a:noFill/>
+        </p:spPr>
+        <p:txBody>
+          <a:bodyPr wrap="square" lIns="0" rIns="0" tIns="0" bIns="0" anchor="t">
+            <a:spAutoFit/>
+          </a:bodyPr>
+          <a:lstStyle/>
+          <a:p>
+            <a:pPr algn="l">
+              <a:lnSpc>
+                <a:spcPct val="105000"/>
+              </a:lnSpc>
+            </a:pPr>
+            <a:r>
+              <a:rPr sz="3600" b="1">
+                <a:solidFill>
+                  <a:srgbClr val="4ADE80"/>
+                </a:solidFill>
+                <a:latin typeface="Unbounded"/>
+              </a:rPr>
+              <a:t>317</a:t>
+            </a:r>
+          </a:p>
+        </p:txBody>
+      </p:sp>
+      <p:sp>
+        <p:nvSpPr>
+          <p:cNvPr id="16" name="TextBox 15"/>
+          <p:cNvSpPr txBox="1"/>
+          <p:nvPr/>
+        </p:nvSpPr>
+        <p:spPr>
+          <a:xfrm>
+            <a:off x="685800" y="5775960"/>
+            <a:ext cx="2396413" cy="271272"/>
+          </a:xfrm>
+          <a:prstGeom prst="rect">
+            <a:avLst/>
+          </a:prstGeom>
+          <a:noFill/>
+        </p:spPr>
+        <p:txBody>
+          <a:bodyPr wrap="square" lIns="0" rIns="0" tIns="0" bIns="0" anchor="t">
+            <a:spAutoFit/>
+          </a:bodyPr>
+          <a:lstStyle/>
+          <a:p>
+            <a:pPr algn="l">
+              <a:lnSpc>
+                <a:spcPct val="130000"/>
+              </a:lnSpc>
+            </a:pPr>
+            <a:r>
+              <a:rPr sz="1200" b="0">
+                <a:solidFill>
+                  <a:srgbClr val="D6E4FF"/>
+                </a:solidFill>
+                <a:latin typeface="Inter"/>
+              </a:rPr>
+              <a:t>клиентов</a:t>
+            </a:r>
+          </a:p>
+        </p:txBody>
+      </p:sp>
+      <p:sp>
+        <p:nvSpPr>
+          <p:cNvPr id="17" name="Rectangle 16"/>
+          <p:cNvSpPr/>
+          <p:nvPr/>
+        </p:nvSpPr>
+        <p:spPr>
+          <a:xfrm>
+            <a:off x="3493693" y="2514600"/>
+            <a:ext cx="1006493" cy="27432"/>
+          </a:xfrm>
+          <a:prstGeom prst="rect">
+            <a:avLst/>
+          </a:prstGeom>
+          <a:solidFill>
+            <a:srgbClr val="7FC4FF"/>
+          </a:solidFill>
+          <a:ln>
+            <a:noFill/>
+          </a:ln>
+          <a:effectLst/>
+        </p:spPr>
+        <p:style>
+          <a:lnRef idx="1">
+            <a:schemeClr val="accent1"/>
+          </a:lnRef>
+          <a:fillRef idx="3">
+            <a:schemeClr val="accent1"/>
+          </a:fillRef>
+          <a:effectRef idx="2">
+            <a:schemeClr val="accent1"/>
+          </a:effectRef>
+          <a:fontRef idx="minor">
+            <a:schemeClr val="lt1"/>
+          </a:fontRef>
+        </p:style>
+        <p:txBody>
+          <a:bodyPr rtlCol="0" anchor="ctr"/>
+          <a:lstStyle/>
+          <a:p>
+            <a:pPr algn="ctr"/>
+          </a:p>
+        </p:txBody>
+      </p:sp>
+      <p:sp>
+        <p:nvSpPr>
+          <p:cNvPr id="18" name="TextBox 17"/>
+          <p:cNvSpPr txBox="1"/>
+          <p:nvPr/>
+        </p:nvSpPr>
+        <p:spPr>
+          <a:xfrm>
+            <a:off x="3493693" y="2752344"/>
+            <a:ext cx="2396413" cy="347472"/>
+          </a:xfrm>
+          <a:prstGeom prst="rect">
+            <a:avLst/>
+          </a:prstGeom>
+          <a:noFill/>
+        </p:spPr>
+        <p:txBody>
+          <a:bodyPr wrap="square" lIns="0" rIns="0" tIns="0" bIns="0" anchor="t">
+            <a:spAutoFit/>
+          </a:bodyPr>
+          <a:lstStyle/>
+          <a:p>
+            <a:pPr algn="l">
+              <a:lnSpc>
+                <a:spcPct val="120000"/>
+              </a:lnSpc>
+            </a:pPr>
+            <a:r>
+              <a:rPr sz="1800" b="1">
+                <a:solidFill>
+                  <a:srgbClr val="FFFFFF"/>
+                </a:solidFill>
+                <a:latin typeface="Unbounded"/>
+              </a:rPr>
+              <a:t>Сахара.Нет</a:t>
+            </a:r>
+          </a:p>
+        </p:txBody>
+      </p:sp>
+      <p:sp>
+        <p:nvSpPr>
+          <p:cNvPr id="19" name="TextBox 18"/>
+          <p:cNvSpPr txBox="1"/>
+          <p:nvPr/>
+        </p:nvSpPr>
+        <p:spPr>
+          <a:xfrm>
+            <a:off x="3493693" y="3136391"/>
+            <a:ext cx="2396413" cy="287464"/>
+          </a:xfrm>
+          <a:prstGeom prst="rect">
+            <a:avLst/>
+          </a:prstGeom>
+          <a:noFill/>
+        </p:spPr>
+        <p:txBody>
+          <a:bodyPr wrap="square" lIns="0" rIns="0" tIns="0" bIns="0" anchor="t">
+            <a:spAutoFit/>
+          </a:bodyPr>
+          <a:lstStyle/>
+          <a:p>
+            <a:pPr algn="l">
+              <a:lnSpc>
+                <a:spcPct val="135000"/>
+              </a:lnSpc>
+            </a:pPr>
+            <a:r>
+              <a:rPr sz="1250" b="0">
+                <a:solidFill>
+                  <a:srgbClr val="9FB6DC"/>
+                </a:solidFill>
+                <a:latin typeface="Inter"/>
+              </a:rPr>
+              <a:t>ПП-конфеты без сахара</a:t>
+            </a:r>
+          </a:p>
+        </p:txBody>
+      </p:sp>
+      <p:sp>
+        <p:nvSpPr>
+          <p:cNvPr id="20" name="TextBox 19"/>
+          <p:cNvSpPr txBox="1"/>
+          <p:nvPr/>
+        </p:nvSpPr>
+        <p:spPr>
+          <a:xfrm>
+            <a:off x="3493693" y="3904487"/>
+            <a:ext cx="2396413" cy="271272"/>
+          </a:xfrm>
+          <a:prstGeom prst="rect">
+            <a:avLst/>
+          </a:prstGeom>
+          <a:noFill/>
+        </p:spPr>
+        <p:txBody>
+          <a:bodyPr wrap="square" lIns="0" rIns="0" tIns="0" bIns="0" anchor="t">
+            <a:spAutoFit/>
+          </a:bodyPr>
+          <a:lstStyle/>
+          <a:p>
+            <a:pPr algn="l">
+              <a:lnSpc>
+                <a:spcPct val="130000"/>
+              </a:lnSpc>
+            </a:pPr>
+            <a:r>
+              <a:rPr sz="1200" b="0">
+                <a:solidFill>
+                  <a:srgbClr val="7FC4FF"/>
+                </a:solidFill>
+                <a:latin typeface="Inter"/>
+              </a:rPr>
+              <a:t>3,5 месяца</a:t>
+            </a:r>
+          </a:p>
+        </p:txBody>
+      </p:sp>
+      <p:sp>
+        <p:nvSpPr>
+          <p:cNvPr id="21" name="TextBox 20"/>
+          <p:cNvSpPr txBox="1"/>
+          <p:nvPr/>
+        </p:nvSpPr>
+        <p:spPr>
+          <a:xfrm>
+            <a:off x="3493693" y="4361688"/>
+            <a:ext cx="2396413" cy="553212"/>
+          </a:xfrm>
+          <a:prstGeom prst="rect">
+            <a:avLst/>
+          </a:prstGeom>
+          <a:noFill/>
+        </p:spPr>
+        <p:txBody>
+          <a:bodyPr wrap="square" lIns="0" rIns="0" tIns="0" bIns="0" anchor="t">
+            <a:spAutoFit/>
+          </a:bodyPr>
+          <a:lstStyle/>
+          <a:p>
+            <a:pPr algn="l">
+              <a:lnSpc>
+                <a:spcPct val="105000"/>
+              </a:lnSpc>
+            </a:pPr>
+            <a:r>
+              <a:rPr sz="3600" b="1">
+                <a:solidFill>
+                  <a:srgbClr val="4ADE80"/>
+                </a:solidFill>
+                <a:latin typeface="Unbounded"/>
+              </a:rPr>
+              <a:t>376</a:t>
+            </a:r>
+          </a:p>
+        </p:txBody>
+      </p:sp>
+      <p:sp>
+        <p:nvSpPr>
+          <p:cNvPr id="22" name="TextBox 21"/>
+          <p:cNvSpPr txBox="1"/>
+          <p:nvPr/>
+        </p:nvSpPr>
+        <p:spPr>
+          <a:xfrm>
+            <a:off x="3493693" y="4878324"/>
+            <a:ext cx="2396413" cy="271272"/>
+          </a:xfrm>
+          <a:prstGeom prst="rect">
+            <a:avLst/>
+          </a:prstGeom>
+          <a:noFill/>
+        </p:spPr>
+        <p:txBody>
+          <a:bodyPr wrap="square" lIns="0" rIns="0" tIns="0" bIns="0" anchor="t">
+            <a:spAutoFit/>
+          </a:bodyPr>
+          <a:lstStyle/>
+          <a:p>
+            <a:pPr algn="l">
+              <a:lnSpc>
+                <a:spcPct val="130000"/>
+              </a:lnSpc>
+            </a:pPr>
+            <a:r>
+              <a:rPr sz="1200" b="0">
+                <a:solidFill>
+                  <a:srgbClr val="D6E4FF"/>
+                </a:solidFill>
+                <a:latin typeface="Inter"/>
+              </a:rPr>
+              <a:t>кликов на WB и Ozon</a:t>
+            </a:r>
+          </a:p>
+        </p:txBody>
+      </p:sp>
+      <p:sp>
+        <p:nvSpPr>
+          <p:cNvPr id="23" name="TextBox 22"/>
+          <p:cNvSpPr txBox="1"/>
+          <p:nvPr/>
+        </p:nvSpPr>
+        <p:spPr>
+          <a:xfrm>
+            <a:off x="3493693" y="5259324"/>
+            <a:ext cx="2396413" cy="553212"/>
+          </a:xfrm>
+          <a:prstGeom prst="rect">
+            <a:avLst/>
+          </a:prstGeom>
+          <a:noFill/>
+        </p:spPr>
+        <p:txBody>
+          <a:bodyPr wrap="square" lIns="0" rIns="0" tIns="0" bIns="0" anchor="t">
+            <a:spAutoFit/>
+          </a:bodyPr>
+          <a:lstStyle/>
+          <a:p>
+            <a:pPr algn="l">
+              <a:lnSpc>
+                <a:spcPct val="105000"/>
+              </a:lnSpc>
+            </a:pPr>
+            <a:r>
+              <a:rPr sz="3600" b="1">
+                <a:solidFill>
+                  <a:srgbClr val="4ADE80"/>
+                </a:solidFill>
+                <a:latin typeface="Unbounded"/>
+              </a:rPr>
+              <a:t>226</a:t>
+            </a:r>
+          </a:p>
+        </p:txBody>
+      </p:sp>
+      <p:sp>
+        <p:nvSpPr>
+          <p:cNvPr id="24" name="TextBox 23"/>
+          <p:cNvSpPr txBox="1"/>
+          <p:nvPr/>
+        </p:nvSpPr>
+        <p:spPr>
+          <a:xfrm>
+            <a:off x="3493693" y="5775960"/>
+            <a:ext cx="2396413" cy="271272"/>
+          </a:xfrm>
+          <a:prstGeom prst="rect">
+            <a:avLst/>
+          </a:prstGeom>
+          <a:noFill/>
+        </p:spPr>
+        <p:txBody>
+          <a:bodyPr wrap="square" lIns="0" rIns="0" tIns="0" bIns="0" anchor="t">
+            <a:spAutoFit/>
+          </a:bodyPr>
+          <a:lstStyle/>
+          <a:p>
+            <a:pPr algn="l">
+              <a:lnSpc>
+                <a:spcPct val="130000"/>
+              </a:lnSpc>
+            </a:pPr>
+            <a:r>
+              <a:rPr sz="1200" b="0">
+                <a:solidFill>
+                  <a:srgbClr val="D6E4FF"/>
+                </a:solidFill>
+                <a:latin typeface="Inter"/>
+              </a:rPr>
+              <a:t>оформлений</a:t>
+            </a:r>
+          </a:p>
+        </p:txBody>
+      </p:sp>
+      <p:sp>
+        <p:nvSpPr>
+          <p:cNvPr id="25" name="Rectangle 24"/>
+          <p:cNvSpPr/>
+          <p:nvPr/>
+        </p:nvSpPr>
+        <p:spPr>
+          <a:xfrm>
+            <a:off x="6301587" y="2514600"/>
+            <a:ext cx="1006493" cy="27432"/>
+          </a:xfrm>
+          <a:prstGeom prst="rect">
+            <a:avLst/>
+          </a:prstGeom>
+          <a:solidFill>
+            <a:srgbClr val="7FC4FF"/>
+          </a:solidFill>
+          <a:ln>
+            <a:noFill/>
+          </a:ln>
+          <a:effectLst/>
+        </p:spPr>
+        <p:style>
+          <a:lnRef idx="1">
+            <a:schemeClr val="accent1"/>
+          </a:lnRef>
+          <a:fillRef idx="3">
+            <a:schemeClr val="accent1"/>
+          </a:fillRef>
+          <a:effectRef idx="2">
+            <a:schemeClr val="accent1"/>
+          </a:effectRef>
+          <a:fontRef idx="minor">
+            <a:schemeClr val="lt1"/>
+          </a:fontRef>
+        </p:style>
+        <p:txBody>
+          <a:bodyPr rtlCol="0" anchor="ctr"/>
+          <a:lstStyle/>
+          <a:p>
+            <a:pPr algn="ctr"/>
+          </a:p>
+        </p:txBody>
+      </p:sp>
+      <p:sp>
+        <p:nvSpPr>
+          <p:cNvPr id="26" name="TextBox 25"/>
+          <p:cNvSpPr txBox="1"/>
+          <p:nvPr/>
+        </p:nvSpPr>
+        <p:spPr>
+          <a:xfrm>
+            <a:off x="6301587" y="2752344"/>
+            <a:ext cx="2396413" cy="499871"/>
+          </a:xfrm>
+          <a:prstGeom prst="rect">
+            <a:avLst/>
+          </a:prstGeom>
+          <a:noFill/>
+        </p:spPr>
+        <p:txBody>
+          <a:bodyPr wrap="square" lIns="0" rIns="0" tIns="0" bIns="0" anchor="t">
+            <a:spAutoFit/>
+          </a:bodyPr>
+          <a:lstStyle/>
+          <a:p>
+            <a:pPr algn="l">
+              <a:lnSpc>
+                <a:spcPct val="120000"/>
+              </a:lnSpc>
+            </a:pPr>
+            <a:r>
+              <a:rPr sz="1400" b="1">
+                <a:solidFill>
+                  <a:srgbClr val="FFFFFF"/>
+                </a:solidFill>
+                <a:latin typeface="Unbounded"/>
+              </a:rPr>
+              <a:t>Эмиграционно-визовый центр</a:t>
+            </a:r>
+          </a:p>
+        </p:txBody>
+      </p:sp>
+      <p:sp>
+        <p:nvSpPr>
+          <p:cNvPr id="27" name="TextBox 26"/>
+          <p:cNvSpPr txBox="1"/>
+          <p:nvPr/>
+        </p:nvSpPr>
+        <p:spPr>
+          <a:xfrm>
+            <a:off x="6301587" y="3288792"/>
+            <a:ext cx="2396413" cy="287464"/>
+          </a:xfrm>
+          <a:prstGeom prst="rect">
+            <a:avLst/>
+          </a:prstGeom>
+          <a:noFill/>
+        </p:spPr>
+        <p:txBody>
+          <a:bodyPr wrap="square" lIns="0" rIns="0" tIns="0" bIns="0" anchor="t">
+            <a:spAutoFit/>
+          </a:bodyPr>
+          <a:lstStyle/>
+          <a:p>
+            <a:pPr algn="l">
+              <a:lnSpc>
+                <a:spcPct val="135000"/>
+              </a:lnSpc>
+            </a:pPr>
+            <a:r>
+              <a:rPr sz="1250" b="0">
+                <a:solidFill>
+                  <a:srgbClr val="9FB6DC"/>
+                </a:solidFill>
+                <a:latin typeface="Inter"/>
+              </a:rPr>
+              <a:t>Калининград</a:t>
+            </a:r>
+          </a:p>
+        </p:txBody>
+      </p:sp>
+      <p:sp>
+        <p:nvSpPr>
+          <p:cNvPr id="28" name="TextBox 27"/>
+          <p:cNvSpPr txBox="1"/>
+          <p:nvPr/>
+        </p:nvSpPr>
+        <p:spPr>
+          <a:xfrm>
+            <a:off x="6301587" y="3904487"/>
+            <a:ext cx="2396413" cy="271272"/>
+          </a:xfrm>
+          <a:prstGeom prst="rect">
+            <a:avLst/>
+          </a:prstGeom>
+          <a:noFill/>
+        </p:spPr>
+        <p:txBody>
+          <a:bodyPr wrap="square" lIns="0" rIns="0" tIns="0" bIns="0" anchor="t">
+            <a:spAutoFit/>
+          </a:bodyPr>
+          <a:lstStyle/>
+          <a:p>
+            <a:pPr algn="l">
+              <a:lnSpc>
+                <a:spcPct val="130000"/>
+              </a:lnSpc>
+            </a:pPr>
+            <a:r>
+              <a:rPr sz="1200" b="0">
+                <a:solidFill>
+                  <a:srgbClr val="7FC4FF"/>
+                </a:solidFill>
+                <a:latin typeface="Inter"/>
+              </a:rPr>
+              <a:t>3 месяца</a:t>
+            </a:r>
+          </a:p>
+        </p:txBody>
+      </p:sp>
+      <p:sp>
+        <p:nvSpPr>
+          <p:cNvPr id="29" name="TextBox 28"/>
+          <p:cNvSpPr txBox="1"/>
+          <p:nvPr/>
+        </p:nvSpPr>
+        <p:spPr>
+          <a:xfrm>
+            <a:off x="6301587" y="4361688"/>
+            <a:ext cx="2396413" cy="553212"/>
+          </a:xfrm>
+          <a:prstGeom prst="rect">
+            <a:avLst/>
+          </a:prstGeom>
+          <a:noFill/>
+        </p:spPr>
+        <p:txBody>
+          <a:bodyPr wrap="square" lIns="0" rIns="0" tIns="0" bIns="0" anchor="t">
+            <a:spAutoFit/>
+          </a:bodyPr>
+          <a:lstStyle/>
+          <a:p>
+            <a:pPr algn="l">
+              <a:lnSpc>
+                <a:spcPct val="105000"/>
+              </a:lnSpc>
+            </a:pPr>
+            <a:r>
+              <a:rPr sz="3600" b="1">
+                <a:solidFill>
+                  <a:srgbClr val="4ADE80"/>
+                </a:solidFill>
+                <a:latin typeface="Unbounded"/>
+              </a:rPr>
+              <a:t>149</a:t>
+            </a:r>
+          </a:p>
+        </p:txBody>
+      </p:sp>
+      <p:sp>
+        <p:nvSpPr>
+          <p:cNvPr id="30" name="TextBox 29"/>
+          <p:cNvSpPr txBox="1"/>
+          <p:nvPr/>
+        </p:nvSpPr>
+        <p:spPr>
+          <a:xfrm>
+            <a:off x="6301587" y="4878324"/>
+            <a:ext cx="2396413" cy="271272"/>
+          </a:xfrm>
+          <a:prstGeom prst="rect">
+            <a:avLst/>
+          </a:prstGeom>
+          <a:noFill/>
+        </p:spPr>
+        <p:txBody>
+          <a:bodyPr wrap="square" lIns="0" rIns="0" tIns="0" bIns="0" anchor="t">
+            <a:spAutoFit/>
+          </a:bodyPr>
+          <a:lstStyle/>
+          <a:p>
+            <a:pPr algn="l">
+              <a:lnSpc>
+                <a:spcPct val="130000"/>
+              </a:lnSpc>
+            </a:pPr>
+            <a:r>
+              <a:rPr sz="1200" b="0">
+                <a:solidFill>
+                  <a:srgbClr val="D6E4FF"/>
+                </a:solidFill>
+                <a:latin typeface="Inter"/>
+              </a:rPr>
+              <a:t>заявок</a:t>
+            </a:r>
+          </a:p>
+        </p:txBody>
+      </p:sp>
+      <p:sp>
+        <p:nvSpPr>
+          <p:cNvPr id="31" name="TextBox 30"/>
+          <p:cNvSpPr txBox="1"/>
+          <p:nvPr/>
+        </p:nvSpPr>
+        <p:spPr>
+          <a:xfrm>
+            <a:off x="6301587" y="5259324"/>
+            <a:ext cx="2396413" cy="553212"/>
+          </a:xfrm>
+          <a:prstGeom prst="rect">
+            <a:avLst/>
+          </a:prstGeom>
+          <a:noFill/>
+        </p:spPr>
+        <p:txBody>
+          <a:bodyPr wrap="square" lIns="0" rIns="0" tIns="0" bIns="0" anchor="t">
+            <a:spAutoFit/>
+          </a:bodyPr>
+          <a:lstStyle/>
+          <a:p>
+            <a:pPr algn="l">
+              <a:lnSpc>
+                <a:spcPct val="105000"/>
+              </a:lnSpc>
+            </a:pPr>
+            <a:r>
+              <a:rPr sz="3600" b="1">
+                <a:solidFill>
+                  <a:srgbClr val="4ADE80"/>
+                </a:solidFill>
+                <a:latin typeface="Unbounded"/>
+              </a:rPr>
+              <a:t>46</a:t>
+            </a:r>
+          </a:p>
+        </p:txBody>
+      </p:sp>
+      <p:sp>
+        <p:nvSpPr>
+          <p:cNvPr id="32" name="TextBox 31"/>
+          <p:cNvSpPr txBox="1"/>
+          <p:nvPr/>
+        </p:nvSpPr>
+        <p:spPr>
+          <a:xfrm>
+            <a:off x="6301587" y="5775960"/>
+            <a:ext cx="2396413" cy="271272"/>
+          </a:xfrm>
+          <a:prstGeom prst="rect">
+            <a:avLst/>
+          </a:prstGeom>
+          <a:noFill/>
+        </p:spPr>
+        <p:txBody>
+          <a:bodyPr wrap="square" lIns="0" rIns="0" tIns="0" bIns="0" anchor="t">
+            <a:spAutoFit/>
+          </a:bodyPr>
+          <a:lstStyle/>
+          <a:p>
+            <a:pPr algn="l">
+              <a:lnSpc>
+                <a:spcPct val="130000"/>
+              </a:lnSpc>
+            </a:pPr>
+            <a:r>
+              <a:rPr sz="1200" b="0">
+                <a:solidFill>
+                  <a:srgbClr val="D6E4FF"/>
+                </a:solidFill>
+                <a:latin typeface="Inter"/>
+              </a:rPr>
+              <a:t>клиентов</a:t>
+            </a:r>
+          </a:p>
+        </p:txBody>
+      </p:sp>
+      <p:sp>
+        <p:nvSpPr>
+          <p:cNvPr id="33" name="Rectangle 32"/>
+          <p:cNvSpPr/>
+          <p:nvPr/>
+        </p:nvSpPr>
+        <p:spPr>
+          <a:xfrm>
+            <a:off x="9109481" y="2514600"/>
+            <a:ext cx="1006493" cy="27432"/>
+          </a:xfrm>
+          <a:prstGeom prst="rect">
+            <a:avLst/>
+          </a:prstGeom>
+          <a:solidFill>
+            <a:srgbClr val="7FC4FF"/>
+          </a:solidFill>
+          <a:ln>
+            <a:noFill/>
+          </a:ln>
+          <a:effectLst/>
+        </p:spPr>
+        <p:style>
+          <a:lnRef idx="1">
+            <a:schemeClr val="accent1"/>
+          </a:lnRef>
+          <a:fillRef idx="3">
+            <a:schemeClr val="accent1"/>
+          </a:fillRef>
+          <a:effectRef idx="2">
+            <a:schemeClr val="accent1"/>
+          </a:effectRef>
+          <a:fontRef idx="minor">
+            <a:schemeClr val="lt1"/>
+          </a:fontRef>
+        </p:style>
+        <p:txBody>
+          <a:bodyPr rtlCol="0" anchor="ctr"/>
+          <a:lstStyle/>
+          <a:p>
+            <a:pPr algn="ctr"/>
+          </a:p>
+        </p:txBody>
+      </p:sp>
+      <p:sp>
+        <p:nvSpPr>
+          <p:cNvPr id="34" name="TextBox 33"/>
+          <p:cNvSpPr txBox="1"/>
+          <p:nvPr/>
+        </p:nvSpPr>
+        <p:spPr>
+          <a:xfrm>
+            <a:off x="9109481" y="2752344"/>
+            <a:ext cx="2396413" cy="347472"/>
+          </a:xfrm>
+          <a:prstGeom prst="rect">
+            <a:avLst/>
+          </a:prstGeom>
+          <a:noFill/>
+        </p:spPr>
+        <p:txBody>
+          <a:bodyPr wrap="square" lIns="0" rIns="0" tIns="0" bIns="0" anchor="t">
+            <a:spAutoFit/>
+          </a:bodyPr>
+          <a:lstStyle/>
+          <a:p>
+            <a:pPr algn="l">
+              <a:lnSpc>
+                <a:spcPct val="120000"/>
+              </a:lnSpc>
+            </a:pPr>
+            <a:r>
+              <a:rPr sz="1800" b="1">
+                <a:solidFill>
+                  <a:srgbClr val="FFFFFF"/>
+                </a:solidFill>
+                <a:latin typeface="Unbounded"/>
+              </a:rPr>
+              <a:t>МЁД</a:t>
+            </a:r>
+          </a:p>
+        </p:txBody>
+      </p:sp>
+      <p:sp>
+        <p:nvSpPr>
+          <p:cNvPr id="35" name="TextBox 34"/>
+          <p:cNvSpPr txBox="1"/>
+          <p:nvPr/>
+        </p:nvSpPr>
+        <p:spPr>
+          <a:xfrm>
+            <a:off x="9109481" y="3136391"/>
+            <a:ext cx="2396413" cy="287464"/>
+          </a:xfrm>
+          <a:prstGeom prst="rect">
+            <a:avLst/>
+          </a:prstGeom>
+          <a:noFill/>
+        </p:spPr>
+        <p:txBody>
+          <a:bodyPr wrap="square" lIns="0" rIns="0" tIns="0" bIns="0" anchor="t">
+            <a:spAutoFit/>
+          </a:bodyPr>
+          <a:lstStyle/>
+          <a:p>
+            <a:pPr algn="l">
+              <a:lnSpc>
+                <a:spcPct val="135000"/>
+              </a:lnSpc>
+            </a:pPr>
+            <a:r>
+              <a:rPr sz="1250" b="0">
+                <a:solidFill>
+                  <a:srgbClr val="9FB6DC"/>
+                </a:solidFill>
+                <a:latin typeface="Inter"/>
+              </a:rPr>
+              <a:t>кафе-караоке · Домодедово</a:t>
+            </a:r>
+          </a:p>
+        </p:txBody>
+      </p:sp>
+      <p:sp>
+        <p:nvSpPr>
+          <p:cNvPr id="36" name="TextBox 35"/>
+          <p:cNvSpPr txBox="1"/>
+          <p:nvPr/>
+        </p:nvSpPr>
+        <p:spPr>
+          <a:xfrm>
+            <a:off x="9109481" y="3904487"/>
+            <a:ext cx="2396413" cy="271272"/>
+          </a:xfrm>
+          <a:prstGeom prst="rect">
+            <a:avLst/>
+          </a:prstGeom>
+          <a:noFill/>
+        </p:spPr>
+        <p:txBody>
+          <a:bodyPr wrap="square" lIns="0" rIns="0" tIns="0" bIns="0" anchor="t">
+            <a:spAutoFit/>
+          </a:bodyPr>
+          <a:lstStyle/>
+          <a:p>
+            <a:pPr algn="l">
+              <a:lnSpc>
+                <a:spcPct val="130000"/>
+              </a:lnSpc>
+            </a:pPr>
+            <a:r>
+              <a:rPr sz="1200" b="0">
+                <a:solidFill>
+                  <a:srgbClr val="7FC4FF"/>
+                </a:solidFill>
+                <a:latin typeface="Inter"/>
+              </a:rPr>
+              <a:t>5 месяцев</a:t>
+            </a:r>
+          </a:p>
+        </p:txBody>
+      </p:sp>
+      <p:sp>
+        <p:nvSpPr>
+          <p:cNvPr id="37" name="TextBox 36"/>
+          <p:cNvSpPr txBox="1"/>
+          <p:nvPr/>
+        </p:nvSpPr>
+        <p:spPr>
+          <a:xfrm>
+            <a:off x="9109481" y="4361688"/>
+            <a:ext cx="2396413" cy="553212"/>
+          </a:xfrm>
+          <a:prstGeom prst="rect">
+            <a:avLst/>
+          </a:prstGeom>
+          <a:noFill/>
+        </p:spPr>
+        <p:txBody>
+          <a:bodyPr wrap="square" lIns="0" rIns="0" tIns="0" bIns="0" anchor="t">
+            <a:spAutoFit/>
+          </a:bodyPr>
+          <a:lstStyle/>
+          <a:p>
+            <a:pPr algn="l">
+              <a:lnSpc>
+                <a:spcPct val="105000"/>
+              </a:lnSpc>
+            </a:pPr>
+            <a:r>
+              <a:rPr sz="3600" b="1">
+                <a:solidFill>
+                  <a:srgbClr val="4ADE80"/>
+                </a:solidFill>
+                <a:latin typeface="Unbounded"/>
+              </a:rPr>
+              <a:t>181</a:t>
+            </a:r>
+          </a:p>
+        </p:txBody>
+      </p:sp>
+      <p:sp>
+        <p:nvSpPr>
+          <p:cNvPr id="38" name="TextBox 37"/>
+          <p:cNvSpPr txBox="1"/>
+          <p:nvPr/>
+        </p:nvSpPr>
+        <p:spPr>
+          <a:xfrm>
+            <a:off x="9109481" y="4878324"/>
+            <a:ext cx="2396413" cy="271272"/>
+          </a:xfrm>
+          <a:prstGeom prst="rect">
+            <a:avLst/>
+          </a:prstGeom>
+          <a:noFill/>
+        </p:spPr>
+        <p:txBody>
+          <a:bodyPr wrap="square" lIns="0" rIns="0" tIns="0" bIns="0" anchor="t">
+            <a:spAutoFit/>
+          </a:bodyPr>
+          <a:lstStyle/>
+          <a:p>
+            <a:pPr algn="l">
+              <a:lnSpc>
+                <a:spcPct val="130000"/>
+              </a:lnSpc>
+            </a:pPr>
+            <a:r>
+              <a:rPr sz="1200" b="0">
+                <a:solidFill>
+                  <a:srgbClr val="D6E4FF"/>
+                </a:solidFill>
+                <a:latin typeface="Inter"/>
+              </a:rPr>
+              <a:t>заявка</a:t>
+            </a:r>
+          </a:p>
+        </p:txBody>
+      </p:sp>
+      <p:sp>
+        <p:nvSpPr>
+          <p:cNvPr id="39" name="TextBox 38"/>
+          <p:cNvSpPr txBox="1"/>
+          <p:nvPr/>
+        </p:nvSpPr>
+        <p:spPr>
+          <a:xfrm>
+            <a:off x="9109481" y="5259324"/>
+            <a:ext cx="2396413" cy="553212"/>
+          </a:xfrm>
+          <a:prstGeom prst="rect">
+            <a:avLst/>
+          </a:prstGeom>
+          <a:noFill/>
+        </p:spPr>
+        <p:txBody>
+          <a:bodyPr wrap="square" lIns="0" rIns="0" tIns="0" bIns="0" anchor="t">
+            <a:spAutoFit/>
+          </a:bodyPr>
+          <a:lstStyle/>
+          <a:p>
+            <a:pPr algn="l">
+              <a:lnSpc>
+                <a:spcPct val="105000"/>
+              </a:lnSpc>
+            </a:pPr>
+            <a:r>
+              <a:rPr sz="3600" b="1">
+                <a:solidFill>
+                  <a:srgbClr val="4ADE80"/>
+                </a:solidFill>
+                <a:latin typeface="Unbounded"/>
+              </a:rPr>
+              <a:t>109</a:t>
+            </a:r>
+          </a:p>
+        </p:txBody>
+      </p:sp>
+      <p:sp>
+        <p:nvSpPr>
+          <p:cNvPr id="40" name="TextBox 39"/>
+          <p:cNvSpPr txBox="1"/>
+          <p:nvPr/>
+        </p:nvSpPr>
+        <p:spPr>
+          <a:xfrm>
+            <a:off x="9109481" y="5775960"/>
+            <a:ext cx="2396413" cy="271272"/>
+          </a:xfrm>
+          <a:prstGeom prst="rect">
+            <a:avLst/>
+          </a:prstGeom>
+          <a:noFill/>
+        </p:spPr>
+        <p:txBody>
+          <a:bodyPr wrap="square" lIns="0" rIns="0" tIns="0" bIns="0" anchor="t">
+            <a:spAutoFit/>
+          </a:bodyPr>
+          <a:lstStyle/>
+          <a:p>
+            <a:pPr algn="l">
+              <a:lnSpc>
+                <a:spcPct val="130000"/>
+              </a:lnSpc>
+            </a:pPr>
+            <a:r>
+              <a:rPr sz="1200" b="0">
+                <a:solidFill>
+                  <a:srgbClr val="D6E4FF"/>
+                </a:solidFill>
+                <a:latin typeface="Inter"/>
+              </a:rPr>
+              <a:t>клиентов</a:t>
+            </a:r>
+          </a:p>
+        </p:txBody>
+      </p:sp>
+      <p:sp>
+        <p:nvSpPr>
+          <p:cNvPr id="41" name="Rectangle 40"/>
+          <p:cNvSpPr/>
+          <p:nvPr/>
+        </p:nvSpPr>
+        <p:spPr>
+          <a:xfrm>
+            <a:off x="685800" y="6108192"/>
+            <a:ext cx="10820095" cy="10972"/>
+          </a:xfrm>
+          <a:prstGeom prst="rect">
+            <a:avLst/>
+          </a:prstGeom>
+          <a:solidFill>
+            <a:srgbClr val="3E5C9C"/>
+          </a:solidFill>
+          <a:ln>
+            <a:noFill/>
+          </a:ln>
+          <a:effectLst/>
+        </p:spPr>
+        <p:style>
+          <a:lnRef idx="1">
+            <a:schemeClr val="accent1"/>
+          </a:lnRef>
+          <a:fillRef idx="3">
+            <a:schemeClr val="accent1"/>
+          </a:fillRef>
+          <a:effectRef idx="2">
+            <a:schemeClr val="accent1"/>
+          </a:effectRef>
+          <a:fontRef idx="minor">
+            <a:schemeClr val="lt1"/>
+          </a:fontRef>
+        </p:style>
+        <p:txBody>
+          <a:bodyPr rtlCol="0" anchor="ctr"/>
+          <a:lstStyle/>
+          <a:p>
+            <a:pPr algn="ctr"/>
+          </a:p>
+        </p:txBody>
+      </p:sp>
+      <p:sp>
+        <p:nvSpPr>
+          <p:cNvPr id="42" name="TextBox 41"/>
+          <p:cNvSpPr txBox="1"/>
+          <p:nvPr/>
+        </p:nvSpPr>
+        <p:spPr>
+          <a:xfrm>
+            <a:off x="685800" y="6309360"/>
+            <a:ext cx="10820095" cy="330327"/>
+          </a:xfrm>
+          <a:prstGeom prst="rect">
+            <a:avLst/>
+          </a:prstGeom>
+          <a:noFill/>
+        </p:spPr>
+        <p:txBody>
+          <a:bodyPr wrap="square" lIns="0" rIns="0" tIns="0" bIns="0" anchor="t">
+            <a:spAutoFit/>
+          </a:bodyPr>
+          <a:lstStyle/>
+          <a:p>
+            <a:pPr algn="l">
+              <a:lnSpc>
+                <a:spcPct val="135000"/>
+              </a:lnSpc>
+            </a:pPr>
+            <a:r>
+              <a:rPr sz="1500" b="0">
+                <a:solidFill>
+                  <a:srgbClr val="9FB6DC"/>
+                </a:solidFill>
+                <a:latin typeface="Inter"/>
+              </a:rPr>
+              <a:t>4 проекта за 2026 год: </a:t>
+            </a:r>
+            <a:r>
+              <a:rPr sz="1500" b="1">
+                <a:solidFill>
+                  <a:srgbClr val="FFFFFF"/>
+                </a:solidFill>
+                <a:latin typeface="Inter"/>
+              </a:rPr>
+              <a:t>1 451 обращение и 698 клиентов</a:t>
+            </a:r>
+          </a:p>
+        </p:txBody>
+      </p:sp>
+    </p:spTree>
+  </p:cSld>
+  <p:clrMapOvr>
+    <a:masterClrMapping/>
+  </p:clrMapOvr>
+</p:sld>
+</file>
+
+<file path=ppt/slides/slide8.xml><?xml version="1.0" encoding="utf-8"?>
+<p:sld xmlns:a="http://schemas.openxmlformats.org/drawingml/2006/main" xmlns:p="http://schemas.openxmlformats.org/presentationml/2006/main" xmlns:r="http://schemas.openxmlformats.org/officeDocument/2006/relationships">
+  <p:cSld>
+    <p:spTree>
+      <p:nvGrpSpPr>
+        <p:cNvPr id="1" name=""/>
+        <p:cNvGrpSpPr/>
+        <p:nvPr/>
+      </p:nvGrpSpPr>
+      <p:grpSpPr/>
+      <p:sp>
+        <p:nvSpPr>
+          <p:cNvPr id="2" name="Rectangle 1"/>
+          <p:cNvSpPr/>
+          <p:nvPr/>
+        </p:nvSpPr>
+        <p:spPr>
+          <a:xfrm>
+            <a:off x="0" y="0"/>
+            <a:ext cx="12191695" cy="6858000"/>
+          </a:xfrm>
+          <a:prstGeom prst="rect">
+            <a:avLst/>
+          </a:prstGeom>
+          <a:solidFill>
+            <a:srgbClr val="0A0A0E"/>
+          </a:solidFill>
+          <a:ln>
+            <a:noFill/>
+          </a:ln>
+          <a:effectLst/>
+        </p:spPr>
+        <p:style>
+          <a:lnRef idx="1">
+            <a:schemeClr val="accent1"/>
+          </a:lnRef>
+          <a:fillRef idx="3">
+            <a:schemeClr val="accent1"/>
+          </a:fillRef>
+          <a:effectRef idx="2">
+            <a:schemeClr val="accent1"/>
+          </a:effectRef>
+          <a:fontRef idx="minor">
+            <a:schemeClr val="lt1"/>
+          </a:fontRef>
+        </p:style>
+        <p:txBody>
+          <a:bodyPr rtlCol="0" anchor="ctr"/>
+          <a:lstStyle/>
+          <a:p>
+            <a:pPr algn="ctr"/>
+          </a:p>
+        </p:txBody>
+      </p:sp>
+      <p:pic>
+        <p:nvPicPr>
+          <p:cNvPr id="3" name="Picture 2" descr="mark.png"/>
+          <p:cNvPicPr>
+            <a:picLocks noChangeAspect="1"/>
+          </p:cNvPicPr>
+          <p:nvPr/>
+        </p:nvPicPr>
+        <p:blipFill>
+          <a:blip r:embed="rId2"/>
+          <a:stretch>
+            <a:fillRect/>
+          </a:stretch>
+        </p:blipFill>
+        <p:spPr>
+          <a:xfrm>
+            <a:off x="685800" y="457200"/>
+            <a:ext cx="480290" cy="457200"/>
+          </a:xfrm>
+          <a:prstGeom prst="rect">
+            <a:avLst/>
+          </a:prstGeom>
+        </p:spPr>
+      </p:pic>
+      <p:pic>
+        <p:nvPicPr>
+          <p:cNvPr id="4" name="Picture 3" descr="logo.png"/>
+          <p:cNvPicPr>
+            <a:picLocks noChangeAspect="1"/>
+          </p:cNvPicPr>
+          <p:nvPr/>
+        </p:nvPicPr>
+        <p:blipFill>
+          <a:blip r:embed="rId3"/>
+          <a:stretch>
+            <a:fillRect/>
+          </a:stretch>
+        </p:blipFill>
+        <p:spPr>
+          <a:xfrm>
+            <a:off x="11048695" y="457200"/>
+            <a:ext cx="457200" cy="457200"/>
+          </a:xfrm>
+          <a:prstGeom prst="rect">
+            <a:avLst/>
+          </a:prstGeom>
+        </p:spPr>
+      </p:pic>
+      <p:sp>
+        <p:nvSpPr>
+          <p:cNvPr id="5" name="TextBox 4"/>
+          <p:cNvSpPr txBox="1"/>
+          <p:nvPr/>
+        </p:nvSpPr>
+        <p:spPr>
+          <a:xfrm>
+            <a:off x="685800" y="987552"/>
+            <a:ext cx="2743200" cy="201168"/>
+          </a:xfrm>
+          <a:prstGeom prst="rect">
+            <a:avLst/>
+          </a:prstGeom>
+          <a:noFill/>
+        </p:spPr>
+        <p:txBody>
+          <a:bodyPr wrap="square" lIns="0" rIns="0" tIns="0" bIns="0" anchor="t">
+            <a:spAutoFit/>
+          </a:bodyPr>
+          <a:lstStyle/>
+          <a:p>
+            <a:pPr algn="l">
+              <a:lnSpc>
+                <a:spcPct val="120000"/>
+              </a:lnSpc>
+            </a:pPr>
+            <a:r>
+              <a:rPr sz="950" b="0">
+                <a:solidFill>
+                  <a:srgbClr val="9FB6DC"/>
+                </a:solidFill>
+                <a:latin typeface="Inter"/>
+              </a:rPr>
+              <a:t>ГенИИ</a:t>
+            </a:r>
+          </a:p>
+        </p:txBody>
+      </p:sp>
+      <p:sp>
+        <p:nvSpPr>
+          <p:cNvPr id="6" name="TextBox 5"/>
+          <p:cNvSpPr txBox="1"/>
+          <p:nvPr/>
+        </p:nvSpPr>
+        <p:spPr>
+          <a:xfrm>
+            <a:off x="8762695" y="987552"/>
+            <a:ext cx="2743200" cy="201168"/>
+          </a:xfrm>
+          <a:prstGeom prst="rect">
+            <a:avLst/>
+          </a:prstGeom>
+          <a:noFill/>
+        </p:spPr>
+        <p:txBody>
+          <a:bodyPr wrap="square" lIns="0" rIns="0" tIns="0" bIns="0" anchor="t">
+            <a:spAutoFit/>
+          </a:bodyPr>
+          <a:lstStyle/>
+          <a:p>
+            <a:pPr algn="r">
+              <a:lnSpc>
+                <a:spcPct val="120000"/>
+              </a:lnSpc>
+            </a:pPr>
+            <a:r>
+              <a:rPr sz="950" b="0">
+                <a:solidFill>
+                  <a:srgbClr val="9FB6DC"/>
+                </a:solidFill>
+                <a:latin typeface="Inter"/>
+              </a:rPr>
+              <a:t>Промптер</a:t>
+            </a:r>
+          </a:p>
+        </p:txBody>
+      </p:sp>
+      <p:sp>
+        <p:nvSpPr>
+          <p:cNvPr id="7" name="TextBox 6"/>
+          <p:cNvSpPr txBox="1"/>
+          <p:nvPr/>
+        </p:nvSpPr>
+        <p:spPr>
+          <a:xfrm>
+            <a:off x="10408615" y="6291072"/>
+            <a:ext cx="1097280" cy="274320"/>
+          </a:xfrm>
+          <a:prstGeom prst="rect">
+            <a:avLst/>
+          </a:prstGeom>
+          <a:noFill/>
+        </p:spPr>
+        <p:txBody>
+          <a:bodyPr wrap="square" lIns="0" rIns="0" tIns="0" bIns="0" anchor="t">
+            <a:spAutoFit/>
+          </a:bodyPr>
+          <a:lstStyle/>
+          <a:p>
+            <a:pPr algn="r">
+              <a:lnSpc>
+                <a:spcPct val="120000"/>
+              </a:lnSpc>
+            </a:pPr>
+            <a:r>
+              <a:rPr sz="1000" b="0">
+                <a:solidFill>
+                  <a:srgbClr val="9FB6DC"/>
+                </a:solidFill>
+                <a:latin typeface="Inter"/>
+              </a:rPr>
+              <a:t>8 / 8</a:t>
             </a:r>
           </a:p>
         </p:txBody>

--- a/pressa/press-kit-genii-prompter.pptx
+++ b/pressa/press-kit-genii-prompter.pptx
@@ -3800,7 +3800,7 @@
         <p:spPr>
           <a:xfrm>
             <a:off x="685800" y="1463040"/>
-            <a:ext cx="10454335" cy="623315"/>
+            <a:ext cx="10454335" cy="579882"/>
           </a:xfrm>
           <a:prstGeom prst="rect">
             <a:avLst/>
@@ -3819,13 +3819,13 @@
               </a:lnSpc>
             </a:pPr>
             <a:r>
-              <a:rPr sz="3800" b="1">
+              <a:rPr sz="3500" b="1">
                 <a:solidFill>
                   <a:srgbClr val="FFFFFF"/>
                 </a:solidFill>
                 <a:latin typeface="Unbounded"/>
               </a:rPr>
-              <a:t>Пять ИИ-агентов вместо отдела</a:t>
+              <a:t>Пять ИИ-агентов вместо агентства</a:t>
             </a:r>
           </a:p>
         </p:txBody>
@@ -5809,7 +5809,7 @@
         <p:spPr>
           <a:xfrm>
             <a:off x="685800" y="1463040"/>
-            <a:ext cx="5486400" cy="1264920"/>
+            <a:ext cx="7863840" cy="1264920"/>
           </a:xfrm>
           <a:prstGeom prst="rect">
             <a:avLst/>
@@ -5834,7 +5834,7 @@
                 </a:solidFill>
                 <a:latin typeface="Unbounded"/>
               </a:rPr>
-              <a:t>70–80</a:t>
+              <a:t>120–150</a:t>
             </a:r>
           </a:p>
         </p:txBody>
@@ -5848,7 +5848,7 @@
         <p:spPr>
           <a:xfrm>
             <a:off x="685800" y="2782824"/>
-            <a:ext cx="5486400" cy="621792"/>
+            <a:ext cx="7863840" cy="347472"/>
           </a:xfrm>
           <a:prstGeom prst="rect">
             <a:avLst/>
@@ -5873,7 +5873,7 @@
                 </a:solidFill>
                 <a:latin typeface="Inter"/>
               </a:rPr>
-              <a:t>тысяч рублей в месяц — столько стоят те же роли своими силами</a:t>
+              <a:t>тысяч рублей в месяц — столько стоит digital-агентство</a:t>
             </a:r>
           </a:p>
         </p:txBody>
@@ -8585,7 +8585,7 @@
                 </a:solidFill>
                 <a:latin typeface="Inter"/>
               </a:rPr>
-              <a:t>ubeto@mail.ru</a:t>
+              <a:t>prompter.moscow@mail.ru</a:t>
             </a:r>
           </a:p>
         </p:txBody>

--- a/pressa/press-kit-genii-prompter.pptx
+++ b/pressa/press-kit-genii-prompter.pptx
@@ -5809,7 +5809,7 @@
         <p:spPr>
           <a:xfrm>
             <a:off x="685800" y="1463040"/>
-            <a:ext cx="7863840" cy="1264920"/>
+            <a:ext cx="10820095" cy="1083564"/>
           </a:xfrm>
           <a:prstGeom prst="rect">
             <a:avLst/>
@@ -5828,13 +5828,13 @@
               </a:lnSpc>
             </a:pPr>
             <a:r>
-              <a:rPr sz="9200" b="1">
+              <a:rPr sz="7800" b="1">
                 <a:solidFill>
                   <a:srgbClr val="4ADE80"/>
                 </a:solidFill>
                 <a:latin typeface="Unbounded"/>
               </a:rPr>
-              <a:t>120–150</a:t>
+              <a:t>120–150 000 ₽</a:t>
             </a:r>
           </a:p>
         </p:txBody>
@@ -5847,8 +5847,8 @@
         </p:nvSpPr>
         <p:spPr>
           <a:xfrm>
-            <a:off x="685800" y="2782824"/>
-            <a:ext cx="7863840" cy="347472"/>
+            <a:off x="685800" y="2601468"/>
+            <a:ext cx="10820095" cy="347472"/>
           </a:xfrm>
           <a:prstGeom prst="rect">
             <a:avLst/>
@@ -5873,7 +5873,7 @@
                 </a:solidFill>
                 <a:latin typeface="Inter"/>
               </a:rPr>
-              <a:t>тысяч рублей в месяц — столько стоит digital-агентство</a:t>
+              <a:t>в месяц — столько стоит digital-агентство</a:t>
             </a:r>
           </a:p>
         </p:txBody>
@@ -8624,7 +8624,7 @@
                 </a:solidFill>
                 <a:latin typeface="Inter"/>
               </a:rPr>
-              <a:t>genii-ai.ru</a:t>
+              <a:t>prompter-ai.moscow   ·   genii-ai.ru</a:t>
             </a:r>
           </a:p>
         </p:txBody>

--- a/pressa/press-kit-genii-prompter.pptx
+++ b/pressa/press-kit-genii-prompter.pptx
@@ -3800,7 +3800,7 @@
         <p:spPr>
           <a:xfrm>
             <a:off x="685800" y="1463040"/>
-            <a:ext cx="10454335" cy="579882"/>
+            <a:ext cx="10454335" cy="565404"/>
           </a:xfrm>
           <a:prstGeom prst="rect">
             <a:avLst/>
@@ -3819,7 +3819,7 @@
               </a:lnSpc>
             </a:pPr>
             <a:r>
-              <a:rPr sz="3500" b="1">
+              <a:rPr sz="3400" b="1">
                 <a:solidFill>
                   <a:srgbClr val="FFFFFF"/>
                 </a:solidFill>
@@ -3832,20 +3832,70 @@
       </p:sp>
       <p:sp>
         <p:nvSpPr>
-          <p:cNvPr id="9" name="Rectangle 8"/>
+          <p:cNvPr id="9" name="Rounded Rectangle 8"/>
           <p:cNvSpPr/>
           <p:nvPr/>
         </p:nvSpPr>
         <p:spPr>
           <a:xfrm>
-            <a:off x="685800" y="2523744"/>
-            <a:ext cx="256032" cy="25603"/>
-          </a:xfrm>
-          <a:prstGeom prst="rect">
-            <a:avLst/>
+            <a:off x="685800" y="2468880"/>
+            <a:ext cx="2003084" cy="2606040"/>
+          </a:xfrm>
+          <a:prstGeom prst="roundRect">
+            <a:avLst>
+              <a:gd name="adj" fmla="val 8216"/>
+            </a:avLst>
           </a:prstGeom>
           <a:solidFill>
-            <a:srgbClr val="7FC4FF"/>
+            <a:srgbClr val="152343"/>
+          </a:solidFill>
+          <a:ln w="12700">
+            <a:solidFill>
+              <a:srgbClr val="2C4478"/>
+            </a:solidFill>
+          </a:ln>
+          <a:effectLst/>
+        </p:spPr>
+        <p:style>
+          <a:lnRef idx="1">
+            <a:schemeClr val="accent1"/>
+          </a:lnRef>
+          <a:fillRef idx="3">
+            <a:schemeClr val="accent1"/>
+          </a:fillRef>
+          <a:effectRef idx="2">
+            <a:schemeClr val="accent1"/>
+          </a:effectRef>
+          <a:fontRef idx="minor">
+            <a:schemeClr val="lt1"/>
+          </a:fontRef>
+        </p:style>
+        <p:txBody>
+          <a:bodyPr rtlCol="0" anchor="ctr"/>
+          <a:lstStyle/>
+          <a:p>
+            <a:pPr algn="ctr"/>
+          </a:p>
+        </p:txBody>
+      </p:sp>
+      <p:sp>
+        <p:nvSpPr>
+          <p:cNvPr id="10" name="Rounded Rectangle 9"/>
+          <p:cNvSpPr/>
+          <p:nvPr/>
+        </p:nvSpPr>
+        <p:spPr>
+          <a:xfrm>
+            <a:off x="923544" y="2706624"/>
+            <a:ext cx="749808" cy="749808"/>
+          </a:xfrm>
+          <a:prstGeom prst="roundRect">
+            <a:avLst>
+              <a:gd name="adj" fmla="val 50000"/>
+            </a:avLst>
+          </a:prstGeom>
+          <a:solidFill>
+            <a:srgbClr val="1B2D55"/>
           </a:solidFill>
           <a:ln>
             <a:noFill/>
@@ -3874,16 +3924,40 @@
           </a:p>
         </p:txBody>
       </p:sp>
-      <p:sp>
-        <p:nvSpPr>
-          <p:cNvPr id="10" name="TextBox 9"/>
+      <p:pic>
+        <p:nvPicPr>
+          <p:cNvPr id="11" name="Picture 10" descr="target-7FC4FF-192-0.png"/>
+          <p:cNvPicPr>
+            <a:picLocks noChangeAspect="1"/>
+          </p:cNvPicPr>
+          <p:nvPr/>
+        </p:nvPicPr>
+        <p:blipFill>
+          <a:blip r:embed="rId4"/>
+          <a:stretch>
+            <a:fillRect/>
+          </a:stretch>
+        </p:blipFill>
+        <p:spPr>
+          <a:xfrm>
+            <a:off x="1125992" y="2909072"/>
+            <a:ext cx="344911" cy="344911"/>
+          </a:xfrm>
+          <a:prstGeom prst="rect">
+            <a:avLst/>
+          </a:prstGeom>
+        </p:spPr>
+      </p:pic>
+      <p:sp>
+        <p:nvSpPr>
+          <p:cNvPr id="12" name="TextBox 11"/>
           <p:cNvSpPr txBox="1"/>
           <p:nvPr/>
         </p:nvSpPr>
         <p:spPr>
           <a:xfrm>
-            <a:off x="1143000" y="2377440"/>
-            <a:ext cx="4587087" cy="362712"/>
+            <a:off x="923544" y="3602736"/>
+            <a:ext cx="1527596" cy="274574"/>
           </a:xfrm>
           <a:prstGeom prst="rect">
             <a:avLst/>
@@ -3898,11 +3972,11 @@
           <a:p>
             <a:pPr algn="l">
               <a:lnSpc>
-                <a:spcPct val="120000"/>
+                <a:spcPct val="122000"/>
               </a:lnSpc>
             </a:pPr>
             <a:r>
-              <a:rPr sz="1900" b="1">
+              <a:rPr sz="1300" b="1">
                 <a:solidFill>
                   <a:srgbClr val="FFFFFF"/>
                 </a:solidFill>
@@ -3915,14 +3989,14 @@
       </p:sp>
       <p:sp>
         <p:nvSpPr>
-          <p:cNvPr id="11" name="TextBox 10"/>
+          <p:cNvPr id="13" name="TextBox 12"/>
           <p:cNvSpPr txBox="1"/>
           <p:nvPr/>
         </p:nvSpPr>
         <p:spPr>
           <a:xfrm>
-            <a:off x="1143000" y="2758440"/>
-            <a:ext cx="4587087" cy="313182"/>
+            <a:off x="923544" y="4279392"/>
+            <a:ext cx="1527596" cy="482091"/>
           </a:xfrm>
           <a:prstGeom prst="rect">
             <a:avLst/>
@@ -3937,37 +4011,87 @@
           <a:p>
             <a:pPr algn="l">
               <a:lnSpc>
-                <a:spcPct val="135000"/>
+                <a:spcPct val="140000"/>
               </a:lnSpc>
             </a:pPr>
             <a:r>
-              <a:rPr sz="1400" b="0">
-                <a:solidFill>
-                  <a:srgbClr val="9FB6DC"/>
+              <a:rPr sz="1150" b="0">
+                <a:solidFill>
+                  <a:srgbClr val="D6E4FF"/>
                 </a:solidFill>
                 <a:latin typeface="Inter"/>
               </a:rPr>
-              <a:t>ниша, конкуренты и запросы</a:t>
-            </a:r>
-          </a:p>
-        </p:txBody>
-      </p:sp>
-      <p:sp>
-        <p:nvSpPr>
-          <p:cNvPr id="12" name="Rectangle 11"/>
+              <a:t>Ниша, конкуренты, запросы</a:t>
+            </a:r>
+          </a:p>
+        </p:txBody>
+      </p:sp>
+      <p:sp>
+        <p:nvSpPr>
+          <p:cNvPr id="14" name="Rounded Rectangle 13"/>
           <p:cNvSpPr/>
           <p:nvPr/>
         </p:nvSpPr>
         <p:spPr>
           <a:xfrm>
-            <a:off x="6461607" y="2523744"/>
-            <a:ext cx="256032" cy="25603"/>
-          </a:xfrm>
-          <a:prstGeom prst="rect">
-            <a:avLst/>
+            <a:off x="2890052" y="2468880"/>
+            <a:ext cx="2003084" cy="2606040"/>
+          </a:xfrm>
+          <a:prstGeom prst="roundRect">
+            <a:avLst>
+              <a:gd name="adj" fmla="val 8216"/>
+            </a:avLst>
           </a:prstGeom>
           <a:solidFill>
-            <a:srgbClr val="7FC4FF"/>
+            <a:srgbClr val="152343"/>
+          </a:solidFill>
+          <a:ln w="12700">
+            <a:solidFill>
+              <a:srgbClr val="2C4478"/>
+            </a:solidFill>
+          </a:ln>
+          <a:effectLst/>
+        </p:spPr>
+        <p:style>
+          <a:lnRef idx="1">
+            <a:schemeClr val="accent1"/>
+          </a:lnRef>
+          <a:fillRef idx="3">
+            <a:schemeClr val="accent1"/>
+          </a:fillRef>
+          <a:effectRef idx="2">
+            <a:schemeClr val="accent1"/>
+          </a:effectRef>
+          <a:fontRef idx="minor">
+            <a:schemeClr val="lt1"/>
+          </a:fontRef>
+        </p:style>
+        <p:txBody>
+          <a:bodyPr rtlCol="0" anchor="ctr"/>
+          <a:lstStyle/>
+          <a:p>
+            <a:pPr algn="ctr"/>
+          </a:p>
+        </p:txBody>
+      </p:sp>
+      <p:sp>
+        <p:nvSpPr>
+          <p:cNvPr id="15" name="Rounded Rectangle 14"/>
+          <p:cNvSpPr/>
+          <p:nvPr/>
+        </p:nvSpPr>
+        <p:spPr>
+          <a:xfrm>
+            <a:off x="3127796" y="2706624"/>
+            <a:ext cx="749808" cy="749808"/>
+          </a:xfrm>
+          <a:prstGeom prst="roundRect">
+            <a:avLst>
+              <a:gd name="adj" fmla="val 50000"/>
+            </a:avLst>
+          </a:prstGeom>
+          <a:solidFill>
+            <a:srgbClr val="1B2D55"/>
           </a:solidFill>
           <a:ln>
             <a:noFill/>
@@ -3996,16 +4120,40 @@
           </a:p>
         </p:txBody>
       </p:sp>
-      <p:sp>
-        <p:nvSpPr>
-          <p:cNvPr id="13" name="TextBox 12"/>
+      <p:pic>
+        <p:nvPicPr>
+          <p:cNvPr id="16" name="Picture 15" descr="pencil-7FC4FF-192-0.png"/>
+          <p:cNvPicPr>
+            <a:picLocks noChangeAspect="1"/>
+          </p:cNvPicPr>
+          <p:nvPr/>
+        </p:nvPicPr>
+        <p:blipFill>
+          <a:blip r:embed="rId5"/>
+          <a:stretch>
+            <a:fillRect/>
+          </a:stretch>
+        </p:blipFill>
+        <p:spPr>
+          <a:xfrm>
+            <a:off x="3330244" y="2909072"/>
+            <a:ext cx="344911" cy="344911"/>
+          </a:xfrm>
+          <a:prstGeom prst="rect">
+            <a:avLst/>
+          </a:prstGeom>
+        </p:spPr>
+      </p:pic>
+      <p:sp>
+        <p:nvSpPr>
+          <p:cNvPr id="17" name="TextBox 16"/>
           <p:cNvSpPr txBox="1"/>
           <p:nvPr/>
         </p:nvSpPr>
         <p:spPr>
           <a:xfrm>
-            <a:off x="6918807" y="2377440"/>
-            <a:ext cx="4587087" cy="362712"/>
+            <a:off x="3127796" y="3602736"/>
+            <a:ext cx="1527596" cy="274574"/>
           </a:xfrm>
           <a:prstGeom prst="rect">
             <a:avLst/>
@@ -4020,11 +4168,11 @@
           <a:p>
             <a:pPr algn="l">
               <a:lnSpc>
-                <a:spcPct val="120000"/>
+                <a:spcPct val="122000"/>
               </a:lnSpc>
             </a:pPr>
             <a:r>
-              <a:rPr sz="1900" b="1">
+              <a:rPr sz="1300" b="1">
                 <a:solidFill>
                   <a:srgbClr val="FFFFFF"/>
                 </a:solidFill>
@@ -4037,14 +4185,14 @@
       </p:sp>
       <p:sp>
         <p:nvSpPr>
-          <p:cNvPr id="14" name="TextBox 13"/>
+          <p:cNvPr id="18" name="TextBox 17"/>
           <p:cNvSpPr txBox="1"/>
           <p:nvPr/>
         </p:nvSpPr>
         <p:spPr>
           <a:xfrm>
-            <a:off x="6918807" y="2758440"/>
-            <a:ext cx="4587087" cy="313182"/>
+            <a:off x="3127796" y="4279392"/>
+            <a:ext cx="1527596" cy="553211"/>
           </a:xfrm>
           <a:prstGeom prst="rect">
             <a:avLst/>
@@ -4059,37 +4207,87 @@
           <a:p>
             <a:pPr algn="l">
               <a:lnSpc>
-                <a:spcPct val="135000"/>
+                <a:spcPct val="140000"/>
               </a:lnSpc>
             </a:pPr>
             <a:r>
-              <a:rPr sz="1400" b="0">
-                <a:solidFill>
-                  <a:srgbClr val="9FB6DC"/>
+              <a:rPr sz="1350" b="0">
+                <a:solidFill>
+                  <a:srgbClr val="D6E4FF"/>
                 </a:solidFill>
                 <a:latin typeface="Inter"/>
               </a:rPr>
-              <a:t>тексты в стиле бренда</a:t>
-            </a:r>
-          </a:p>
-        </p:txBody>
-      </p:sp>
-      <p:sp>
-        <p:nvSpPr>
-          <p:cNvPr id="15" name="Rectangle 14"/>
+              <a:t>Тексты в стиле бренда</a:t>
+            </a:r>
+          </a:p>
+        </p:txBody>
+      </p:sp>
+      <p:sp>
+        <p:nvSpPr>
+          <p:cNvPr id="19" name="Rounded Rectangle 18"/>
           <p:cNvSpPr/>
           <p:nvPr/>
         </p:nvSpPr>
         <p:spPr>
           <a:xfrm>
-            <a:off x="685800" y="3456432"/>
-            <a:ext cx="256032" cy="25603"/>
-          </a:xfrm>
-          <a:prstGeom prst="rect">
-            <a:avLst/>
+            <a:off x="5094305" y="2468880"/>
+            <a:ext cx="2003084" cy="2606040"/>
+          </a:xfrm>
+          <a:prstGeom prst="roundRect">
+            <a:avLst>
+              <a:gd name="adj" fmla="val 8216"/>
+            </a:avLst>
           </a:prstGeom>
           <a:solidFill>
-            <a:srgbClr val="7FC4FF"/>
+            <a:srgbClr val="152343"/>
+          </a:solidFill>
+          <a:ln w="12700">
+            <a:solidFill>
+              <a:srgbClr val="2C4478"/>
+            </a:solidFill>
+          </a:ln>
+          <a:effectLst/>
+        </p:spPr>
+        <p:style>
+          <a:lnRef idx="1">
+            <a:schemeClr val="accent1"/>
+          </a:lnRef>
+          <a:fillRef idx="3">
+            <a:schemeClr val="accent1"/>
+          </a:fillRef>
+          <a:effectRef idx="2">
+            <a:schemeClr val="accent1"/>
+          </a:effectRef>
+          <a:fontRef idx="minor">
+            <a:schemeClr val="lt1"/>
+          </a:fontRef>
+        </p:style>
+        <p:txBody>
+          <a:bodyPr rtlCol="0" anchor="ctr"/>
+          <a:lstStyle/>
+          <a:p>
+            <a:pPr algn="ctr"/>
+          </a:p>
+        </p:txBody>
+      </p:sp>
+      <p:sp>
+        <p:nvSpPr>
+          <p:cNvPr id="20" name="Rounded Rectangle 19"/>
+          <p:cNvSpPr/>
+          <p:nvPr/>
+        </p:nvSpPr>
+        <p:spPr>
+          <a:xfrm>
+            <a:off x="5332049" y="2706624"/>
+            <a:ext cx="749808" cy="749808"/>
+          </a:xfrm>
+          <a:prstGeom prst="roundRect">
+            <a:avLst>
+              <a:gd name="adj" fmla="val 50000"/>
+            </a:avLst>
+          </a:prstGeom>
+          <a:solidFill>
+            <a:srgbClr val="1B2D55"/>
           </a:solidFill>
           <a:ln>
             <a:noFill/>
@@ -4118,16 +4316,40 @@
           </a:p>
         </p:txBody>
       </p:sp>
-      <p:sp>
-        <p:nvSpPr>
-          <p:cNvPr id="16" name="TextBox 15"/>
+      <p:pic>
+        <p:nvPicPr>
+          <p:cNvPr id="21" name="Picture 20" descr="palette-7FC4FF-192-0.png"/>
+          <p:cNvPicPr>
+            <a:picLocks noChangeAspect="1"/>
+          </p:cNvPicPr>
+          <p:nvPr/>
+        </p:nvPicPr>
+        <p:blipFill>
+          <a:blip r:embed="rId6"/>
+          <a:stretch>
+            <a:fillRect/>
+          </a:stretch>
+        </p:blipFill>
+        <p:spPr>
+          <a:xfrm>
+            <a:off x="5534497" y="2909072"/>
+            <a:ext cx="344911" cy="344911"/>
+          </a:xfrm>
+          <a:prstGeom prst="rect">
+            <a:avLst/>
+          </a:prstGeom>
+        </p:spPr>
+      </p:pic>
+      <p:sp>
+        <p:nvSpPr>
+          <p:cNvPr id="22" name="TextBox 21"/>
           <p:cNvSpPr txBox="1"/>
           <p:nvPr/>
         </p:nvSpPr>
         <p:spPr>
           <a:xfrm>
-            <a:off x="1143000" y="3310128"/>
-            <a:ext cx="4587087" cy="362712"/>
+            <a:off x="5332049" y="3602736"/>
+            <a:ext cx="1527596" cy="305562"/>
           </a:xfrm>
           <a:prstGeom prst="rect">
             <a:avLst/>
@@ -4142,11 +4364,11 @@
           <a:p>
             <a:pPr algn="l">
               <a:lnSpc>
-                <a:spcPct val="120000"/>
+                <a:spcPct val="122000"/>
               </a:lnSpc>
             </a:pPr>
             <a:r>
-              <a:rPr sz="1900" b="1">
+              <a:rPr sz="1500" b="1">
                 <a:solidFill>
                   <a:srgbClr val="FFFFFF"/>
                 </a:solidFill>
@@ -4159,14 +4381,14 @@
       </p:sp>
       <p:sp>
         <p:nvSpPr>
-          <p:cNvPr id="17" name="TextBox 16"/>
+          <p:cNvPr id="23" name="TextBox 22"/>
           <p:cNvSpPr txBox="1"/>
           <p:nvPr/>
         </p:nvSpPr>
         <p:spPr>
           <a:xfrm>
-            <a:off x="1143000" y="3691127"/>
-            <a:ext cx="4587087" cy="313182"/>
+            <a:off x="5332049" y="4279392"/>
+            <a:ext cx="1527596" cy="553211"/>
           </a:xfrm>
           <a:prstGeom prst="rect">
             <a:avLst/>
@@ -4181,37 +4403,87 @@
           <a:p>
             <a:pPr algn="l">
               <a:lnSpc>
-                <a:spcPct val="135000"/>
+                <a:spcPct val="140000"/>
               </a:lnSpc>
             </a:pPr>
             <a:r>
-              <a:rPr sz="1400" b="0">
-                <a:solidFill>
-                  <a:srgbClr val="9FB6DC"/>
+              <a:rPr sz="1350" b="0">
+                <a:solidFill>
+                  <a:srgbClr val="D6E4FF"/>
                 </a:solidFill>
                 <a:latin typeface="Inter"/>
               </a:rPr>
-              <a:t>визуал под каждую площадку</a:t>
-            </a:r>
-          </a:p>
-        </p:txBody>
-      </p:sp>
-      <p:sp>
-        <p:nvSpPr>
-          <p:cNvPr id="18" name="Rectangle 17"/>
+              <a:t>Визуал под площадки</a:t>
+            </a:r>
+          </a:p>
+        </p:txBody>
+      </p:sp>
+      <p:sp>
+        <p:nvSpPr>
+          <p:cNvPr id="24" name="Rounded Rectangle 23"/>
           <p:cNvSpPr/>
           <p:nvPr/>
         </p:nvSpPr>
         <p:spPr>
           <a:xfrm>
-            <a:off x="6461607" y="3456432"/>
-            <a:ext cx="256032" cy="25603"/>
-          </a:xfrm>
-          <a:prstGeom prst="rect">
-            <a:avLst/>
+            <a:off x="7298557" y="2468880"/>
+            <a:ext cx="2003084" cy="2606040"/>
+          </a:xfrm>
+          <a:prstGeom prst="roundRect">
+            <a:avLst>
+              <a:gd name="adj" fmla="val 8216"/>
+            </a:avLst>
           </a:prstGeom>
           <a:solidFill>
-            <a:srgbClr val="7FC4FF"/>
+            <a:srgbClr val="152343"/>
+          </a:solidFill>
+          <a:ln w="12700">
+            <a:solidFill>
+              <a:srgbClr val="2C4478"/>
+            </a:solidFill>
+          </a:ln>
+          <a:effectLst/>
+        </p:spPr>
+        <p:style>
+          <a:lnRef idx="1">
+            <a:schemeClr val="accent1"/>
+          </a:lnRef>
+          <a:fillRef idx="3">
+            <a:schemeClr val="accent1"/>
+          </a:fillRef>
+          <a:effectRef idx="2">
+            <a:schemeClr val="accent1"/>
+          </a:effectRef>
+          <a:fontRef idx="minor">
+            <a:schemeClr val="lt1"/>
+          </a:fontRef>
+        </p:style>
+        <p:txBody>
+          <a:bodyPr rtlCol="0" anchor="ctr"/>
+          <a:lstStyle/>
+          <a:p>
+            <a:pPr algn="ctr"/>
+          </a:p>
+        </p:txBody>
+      </p:sp>
+      <p:sp>
+        <p:nvSpPr>
+          <p:cNvPr id="25" name="Rounded Rectangle 24"/>
+          <p:cNvSpPr/>
+          <p:nvPr/>
+        </p:nvSpPr>
+        <p:spPr>
+          <a:xfrm>
+            <a:off x="7536301" y="2706624"/>
+            <a:ext cx="749808" cy="749808"/>
+          </a:xfrm>
+          <a:prstGeom prst="roundRect">
+            <a:avLst>
+              <a:gd name="adj" fmla="val 50000"/>
+            </a:avLst>
+          </a:prstGeom>
+          <a:solidFill>
+            <a:srgbClr val="1B2D55"/>
           </a:solidFill>
           <a:ln>
             <a:noFill/>
@@ -4240,16 +4512,40 @@
           </a:p>
         </p:txBody>
       </p:sp>
-      <p:sp>
-        <p:nvSpPr>
-          <p:cNvPr id="19" name="TextBox 18"/>
+      <p:pic>
+        <p:nvPicPr>
+          <p:cNvPr id="26" name="Picture 25" descr="video-7FC4FF-192-0.png"/>
+          <p:cNvPicPr>
+            <a:picLocks noChangeAspect="1"/>
+          </p:cNvPicPr>
+          <p:nvPr/>
+        </p:nvPicPr>
+        <p:blipFill>
+          <a:blip r:embed="rId7"/>
+          <a:stretch>
+            <a:fillRect/>
+          </a:stretch>
+        </p:blipFill>
+        <p:spPr>
+          <a:xfrm>
+            <a:off x="7738750" y="2909072"/>
+            <a:ext cx="344911" cy="344911"/>
+          </a:xfrm>
+          <a:prstGeom prst="rect">
+            <a:avLst/>
+          </a:prstGeom>
+        </p:spPr>
+      </p:pic>
+      <p:sp>
+        <p:nvSpPr>
+          <p:cNvPr id="27" name="TextBox 26"/>
           <p:cNvSpPr txBox="1"/>
           <p:nvPr/>
         </p:nvSpPr>
         <p:spPr>
           <a:xfrm>
-            <a:off x="6918807" y="3310128"/>
-            <a:ext cx="4587087" cy="362712"/>
+            <a:off x="7536301" y="3602736"/>
+            <a:ext cx="1527596" cy="506983"/>
           </a:xfrm>
           <a:prstGeom prst="rect">
             <a:avLst/>
@@ -4264,31 +4560,32 @@
           <a:p>
             <a:pPr algn="l">
               <a:lnSpc>
-                <a:spcPct val="120000"/>
+                <a:spcPct val="122000"/>
               </a:lnSpc>
             </a:pPr>
             <a:r>
-              <a:rPr sz="1900" b="1">
+              <a:rPr sz="1400" b="1">
                 <a:solidFill>
                   <a:srgbClr val="FFFFFF"/>
                 </a:solidFill>
                 <a:latin typeface="Unbounded"/>
               </a:rPr>
-              <a:t>AI-сценарист и оператор</a:t>
-            </a:r>
-          </a:p>
-        </p:txBody>
-      </p:sp>
-      <p:sp>
-        <p:nvSpPr>
-          <p:cNvPr id="20" name="TextBox 19"/>
+              <a:t>AI-сценарист
+и оператор</a:t>
+            </a:r>
+          </a:p>
+        </p:txBody>
+      </p:sp>
+      <p:sp>
+        <p:nvSpPr>
+          <p:cNvPr id="28" name="TextBox 27"/>
           <p:cNvSpPr txBox="1"/>
           <p:nvPr/>
         </p:nvSpPr>
         <p:spPr>
           <a:xfrm>
-            <a:off x="6918807" y="3691127"/>
-            <a:ext cx="4587087" cy="313182"/>
+            <a:off x="7536301" y="4279392"/>
+            <a:ext cx="1527596" cy="553211"/>
           </a:xfrm>
           <a:prstGeom prst="rect">
             <a:avLst/>
@@ -4303,37 +4600,87 @@
           <a:p>
             <a:pPr algn="l">
               <a:lnSpc>
-                <a:spcPct val="135000"/>
+                <a:spcPct val="140000"/>
               </a:lnSpc>
             </a:pPr>
             <a:r>
-              <a:rPr sz="1400" b="0">
-                <a:solidFill>
-                  <a:srgbClr val="9FB6DC"/>
+              <a:rPr sz="1350" b="0">
+                <a:solidFill>
+                  <a:srgbClr val="D6E4FF"/>
                 </a:solidFill>
                 <a:latin typeface="Inter"/>
               </a:rPr>
-              <a:t>сценарий и готовый ролик</a:t>
-            </a:r>
-          </a:p>
-        </p:txBody>
-      </p:sp>
-      <p:sp>
-        <p:nvSpPr>
-          <p:cNvPr id="21" name="Rectangle 20"/>
+              <a:t>Сценарий и готовый ролик</a:t>
+            </a:r>
+          </a:p>
+        </p:txBody>
+      </p:sp>
+      <p:sp>
+        <p:nvSpPr>
+          <p:cNvPr id="29" name="Rounded Rectangle 28"/>
           <p:cNvSpPr/>
           <p:nvPr/>
         </p:nvSpPr>
         <p:spPr>
           <a:xfrm>
-            <a:off x="685800" y="4389120"/>
-            <a:ext cx="256032" cy="25603"/>
-          </a:xfrm>
-          <a:prstGeom prst="rect">
-            <a:avLst/>
+            <a:off x="9502810" y="2468880"/>
+            <a:ext cx="2003084" cy="2606040"/>
+          </a:xfrm>
+          <a:prstGeom prst="roundRect">
+            <a:avLst>
+              <a:gd name="adj" fmla="val 8216"/>
+            </a:avLst>
           </a:prstGeom>
           <a:solidFill>
-            <a:srgbClr val="7FC4FF"/>
+            <a:srgbClr val="152343"/>
+          </a:solidFill>
+          <a:ln w="12700">
+            <a:solidFill>
+              <a:srgbClr val="2C4478"/>
+            </a:solidFill>
+          </a:ln>
+          <a:effectLst/>
+        </p:spPr>
+        <p:style>
+          <a:lnRef idx="1">
+            <a:schemeClr val="accent1"/>
+          </a:lnRef>
+          <a:fillRef idx="3">
+            <a:schemeClr val="accent1"/>
+          </a:fillRef>
+          <a:effectRef idx="2">
+            <a:schemeClr val="accent1"/>
+          </a:effectRef>
+          <a:fontRef idx="minor">
+            <a:schemeClr val="lt1"/>
+          </a:fontRef>
+        </p:style>
+        <p:txBody>
+          <a:bodyPr rtlCol="0" anchor="ctr"/>
+          <a:lstStyle/>
+          <a:p>
+            <a:pPr algn="ctr"/>
+          </a:p>
+        </p:txBody>
+      </p:sp>
+      <p:sp>
+        <p:nvSpPr>
+          <p:cNvPr id="30" name="Rounded Rectangle 29"/>
+          <p:cNvSpPr/>
+          <p:nvPr/>
+        </p:nvSpPr>
+        <p:spPr>
+          <a:xfrm>
+            <a:off x="9740554" y="2706624"/>
+            <a:ext cx="749808" cy="749808"/>
+          </a:xfrm>
+          <a:prstGeom prst="roundRect">
+            <a:avLst>
+              <a:gd name="adj" fmla="val 50000"/>
+            </a:avLst>
+          </a:prstGeom>
+          <a:solidFill>
+            <a:srgbClr val="1B2D55"/>
           </a:solidFill>
           <a:ln>
             <a:noFill/>
@@ -4362,16 +4709,40 @@
           </a:p>
         </p:txBody>
       </p:sp>
-      <p:sp>
-        <p:nvSpPr>
-          <p:cNvPr id="22" name="TextBox 21"/>
+      <p:pic>
+        <p:nvPicPr>
+          <p:cNvPr id="31" name="Picture 30" descr="send-7FC4FF-192-0.png"/>
+          <p:cNvPicPr>
+            <a:picLocks noChangeAspect="1"/>
+          </p:cNvPicPr>
+          <p:nvPr/>
+        </p:nvPicPr>
+        <p:blipFill>
+          <a:blip r:embed="rId8"/>
+          <a:stretch>
+            <a:fillRect/>
+          </a:stretch>
+        </p:blipFill>
+        <p:spPr>
+          <a:xfrm>
+            <a:off x="9943002" y="2909072"/>
+            <a:ext cx="344911" cy="344911"/>
+          </a:xfrm>
+          <a:prstGeom prst="rect">
+            <a:avLst/>
+          </a:prstGeom>
+        </p:spPr>
+      </p:pic>
+      <p:sp>
+        <p:nvSpPr>
+          <p:cNvPr id="32" name="TextBox 31"/>
           <p:cNvSpPr txBox="1"/>
           <p:nvPr/>
         </p:nvSpPr>
         <p:spPr>
           <a:xfrm>
-            <a:off x="1143000" y="4242816"/>
-            <a:ext cx="4587087" cy="362712"/>
+            <a:off x="9740554" y="3602736"/>
+            <a:ext cx="1527596" cy="475996"/>
           </a:xfrm>
           <a:prstGeom prst="rect">
             <a:avLst/>
@@ -4386,11 +4757,11 @@
           <a:p>
             <a:pPr algn="l">
               <a:lnSpc>
-                <a:spcPct val="120000"/>
+                <a:spcPct val="122000"/>
               </a:lnSpc>
             </a:pPr>
             <a:r>
-              <a:rPr sz="1900" b="1">
+              <a:rPr sz="1300" b="1">
                 <a:solidFill>
                   <a:srgbClr val="FFFFFF"/>
                 </a:solidFill>
@@ -4403,97 +4774,14 @@
       </p:sp>
       <p:sp>
         <p:nvSpPr>
-          <p:cNvPr id="23" name="TextBox 22"/>
+          <p:cNvPr id="33" name="TextBox 32"/>
           <p:cNvSpPr txBox="1"/>
           <p:nvPr/>
         </p:nvSpPr>
         <p:spPr>
           <a:xfrm>
-            <a:off x="1143000" y="4623816"/>
-            <a:ext cx="4587087" cy="313182"/>
-          </a:xfrm>
-          <a:prstGeom prst="rect">
-            <a:avLst/>
-          </a:prstGeom>
-          <a:noFill/>
-        </p:spPr>
-        <p:txBody>
-          <a:bodyPr wrap="square" lIns="0" rIns="0" tIns="0" bIns="0" anchor="t">
-            <a:spAutoFit/>
-          </a:bodyPr>
-          <a:lstStyle/>
-          <a:p>
-            <a:pPr algn="l">
-              <a:lnSpc>
-                <a:spcPct val="135000"/>
-              </a:lnSpc>
-            </a:pPr>
-            <a:r>
-              <a:rPr sz="1400" b="0">
-                <a:solidFill>
-                  <a:srgbClr val="9FB6DC"/>
-                </a:solidFill>
-                <a:latin typeface="Inter"/>
-              </a:rPr>
-              <a:t>проверка, публикация, контроль выдачи</a:t>
-            </a:r>
-          </a:p>
-        </p:txBody>
-      </p:sp>
-      <p:sp>
-        <p:nvSpPr>
-          <p:cNvPr id="24" name="Rectangle 23"/>
-          <p:cNvSpPr/>
-          <p:nvPr/>
-        </p:nvSpPr>
-        <p:spPr>
-          <a:xfrm>
-            <a:off x="685800" y="5221224"/>
-            <a:ext cx="10820095" cy="10972"/>
-          </a:xfrm>
-          <a:prstGeom prst="rect">
-            <a:avLst/>
-          </a:prstGeom>
-          <a:solidFill>
-            <a:srgbClr val="3E5C9C"/>
-          </a:solidFill>
-          <a:ln>
-            <a:noFill/>
-          </a:ln>
-          <a:effectLst/>
-        </p:spPr>
-        <p:style>
-          <a:lnRef idx="1">
-            <a:schemeClr val="accent1"/>
-          </a:lnRef>
-          <a:fillRef idx="3">
-            <a:schemeClr val="accent1"/>
-          </a:fillRef>
-          <a:effectRef idx="2">
-            <a:schemeClr val="accent1"/>
-          </a:effectRef>
-          <a:fontRef idx="minor">
-            <a:schemeClr val="lt1"/>
-          </a:fontRef>
-        </p:style>
-        <p:txBody>
-          <a:bodyPr rtlCol="0" anchor="ctr"/>
-          <a:lstStyle/>
-          <a:p>
-            <a:pPr algn="ctr"/>
-          </a:p>
-        </p:txBody>
-      </p:sp>
-      <p:sp>
-        <p:nvSpPr>
-          <p:cNvPr id="25" name="TextBox 24"/>
-          <p:cNvSpPr txBox="1"/>
-          <p:nvPr/>
-        </p:nvSpPr>
-        <p:spPr>
-          <a:xfrm>
-            <a:off x="685800" y="5440680"/>
-            <a:ext cx="10820095" cy="357632"/>
+            <a:off x="9740554" y="4279392"/>
+            <a:ext cx="1527596" cy="553211"/>
           </a:xfrm>
           <a:prstGeom prst="rect">
             <a:avLst/>
@@ -4512,36 +4800,27 @@
               </a:lnSpc>
             </a:pPr>
             <a:r>
-              <a:rPr sz="1600" b="1">
-                <a:solidFill>
-                  <a:srgbClr val="FFFFFF"/>
+              <a:rPr sz="1350" b="0">
+                <a:solidFill>
+                  <a:srgbClr val="D6E4FF"/>
                 </a:solidFill>
                 <a:latin typeface="Inter"/>
               </a:rPr>
-              <a:t>Автопубликация: </a:t>
-            </a:r>
-            <a:r>
-              <a:rPr sz="1600" b="0">
-                <a:solidFill>
-                  <a:srgbClr val="D6E4FF"/>
-                </a:solidFill>
-                <a:latin typeface="Inter"/>
-              </a:rPr>
-              <a:t>Telegram · VK · Дзен · Одноклассники · Max · Instagram*</a:t>
-            </a:r>
-          </a:p>
-        </p:txBody>
-      </p:sp>
-      <p:sp>
-        <p:nvSpPr>
-          <p:cNvPr id="26" name="TextBox 25"/>
+              <a:t>Проверка и публикация</a:t>
+            </a:r>
+          </a:p>
+        </p:txBody>
+      </p:sp>
+      <p:sp>
+        <p:nvSpPr>
+          <p:cNvPr id="34" name="TextBox 33"/>
           <p:cNvSpPr txBox="1"/>
           <p:nvPr/>
         </p:nvSpPr>
         <p:spPr>
           <a:xfrm>
-            <a:off x="685800" y="5908040"/>
-            <a:ext cx="10820095" cy="339852"/>
+            <a:off x="685800" y="5349240"/>
+            <a:ext cx="10820095" cy="375411"/>
           </a:xfrm>
           <a:prstGeom prst="rect">
             <a:avLst/>
@@ -4560,16 +4839,64 @@
               </a:lnSpc>
             </a:pPr>
             <a:r>
-              <a:rPr sz="1500" b="1">
+              <a:rPr sz="1700" b="1">
                 <a:solidFill>
                   <a:srgbClr val="FFFFFF"/>
                 </a:solidFill>
                 <a:latin typeface="Inter"/>
               </a:rPr>
+              <a:t>Автопубликация: </a:t>
+            </a:r>
+            <a:r>
+              <a:rPr sz="1700" b="0">
+                <a:solidFill>
+                  <a:srgbClr val="D6E4FF"/>
+                </a:solidFill>
+                <a:latin typeface="Inter"/>
+              </a:rPr>
+              <a:t>Telegram · VK · Дзен · Одноклассники · Max · Instagram*</a:t>
+            </a:r>
+          </a:p>
+        </p:txBody>
+      </p:sp>
+      <p:sp>
+        <p:nvSpPr>
+          <p:cNvPr id="35" name="TextBox 34"/>
+          <p:cNvSpPr txBox="1"/>
+          <p:nvPr/>
+        </p:nvSpPr>
+        <p:spPr>
+          <a:xfrm>
+            <a:off x="685800" y="5852668"/>
+            <a:ext cx="10820095" cy="357632"/>
+          </a:xfrm>
+          <a:prstGeom prst="rect">
+            <a:avLst/>
+          </a:prstGeom>
+          <a:noFill/>
+        </p:spPr>
+        <p:txBody>
+          <a:bodyPr wrap="square" lIns="0" rIns="0" tIns="0" bIns="0" anchor="t">
+            <a:spAutoFit/>
+          </a:bodyPr>
+          <a:lstStyle/>
+          <a:p>
+            <a:pPr algn="l">
+              <a:lnSpc>
+                <a:spcPct val="140000"/>
+              </a:lnSpc>
+            </a:pPr>
+            <a:r>
+              <a:rPr sz="1600" b="1">
+                <a:solidFill>
+                  <a:srgbClr val="FFFFFF"/>
+                </a:solidFill>
+                <a:latin typeface="Inter"/>
+              </a:rPr>
               <a:t>Сверх цикла: </a:t>
             </a:r>
             <a:r>
-              <a:rPr sz="1500" b="0">
+              <a:rPr sz="1600" b="0">
                 <a:solidFill>
                   <a:srgbClr val="9FB6DC"/>
                 </a:solidFill>
@@ -4582,13 +4909,13 @@
       </p:sp>
       <p:sp>
         <p:nvSpPr>
-          <p:cNvPr id="27" name="TextBox 26"/>
+          <p:cNvPr id="36" name="TextBox 35"/>
           <p:cNvSpPr txBox="1"/>
           <p:nvPr/>
         </p:nvSpPr>
         <p:spPr>
           <a:xfrm>
-            <a:off x="685800" y="6412484"/>
+            <a:off x="685800" y="6356604"/>
             <a:ext cx="10820095" cy="236029"/>
           </a:xfrm>
           <a:prstGeom prst="rect">

--- a/pressa/press-kit-genii-prompter.pptx
+++ b/pressa/press-kit-genii-prompter.pptx
@@ -8717,248 +8717,9 @@
           </a:p>
         </p:txBody>
       </p:sp>
-      <p:sp>
-        <p:nvSpPr>
-          <p:cNvPr id="8" name="TextBox 7"/>
-          <p:cNvSpPr txBox="1"/>
-          <p:nvPr/>
-        </p:nvSpPr>
-        <p:spPr>
-          <a:xfrm>
-            <a:off x="685800" y="1325880"/>
-            <a:ext cx="7680960" cy="1097280"/>
-          </a:xfrm>
-          <a:prstGeom prst="rect">
-            <a:avLst/>
-          </a:prstGeom>
-          <a:noFill/>
-        </p:spPr>
-        <p:txBody>
-          <a:bodyPr wrap="square" lIns="0" rIns="0" tIns="0" bIns="0" anchor="t">
-            <a:spAutoFit/>
-          </a:bodyPr>
-          <a:lstStyle/>
-          <a:p>
-            <a:pPr algn="l">
-              <a:lnSpc>
-                <a:spcPct val="112000"/>
-              </a:lnSpc>
-            </a:pPr>
-            <a:r>
-              <a:rPr sz="3600" b="1">
-                <a:solidFill>
-                  <a:srgbClr val="FFFFFF"/>
-                </a:solidFill>
-                <a:latin typeface="Unbounded"/>
-              </a:rPr>
-              <a:t>Руслан Анатольевич Дёмин</a:t>
-            </a:r>
-          </a:p>
-        </p:txBody>
-      </p:sp>
-      <p:sp>
-        <p:nvSpPr>
-          <p:cNvPr id="9" name="TextBox 8"/>
-          <p:cNvSpPr txBox="1"/>
-          <p:nvPr/>
-        </p:nvSpPr>
-        <p:spPr>
-          <a:xfrm>
-            <a:off x="685800" y="2532888"/>
-            <a:ext cx="7315200" cy="386842"/>
-          </a:xfrm>
-          <a:prstGeom prst="rect">
-            <a:avLst/>
-          </a:prstGeom>
-          <a:noFill/>
-        </p:spPr>
-        <p:txBody>
-          <a:bodyPr wrap="square" lIns="0" rIns="0" tIns="0" bIns="0" anchor="t">
-            <a:spAutoFit/>
-          </a:bodyPr>
-          <a:lstStyle/>
-          <a:p>
-            <a:pPr algn="l">
-              <a:lnSpc>
-                <a:spcPct val="130000"/>
-              </a:lnSpc>
-            </a:pPr>
-            <a:r>
-              <a:rPr sz="1900" b="0">
-                <a:solidFill>
-                  <a:srgbClr val="9FB6DC"/>
-                </a:solidFill>
-                <a:latin typeface="Inter"/>
-              </a:rPr>
-              <a:t>управляющий партнёр</a:t>
-            </a:r>
-          </a:p>
-        </p:txBody>
-      </p:sp>
-      <p:sp>
-        <p:nvSpPr>
-          <p:cNvPr id="10" name="Rectangle 9"/>
-          <p:cNvSpPr/>
-          <p:nvPr/>
-        </p:nvSpPr>
-        <p:spPr>
-          <a:xfrm>
-            <a:off x="685800" y="3230626"/>
-            <a:ext cx="2011680" cy="32004"/>
-          </a:xfrm>
-          <a:prstGeom prst="rect">
-            <a:avLst/>
-          </a:prstGeom>
-          <a:solidFill>
-            <a:srgbClr val="7FC4FF"/>
-          </a:solidFill>
-          <a:ln>
-            <a:noFill/>
-          </a:ln>
-          <a:effectLst/>
-        </p:spPr>
-        <p:style>
-          <a:lnRef idx="1">
-            <a:schemeClr val="accent1"/>
-          </a:lnRef>
-          <a:fillRef idx="3">
-            <a:schemeClr val="accent1"/>
-          </a:fillRef>
-          <a:effectRef idx="2">
-            <a:schemeClr val="accent1"/>
-          </a:effectRef>
-          <a:fontRef idx="minor">
-            <a:schemeClr val="lt1"/>
-          </a:fontRef>
-        </p:style>
-        <p:txBody>
-          <a:bodyPr rtlCol="0" anchor="ctr"/>
-          <a:lstStyle/>
-          <a:p>
-            <a:pPr algn="ctr"/>
-          </a:p>
-        </p:txBody>
-      </p:sp>
-      <p:sp>
-        <p:nvSpPr>
-          <p:cNvPr id="11" name="TextBox 10"/>
-          <p:cNvSpPr txBox="1"/>
-          <p:nvPr/>
-        </p:nvSpPr>
-        <p:spPr>
-          <a:xfrm>
-            <a:off x="685800" y="3504946"/>
-            <a:ext cx="7315200" cy="403352"/>
-          </a:xfrm>
-          <a:prstGeom prst="rect">
-            <a:avLst/>
-          </a:prstGeom>
-          <a:noFill/>
-        </p:spPr>
-        <p:txBody>
-          <a:bodyPr wrap="square" lIns="0" rIns="0" tIns="0" bIns="0" anchor="t">
-            <a:spAutoFit/>
-          </a:bodyPr>
-          <a:lstStyle/>
-          <a:p>
-            <a:pPr algn="l">
-              <a:lnSpc>
-                <a:spcPct val="130000"/>
-              </a:lnSpc>
-            </a:pPr>
-            <a:r>
-              <a:rPr sz="2000" b="1">
-                <a:solidFill>
-                  <a:srgbClr val="FFFFFF"/>
-                </a:solidFill>
-                <a:latin typeface="Inter"/>
-              </a:rPr>
-              <a:t>+7 906 758-77-77</a:t>
-            </a:r>
-          </a:p>
-        </p:txBody>
-      </p:sp>
-      <p:sp>
-        <p:nvSpPr>
-          <p:cNvPr id="12" name="TextBox 11"/>
-          <p:cNvSpPr txBox="1"/>
-          <p:nvPr/>
-        </p:nvSpPr>
-        <p:spPr>
-          <a:xfrm>
-            <a:off x="685800" y="3944874"/>
-            <a:ext cx="7315200" cy="403352"/>
-          </a:xfrm>
-          <a:prstGeom prst="rect">
-            <a:avLst/>
-          </a:prstGeom>
-          <a:noFill/>
-        </p:spPr>
-        <p:txBody>
-          <a:bodyPr wrap="square" lIns="0" rIns="0" tIns="0" bIns="0" anchor="t">
-            <a:spAutoFit/>
-          </a:bodyPr>
-          <a:lstStyle/>
-          <a:p>
-            <a:pPr algn="l">
-              <a:lnSpc>
-                <a:spcPct val="130000"/>
-              </a:lnSpc>
-            </a:pPr>
-            <a:r>
-              <a:rPr sz="2000" b="1">
-                <a:solidFill>
-                  <a:srgbClr val="FFFFFF"/>
-                </a:solidFill>
-                <a:latin typeface="Inter"/>
-              </a:rPr>
-              <a:t>prompter.moscow@mail.ru</a:t>
-            </a:r>
-          </a:p>
-        </p:txBody>
-      </p:sp>
-      <p:sp>
-        <p:nvSpPr>
-          <p:cNvPr id="13" name="TextBox 12"/>
-          <p:cNvSpPr txBox="1"/>
-          <p:nvPr/>
-        </p:nvSpPr>
-        <p:spPr>
-          <a:xfrm>
-            <a:off x="685800" y="4384802"/>
-            <a:ext cx="7315200" cy="403352"/>
-          </a:xfrm>
-          <a:prstGeom prst="rect">
-            <a:avLst/>
-          </a:prstGeom>
-          <a:noFill/>
-        </p:spPr>
-        <p:txBody>
-          <a:bodyPr wrap="square" lIns="0" rIns="0" tIns="0" bIns="0" anchor="t">
-            <a:spAutoFit/>
-          </a:bodyPr>
-          <a:lstStyle/>
-          <a:p>
-            <a:pPr algn="l">
-              <a:lnSpc>
-                <a:spcPct val="130000"/>
-              </a:lnSpc>
-            </a:pPr>
-            <a:r>
-              <a:rPr sz="2000" b="1">
-                <a:solidFill>
-                  <a:srgbClr val="7FC4FF"/>
-                </a:solidFill>
-                <a:latin typeface="Inter"/>
-              </a:rPr>
-              <a:t>prompter-ai.moscow   ·   genii-ai.ru</a:t>
-            </a:r>
-          </a:p>
-        </p:txBody>
-      </p:sp>
       <p:pic>
         <p:nvPicPr>
-          <p:cNvPr id="14" name="Picture 13" descr="press-qr.png"/>
+          <p:cNvPr id="8" name="Picture 7" descr="press-qr.png"/>
           <p:cNvPicPr>
             <a:picLocks noChangeAspect="1"/>
           </p:cNvPicPr>
@@ -8972,8 +8733,8 @@
         </p:blipFill>
         <p:spPr>
           <a:xfrm>
-            <a:off x="9859975" y="1554480"/>
-            <a:ext cx="1645920" cy="1645920"/>
+            <a:off x="9402775" y="1600200"/>
+            <a:ext cx="2103120" cy="2103120"/>
           </a:xfrm>
           <a:prstGeom prst="rect">
             <a:avLst/>
@@ -8982,7 +8743,202 @@
       </p:pic>
       <p:sp>
         <p:nvSpPr>
-          <p:cNvPr id="15" name="Rectangle 14"/>
+          <p:cNvPr id="9" name="TextBox 8"/>
+          <p:cNvSpPr txBox="1"/>
+          <p:nvPr/>
+        </p:nvSpPr>
+        <p:spPr>
+          <a:xfrm>
+            <a:off x="8854135" y="3904487"/>
+            <a:ext cx="2651760" cy="353822"/>
+          </a:xfrm>
+          <a:prstGeom prst="rect">
+            <a:avLst/>
+          </a:prstGeom>
+          <a:noFill/>
+        </p:spPr>
+        <p:txBody>
+          <a:bodyPr wrap="square" lIns="0" rIns="0" tIns="0" bIns="0" anchor="t">
+            <a:spAutoFit/>
+          </a:bodyPr>
+          <a:lstStyle/>
+          <a:p>
+            <a:pPr algn="ctr">
+              <a:lnSpc>
+                <a:spcPct val="130000"/>
+              </a:lnSpc>
+            </a:pPr>
+            <a:r>
+              <a:rPr sz="1700" b="1">
+                <a:solidFill>
+                  <a:srgbClr val="FFFFFF"/>
+                </a:solidFill>
+                <a:latin typeface="Inter"/>
+              </a:rPr>
+              <a:t>prompter-ai.moscow</a:t>
+            </a:r>
+          </a:p>
+        </p:txBody>
+      </p:sp>
+      <p:sp>
+        <p:nvSpPr>
+          <p:cNvPr id="10" name="TextBox 9"/>
+          <p:cNvSpPr txBox="1"/>
+          <p:nvPr/>
+        </p:nvSpPr>
+        <p:spPr>
+          <a:xfrm>
+            <a:off x="8854135" y="4258310"/>
+            <a:ext cx="2651760" cy="304292"/>
+          </a:xfrm>
+          <a:prstGeom prst="rect">
+            <a:avLst/>
+          </a:prstGeom>
+          <a:noFill/>
+        </p:spPr>
+        <p:txBody>
+          <a:bodyPr wrap="square" lIns="0" rIns="0" tIns="0" bIns="0" anchor="t">
+            <a:spAutoFit/>
+          </a:bodyPr>
+          <a:lstStyle/>
+          <a:p>
+            <a:pPr algn="ctr">
+              <a:lnSpc>
+                <a:spcPct val="130000"/>
+              </a:lnSpc>
+            </a:pPr>
+            <a:r>
+              <a:rPr sz="1400" b="0">
+                <a:solidFill>
+                  <a:srgbClr val="7FC4FF"/>
+                </a:solidFill>
+                <a:latin typeface="Inter"/>
+              </a:rPr>
+              <a:t>SEO и GEO</a:t>
+            </a:r>
+          </a:p>
+        </p:txBody>
+      </p:sp>
+      <p:sp>
+        <p:nvSpPr>
+          <p:cNvPr id="11" name="TextBox 10"/>
+          <p:cNvSpPr txBox="1"/>
+          <p:nvPr/>
+        </p:nvSpPr>
+        <p:spPr>
+          <a:xfrm>
+            <a:off x="685800" y="1554480"/>
+            <a:ext cx="7985455" cy="727456"/>
+          </a:xfrm>
+          <a:prstGeom prst="rect">
+            <a:avLst/>
+          </a:prstGeom>
+          <a:noFill/>
+        </p:spPr>
+        <p:txBody>
+          <a:bodyPr wrap="square" lIns="0" rIns="0" tIns="0" bIns="0" anchor="t">
+            <a:spAutoFit/>
+          </a:bodyPr>
+          <a:lstStyle/>
+          <a:p>
+            <a:pPr algn="l">
+              <a:lnSpc>
+                <a:spcPct val="112000"/>
+              </a:lnSpc>
+            </a:pPr>
+            <a:r>
+              <a:rPr sz="4600" b="1">
+                <a:solidFill>
+                  <a:srgbClr val="FFFFFF"/>
+                </a:solidFill>
+                <a:latin typeface="Unbounded"/>
+              </a:rPr>
+              <a:t>Полный AI цикл</a:t>
+            </a:r>
+          </a:p>
+        </p:txBody>
+      </p:sp>
+      <p:sp>
+        <p:nvSpPr>
+          <p:cNvPr id="12" name="TextBox 11"/>
+          <p:cNvSpPr txBox="1"/>
+          <p:nvPr/>
+        </p:nvSpPr>
+        <p:spPr>
+          <a:xfrm>
+            <a:off x="685800" y="2592832"/>
+            <a:ext cx="7985455" cy="758952"/>
+          </a:xfrm>
+          <a:prstGeom prst="rect">
+            <a:avLst/>
+          </a:prstGeom>
+          <a:noFill/>
+        </p:spPr>
+        <p:txBody>
+          <a:bodyPr wrap="square" lIns="0" rIns="0" tIns="0" bIns="0" anchor="t">
+            <a:spAutoFit/>
+          </a:bodyPr>
+          <a:lstStyle/>
+          <a:p>
+            <a:pPr algn="l">
+              <a:lnSpc>
+                <a:spcPct val="150000"/>
+              </a:lnSpc>
+            </a:pPr>
+            <a:r>
+              <a:rPr sz="1800" b="0">
+                <a:solidFill>
+                  <a:srgbClr val="D6E4FF"/>
+                </a:solidFill>
+                <a:latin typeface="Inter"/>
+              </a:rPr>
+              <a:t>Исследование, генерация контента, автоматическая публикация на площадках, аналитика нейровыдачи.</a:t>
+            </a:r>
+          </a:p>
+        </p:txBody>
+      </p:sp>
+      <p:sp>
+        <p:nvSpPr>
+          <p:cNvPr id="13" name="TextBox 12"/>
+          <p:cNvSpPr txBox="1"/>
+          <p:nvPr/>
+        </p:nvSpPr>
+        <p:spPr>
+          <a:xfrm>
+            <a:off x="685800" y="3552952"/>
+            <a:ext cx="7985455" cy="758952"/>
+          </a:xfrm>
+          <a:prstGeom prst="rect">
+            <a:avLst/>
+          </a:prstGeom>
+          <a:noFill/>
+        </p:spPr>
+        <p:txBody>
+          <a:bodyPr wrap="square" lIns="0" rIns="0" tIns="0" bIns="0" anchor="t">
+            <a:spAutoFit/>
+          </a:bodyPr>
+          <a:lstStyle/>
+          <a:p>
+            <a:pPr algn="l">
+              <a:lnSpc>
+                <a:spcPct val="150000"/>
+              </a:lnSpc>
+            </a:pPr>
+            <a:r>
+              <a:rPr sz="1800" b="0">
+                <a:solidFill>
+                  <a:srgbClr val="D6E4FF"/>
+                </a:solidFill>
+                <a:latin typeface="Inter"/>
+              </a:rPr>
+              <a:t>Интеллектуальный сервис для автоматизации SMM и усиления цифрового присутствия компании в интернете.</a:t>
+            </a:r>
+          </a:p>
+        </p:txBody>
+      </p:sp>
+      <p:sp>
+        <p:nvSpPr>
+          <p:cNvPr id="14" name="Rectangle 13"/>
           <p:cNvSpPr/>
           <p:nvPr/>
         </p:nvSpPr>
@@ -9026,14 +8982,53 @@
       </p:sp>
       <p:sp>
         <p:nvSpPr>
+          <p:cNvPr id="15" name="TextBox 14"/>
+          <p:cNvSpPr txBox="1"/>
+          <p:nvPr/>
+        </p:nvSpPr>
+        <p:spPr>
+          <a:xfrm>
+            <a:off x="685800" y="5486400"/>
+            <a:ext cx="10820095" cy="398907"/>
+          </a:xfrm>
+          <a:prstGeom prst="rect">
+            <a:avLst/>
+          </a:prstGeom>
+          <a:noFill/>
+        </p:spPr>
+        <p:txBody>
+          <a:bodyPr wrap="square" lIns="0" rIns="0" tIns="0" bIns="0" anchor="t">
+            <a:spAutoFit/>
+          </a:bodyPr>
+          <a:lstStyle/>
+          <a:p>
+            <a:pPr algn="l">
+              <a:lnSpc>
+                <a:spcPct val="135000"/>
+              </a:lnSpc>
+            </a:pPr>
+            <a:r>
+              <a:rPr sz="1900" b="1">
+                <a:solidFill>
+                  <a:srgbClr val="FFFFFF"/>
+                </a:solidFill>
+                <a:latin typeface="Inter"/>
+              </a:rPr>
+              <a:t>+7 906 758-77-77     @geniimoscow     prompter.moscow@mail.ru</a:t>
+            </a:r>
+          </a:p>
+        </p:txBody>
+      </p:sp>
+      <p:sp>
+        <p:nvSpPr>
           <p:cNvPr id="16" name="TextBox 15"/>
           <p:cNvSpPr txBox="1"/>
           <p:nvPr/>
         </p:nvSpPr>
         <p:spPr>
           <a:xfrm>
-            <a:off x="685800" y="5486400"/>
-            <a:ext cx="10820095" cy="517652"/>
+            <a:off x="685800" y="5976747"/>
+            <a:ext cx="10820095" cy="295402"/>
           </a:xfrm>
           <a:prstGeom prst="rect">
             <a:avLst/>
@@ -9052,13 +9047,13 @@
               </a:lnSpc>
             </a:pPr>
             <a:r>
-              <a:rPr sz="1250" b="1">
-                <a:solidFill>
-                  <a:srgbClr val="7FC4FF"/>
+              <a:rPr sz="1250" b="0">
+                <a:solidFill>
+                  <a:srgbClr val="9FB6DC"/>
                 </a:solidFill>
                 <a:latin typeface="Inter"/>
               </a:rPr>
-              <a:t>Промптер — </a:t>
+              <a:t>Руслан Анатольевич Дёмин, управляющий партнёр</a:t>
             </a:r>
             <a:r>
               <a:rPr sz="1250" b="0">
@@ -9067,55 +9062,7 @@
                 </a:solidFill>
                 <a:latin typeface="Inter"/>
               </a:rPr>
-              <a:t>российский сервис автоматизации SMM: исследование ниши, стратегия, генерация текстов, изображений и видео, публикация на 6+ площадках.</a:t>
-            </a:r>
-          </a:p>
-        </p:txBody>
-      </p:sp>
-      <p:sp>
-        <p:nvSpPr>
-          <p:cNvPr id="17" name="TextBox 16"/>
-          <p:cNvSpPr txBox="1"/>
-          <p:nvPr/>
-        </p:nvSpPr>
-        <p:spPr>
-          <a:xfrm>
-            <a:off x="685800" y="6058915"/>
-            <a:ext cx="10820095" cy="295402"/>
-          </a:xfrm>
-          <a:prstGeom prst="rect">
-            <a:avLst/>
-          </a:prstGeom>
-          <a:noFill/>
-        </p:spPr>
-        <p:txBody>
-          <a:bodyPr wrap="square" lIns="0" rIns="0" tIns="0" bIns="0" anchor="t">
-            <a:spAutoFit/>
-          </a:bodyPr>
-          <a:lstStyle/>
-          <a:p>
-            <a:pPr algn="l">
-              <a:lnSpc>
-                <a:spcPct val="140000"/>
-              </a:lnSpc>
-            </a:pPr>
-            <a:r>
-              <a:rPr sz="1250" b="1">
-                <a:solidFill>
-                  <a:srgbClr val="7FC4FF"/>
-                </a:solidFill>
-                <a:latin typeface="Inter"/>
-              </a:rPr>
-              <a:t>ГенИИ — </a:t>
-            </a:r>
-            <a:r>
-              <a:rPr sz="1250" b="0">
-                <a:solidFill>
-                  <a:srgbClr val="9FB6DC"/>
-                </a:solidFill>
-                <a:latin typeface="Inter"/>
-              </a:rPr>
-              <a:t>официальный партнёр «Промптера» по Москве и области. Продвижение компаний в ответах нейросетей: SEO и GEO.</a:t>
+              <a:t>     ГенИИ — официальный партнёр «Промптера» по Москве и области</a:t>
             </a:r>
           </a:p>
         </p:txBody>
